--- a/output/KI_Steuerhinterziehung_NEU.pptx
+++ b/output/KI_Steuerhinterziehung_NEU.pptx
@@ -22,6 +22,9 @@
     <p:sldId id="270" r:id="rId21"/>
     <p:sldId id="271" r:id="rId22"/>
     <p:sldId id="272" r:id="rId23"/>
+    <p:sldId id="273" r:id="rId24"/>
+    <p:sldId id="274" r:id="rId25"/>
+    <p:sldId id="275" r:id="rId26"/>
   </p:sldIdLst>
   <p:sldSz cx="12191695" cy="6858000" type="screen4x3"/>
   <p:notesSz cx="6858000" cy="9144000"/>
@@ -3204,7 +3207,7 @@
           <a:p>
             <a:pPr algn="l"/>
             <a:r>
-              <a:rPr sz="1400" b="1">
+              <a:rPr sz="1400" b="1" i="0">
                 <a:solidFill>
                   <a:srgbClr val="00C2A8"/>
                 </a:solidFill>
@@ -3239,7 +3242,7 @@
           <a:p>
             <a:pPr algn="l"/>
             <a:r>
-              <a:rPr sz="3600" b="1">
+              <a:rPr sz="3600" b="1" i="0">
                 <a:solidFill>
                   <a:srgbClr val="FFFFFF"/>
                 </a:solidFill>
@@ -3251,7 +3254,7 @@
           <a:p>
             <a:pPr algn="l"/>
             <a:r>
-              <a:rPr sz="3600" b="1">
+              <a:rPr sz="3600" b="1" i="0">
                 <a:solidFill>
                   <a:srgbClr val="FFFFFF"/>
                 </a:solidFill>
@@ -3263,7 +3266,7 @@
           <a:p>
             <a:pPr algn="l"/>
             <a:r>
-              <a:rPr sz="3600" b="1">
+              <a:rPr sz="3600" b="1" i="0">
                 <a:solidFill>
                   <a:srgbClr val="FFFFFF"/>
                 </a:solidFill>
@@ -3342,7 +3345,7 @@
           <a:p>
             <a:pPr algn="l"/>
             <a:r>
-              <a:rPr sz="1800" b="1">
+              <a:rPr sz="1800" b="1" i="0">
                 <a:solidFill>
                   <a:srgbClr val="E4B84C"/>
                 </a:solidFill>
@@ -3377,7 +3380,7 @@
           <a:p>
             <a:pPr algn="l"/>
             <a:r>
-              <a:rPr sz="1400" b="0">
+              <a:rPr sz="1400" b="0" i="0">
                 <a:solidFill>
                   <a:srgbClr val="B8C2D6"/>
                 </a:solidFill>
@@ -3570,7 +3573,7 @@
           <a:p>
             <a:pPr algn="l"/>
             <a:r>
-              <a:rPr sz="2600" b="1">
+              <a:rPr sz="2600" b="1" i="0">
                 <a:solidFill>
                   <a:srgbClr val="FFFFFF"/>
                 </a:solidFill>
@@ -3605,7 +3608,7 @@
           <a:p>
             <a:pPr algn="r"/>
             <a:r>
-              <a:rPr sz="1200" b="0">
+              <a:rPr sz="1200" b="0" i="0">
                 <a:solidFill>
                   <a:srgbClr val="00C2A8"/>
                 </a:solidFill>
@@ -3642,52 +3645,19 @@
       </p:pic>
       <p:sp>
         <p:nvSpPr>
-          <p:cNvPr id="7" name="TextBox 6"/>
-          <p:cNvSpPr txBox="1"/>
-          <p:nvPr/>
-        </p:nvSpPr>
-        <p:spPr>
-          <a:xfrm>
-            <a:off x="6858000" y="1280160"/>
-            <a:ext cx="4846320" cy="457200"/>
-          </a:xfrm>
-          <a:prstGeom prst="rect">
-            <a:avLst/>
-          </a:prstGeom>
-          <a:noFill/>
-        </p:spPr>
-        <p:txBody>
-          <a:bodyPr wrap="square" lIns="45720" rIns="45720" tIns="18288" bIns="18288" anchor="t">
-            <a:spAutoFit/>
-          </a:bodyPr>
-          <a:lstStyle/>
-          <a:p>
-            <a:pPr algn="l"/>
-            <a:r>
-              <a:rPr sz="2000" b="1">
-                <a:solidFill>
-                  <a:srgbClr val="0B1E3F"/>
-                </a:solidFill>
-                <a:latin typeface="Calibri"/>
-              </a:rPr>
-              <a:t>Kernaussagen</a:t>
-            </a:r>
-          </a:p>
-        </p:txBody>
-      </p:sp>
-      <p:sp>
-        <p:nvSpPr>
-          <p:cNvPr id="8" name="Rectangle 7"/>
+          <p:cNvPr id="7" name="Rounded Rectangle 6"/>
           <p:cNvSpPr/>
           <p:nvPr/>
         </p:nvSpPr>
         <p:spPr>
           <a:xfrm>
-            <a:off x="6858000" y="1783080"/>
-            <a:ext cx="1097280" cy="45720"/>
-          </a:xfrm>
-          <a:prstGeom prst="rect">
-            <a:avLst/>
+            <a:off x="6858000" y="1554480"/>
+            <a:ext cx="4846320" cy="502920"/>
+          </a:xfrm>
+          <a:prstGeom prst="roundRect">
+            <a:avLst>
+              <a:gd name="adj" fmla="val 50000"/>
+            </a:avLst>
           </a:prstGeom>
           <a:solidFill>
             <a:srgbClr val="00C2A8"/>
@@ -3712,22 +3682,31 @@
           </a:fontRef>
         </p:style>
         <p:txBody>
-          <a:bodyPr rtlCol="0" anchor="ctr"/>
-          <a:lstStyle/>
-          <a:p>
-            <a:pPr algn="ctr"/>
-          </a:p>
-        </p:txBody>
-      </p:sp>
-      <p:sp>
-        <p:nvSpPr>
-          <p:cNvPr id="9" name="Rounded Rectangle 8"/>
+          <a:bodyPr rtlCol="0" anchor="ctr" tIns="18288" bIns="18288"/>
+          <a:lstStyle/>
+          <a:p>
+            <a:pPr algn="ctr"/>
+            <a:r>
+              <a:rPr sz="1400" b="1">
+                <a:solidFill>
+                  <a:srgbClr val="0B1E3F"/>
+                </a:solidFill>
+                <a:latin typeface="Calibri"/>
+              </a:rPr>
+              <a:t>Nur 2,2 – 3,3 Mrd. € jährlich entdeckt</a:t>
+            </a:r>
+          </a:p>
+        </p:txBody>
+      </p:sp>
+      <p:sp>
+        <p:nvSpPr>
+          <p:cNvPr id="8" name="Rounded Rectangle 7"/>
           <p:cNvSpPr/>
           <p:nvPr/>
         </p:nvSpPr>
         <p:spPr>
           <a:xfrm>
-            <a:off x="6858000" y="2286000"/>
+            <a:off x="6858000" y="2240280"/>
             <a:ext cx="4846320" cy="502920"/>
           </a:xfrm>
           <a:prstGeom prst="roundRect">
@@ -3769,20 +3748,20 @@
                 </a:solidFill>
                 <a:latin typeface="Calibri"/>
               </a:rPr>
-              <a:t>Nur 2,2 – 3,3 Mrd. € jährlich entdeckt</a:t>
-            </a:r>
-          </a:p>
-        </p:txBody>
-      </p:sp>
-      <p:sp>
-        <p:nvSpPr>
-          <p:cNvPr id="10" name="Rounded Rectangle 9"/>
+              <a:t>27,4 Mrd. € Mehrsteuern in 10 Jahren</a:t>
+            </a:r>
+          </a:p>
+        </p:txBody>
+      </p:sp>
+      <p:sp>
+        <p:nvSpPr>
+          <p:cNvPr id="9" name="Rounded Rectangle 8"/>
           <p:cNvSpPr/>
           <p:nvPr/>
         </p:nvSpPr>
         <p:spPr>
           <a:xfrm>
-            <a:off x="6858000" y="2971800"/>
+            <a:off x="6858000" y="2926080"/>
             <a:ext cx="4846320" cy="502920"/>
           </a:xfrm>
           <a:prstGeom prst="roundRect">
@@ -3824,20 +3803,20 @@
                 </a:solidFill>
                 <a:latin typeface="Calibri"/>
               </a:rPr>
-              <a:t>27,4 Mrd. € Mehrsteuern in 10 Jahren</a:t>
-            </a:r>
-          </a:p>
-        </p:txBody>
-      </p:sp>
-      <p:sp>
-        <p:nvSpPr>
-          <p:cNvPr id="11" name="Rounded Rectangle 10"/>
+              <a:t>Geschätzter Verlust: 30 – 100 Mrd. € p. a.</a:t>
+            </a:r>
+          </a:p>
+        </p:txBody>
+      </p:sp>
+      <p:sp>
+        <p:nvSpPr>
+          <p:cNvPr id="10" name="Rounded Rectangle 9"/>
           <p:cNvSpPr/>
           <p:nvPr/>
         </p:nvSpPr>
         <p:spPr>
           <a:xfrm>
-            <a:off x="6858000" y="3657600"/>
+            <a:off x="6858000" y="3611880"/>
             <a:ext cx="4846320" cy="502920"/>
           </a:xfrm>
           <a:prstGeom prst="roundRect">
@@ -3879,29 +3858,62 @@
                 </a:solidFill>
                 <a:latin typeface="Calibri"/>
               </a:rPr>
-              <a:t>Geschätzter Verlust: 30 – 100 Mrd. € p. a.</a:t>
-            </a:r>
-          </a:p>
-        </p:txBody>
-      </p:sp>
-      <p:sp>
-        <p:nvSpPr>
-          <p:cNvPr id="12" name="Rounded Rectangle 11"/>
+              <a:t>Riesige Dunkelziffer → Bedarf für KI</a:t>
+            </a:r>
+          </a:p>
+        </p:txBody>
+      </p:sp>
+      <p:sp>
+        <p:nvSpPr>
+          <p:cNvPr id="11" name="TextBox 10"/>
+          <p:cNvSpPr txBox="1"/>
+          <p:nvPr/>
+        </p:nvSpPr>
+        <p:spPr>
+          <a:xfrm>
+            <a:off x="6858000" y="5303520"/>
+            <a:ext cx="4846320" cy="365760"/>
+          </a:xfrm>
+          <a:prstGeom prst="rect">
+            <a:avLst/>
+          </a:prstGeom>
+          <a:noFill/>
+        </p:spPr>
+        <p:txBody>
+          <a:bodyPr wrap="square" lIns="45720" rIns="45720" tIns="18288" bIns="18288" anchor="t">
+            <a:spAutoFit/>
+          </a:bodyPr>
+          <a:lstStyle/>
+          <a:p>
+            <a:pPr algn="l"/>
+            <a:r>
+              <a:rPr sz="1000" b="0" i="0">
+                <a:solidFill>
+                  <a:srgbClr val="6E7A8C"/>
+                </a:solidFill>
+                <a:latin typeface="Calibri"/>
+              </a:rPr>
+              <a:t>Quelle: BMF / Statista-Recherche</a:t>
+            </a:r>
+          </a:p>
+        </p:txBody>
+      </p:sp>
+      <p:sp>
+        <p:nvSpPr>
+          <p:cNvPr id="12" name="Rectangle 11"/>
           <p:cNvSpPr/>
           <p:nvPr/>
         </p:nvSpPr>
         <p:spPr>
           <a:xfrm>
-            <a:off x="6858000" y="4343400"/>
-            <a:ext cx="4846320" cy="502920"/>
-          </a:xfrm>
-          <a:prstGeom prst="roundRect">
-            <a:avLst>
-              <a:gd name="adj" fmla="val 50000"/>
-            </a:avLst>
-          </a:prstGeom>
-          <a:solidFill>
-            <a:srgbClr val="00C2A8"/>
+            <a:off x="0" y="6537960"/>
+            <a:ext cx="12191695" cy="320040"/>
+          </a:xfrm>
+          <a:prstGeom prst="rect">
+            <a:avLst/>
+          </a:prstGeom>
+          <a:solidFill>
+            <a:srgbClr val="07142E"/>
           </a:solidFill>
           <a:ln>
             <a:noFill/>
@@ -3923,104 +3935,16 @@
           </a:fontRef>
         </p:style>
         <p:txBody>
-          <a:bodyPr rtlCol="0" anchor="ctr" tIns="18288" bIns="18288"/>
-          <a:lstStyle/>
-          <a:p>
-            <a:pPr algn="ctr"/>
-            <a:r>
-              <a:rPr sz="1400" b="1">
-                <a:solidFill>
-                  <a:srgbClr val="0B1E3F"/>
-                </a:solidFill>
-                <a:latin typeface="Calibri"/>
-              </a:rPr>
-              <a:t>Riesige Dunkelziffer → Bedarf für KI</a:t>
-            </a:r>
+          <a:bodyPr rtlCol="0" anchor="ctr"/>
+          <a:lstStyle/>
+          <a:p>
+            <a:pPr algn="ctr"/>
           </a:p>
         </p:txBody>
       </p:sp>
       <p:sp>
         <p:nvSpPr>
           <p:cNvPr id="13" name="TextBox 12"/>
-          <p:cNvSpPr txBox="1"/>
-          <p:nvPr/>
-        </p:nvSpPr>
-        <p:spPr>
-          <a:xfrm>
-            <a:off x="6858000" y="5303520"/>
-            <a:ext cx="4846320" cy="365760"/>
-          </a:xfrm>
-          <a:prstGeom prst="rect">
-            <a:avLst/>
-          </a:prstGeom>
-          <a:noFill/>
-        </p:spPr>
-        <p:txBody>
-          <a:bodyPr wrap="square" lIns="45720" rIns="45720" tIns="18288" bIns="18288" anchor="t">
-            <a:spAutoFit/>
-          </a:bodyPr>
-          <a:lstStyle/>
-          <a:p>
-            <a:pPr algn="l"/>
-            <a:r>
-              <a:rPr sz="1000" b="0">
-                <a:solidFill>
-                  <a:srgbClr val="6E7A8C"/>
-                </a:solidFill>
-                <a:latin typeface="Calibri"/>
-              </a:rPr>
-              <a:t>Quelle: BMF / Statista-Recherche</a:t>
-            </a:r>
-          </a:p>
-        </p:txBody>
-      </p:sp>
-      <p:sp>
-        <p:nvSpPr>
-          <p:cNvPr id="14" name="Rectangle 13"/>
-          <p:cNvSpPr/>
-          <p:nvPr/>
-        </p:nvSpPr>
-        <p:spPr>
-          <a:xfrm>
-            <a:off x="0" y="6537960"/>
-            <a:ext cx="12191695" cy="320040"/>
-          </a:xfrm>
-          <a:prstGeom prst="rect">
-            <a:avLst/>
-          </a:prstGeom>
-          <a:solidFill>
-            <a:srgbClr val="07142E"/>
-          </a:solidFill>
-          <a:ln>
-            <a:noFill/>
-          </a:ln>
-          <a:effectLst/>
-        </p:spPr>
-        <p:style>
-          <a:lnRef idx="1">
-            <a:schemeClr val="accent1"/>
-          </a:lnRef>
-          <a:fillRef idx="3">
-            <a:schemeClr val="accent1"/>
-          </a:fillRef>
-          <a:effectRef idx="2">
-            <a:schemeClr val="accent1"/>
-          </a:effectRef>
-          <a:fontRef idx="minor">
-            <a:schemeClr val="lt1"/>
-          </a:fontRef>
-        </p:style>
-        <p:txBody>
-          <a:bodyPr rtlCol="0" anchor="ctr"/>
-          <a:lstStyle/>
-          <a:p>
-            <a:pPr algn="ctr"/>
-          </a:p>
-        </p:txBody>
-      </p:sp>
-      <p:sp>
-        <p:nvSpPr>
-          <p:cNvPr id="15" name="TextBox 14"/>
           <p:cNvSpPr txBox="1"/>
           <p:nvPr/>
         </p:nvSpPr>
@@ -4042,7 +3966,7 @@
           <a:p>
             <a:pPr algn="l"/>
             <a:r>
-              <a:rPr sz="1000" b="0">
+              <a:rPr sz="1000" b="0" i="0">
                 <a:solidFill>
                   <a:srgbClr val="B8C2D6"/>
                 </a:solidFill>
@@ -4055,7 +3979,7 @@
       </p:sp>
       <p:sp>
         <p:nvSpPr>
-          <p:cNvPr id="16" name="TextBox 15"/>
+          <p:cNvPr id="14" name="TextBox 13"/>
           <p:cNvSpPr txBox="1"/>
           <p:nvPr/>
         </p:nvSpPr>
@@ -4077,7 +4001,7 @@
           <a:p>
             <a:pPr algn="r"/>
             <a:r>
-              <a:rPr sz="1000" b="0">
+              <a:rPr sz="1000" b="0" i="0">
                 <a:solidFill>
                   <a:srgbClr val="00C2A8"/>
                 </a:solidFill>
@@ -4226,7 +4150,7 @@
           <a:p>
             <a:pPr algn="l"/>
             <a:r>
-              <a:rPr sz="2600" b="1">
+              <a:rPr sz="2600" b="1" i="0">
                 <a:solidFill>
                   <a:srgbClr val="FFFFFF"/>
                 </a:solidFill>
@@ -4261,7 +4185,7 @@
           <a:p>
             <a:pPr algn="r"/>
             <a:r>
-              <a:rPr sz="1200" b="0">
+              <a:rPr sz="1200" b="0" i="0">
                 <a:solidFill>
                   <a:srgbClr val="00C2A8"/>
                 </a:solidFill>
@@ -4298,52 +4222,19 @@
       </p:pic>
       <p:sp>
         <p:nvSpPr>
-          <p:cNvPr id="7" name="TextBox 6"/>
-          <p:cNvSpPr txBox="1"/>
-          <p:nvPr/>
-        </p:nvSpPr>
-        <p:spPr>
-          <a:xfrm>
-            <a:off x="7680960" y="1280160"/>
-            <a:ext cx="4114800" cy="457200"/>
-          </a:xfrm>
-          <a:prstGeom prst="rect">
-            <a:avLst/>
-          </a:prstGeom>
-          <a:noFill/>
-        </p:spPr>
-        <p:txBody>
-          <a:bodyPr wrap="square" lIns="45720" rIns="45720" tIns="18288" bIns="18288" anchor="t">
-            <a:spAutoFit/>
-          </a:bodyPr>
-          <a:lstStyle/>
-          <a:p>
-            <a:pPr algn="l"/>
-            <a:r>
-              <a:rPr sz="2000" b="1">
-                <a:solidFill>
-                  <a:srgbClr val="0B1E3F"/>
-                </a:solidFill>
-                <a:latin typeface="Calibri"/>
-              </a:rPr>
-              <a:t>Kernaussagen</a:t>
-            </a:r>
-          </a:p>
-        </p:txBody>
-      </p:sp>
-      <p:sp>
-        <p:nvSpPr>
-          <p:cNvPr id="8" name="Rectangle 7"/>
+          <p:cNvPr id="7" name="Rounded Rectangle 6"/>
           <p:cNvSpPr/>
           <p:nvPr/>
         </p:nvSpPr>
         <p:spPr>
           <a:xfrm>
-            <a:off x="7680960" y="1783080"/>
-            <a:ext cx="1097280" cy="45720"/>
-          </a:xfrm>
-          <a:prstGeom prst="rect">
-            <a:avLst/>
+            <a:off x="7680960" y="1554480"/>
+            <a:ext cx="4114800" cy="502920"/>
+          </a:xfrm>
+          <a:prstGeom prst="roundRect">
+            <a:avLst>
+              <a:gd name="adj" fmla="val 50000"/>
+            </a:avLst>
           </a:prstGeom>
           <a:solidFill>
             <a:srgbClr val="00C2A8"/>
@@ -4368,22 +4259,31 @@
           </a:fontRef>
         </p:style>
         <p:txBody>
-          <a:bodyPr rtlCol="0" anchor="ctr"/>
-          <a:lstStyle/>
-          <a:p>
-            <a:pPr algn="ctr"/>
-          </a:p>
-        </p:txBody>
-      </p:sp>
-      <p:sp>
-        <p:nvSpPr>
-          <p:cNvPr id="9" name="Rounded Rectangle 8"/>
+          <a:bodyPr rtlCol="0" anchor="ctr" tIns="18288" bIns="18288"/>
+          <a:lstStyle/>
+          <a:p>
+            <a:pPr algn="ctr"/>
+            <a:r>
+              <a:rPr sz="1400" b="1">
+                <a:solidFill>
+                  <a:srgbClr val="0B1E3F"/>
+                </a:solidFill>
+                <a:latin typeface="Calibri"/>
+              </a:rPr>
+              <a:t>Umsatzsteuer dominiert (966,2 Mio. €)</a:t>
+            </a:r>
+          </a:p>
+        </p:txBody>
+      </p:sp>
+      <p:sp>
+        <p:nvSpPr>
+          <p:cNvPr id="8" name="Rounded Rectangle 7"/>
           <p:cNvSpPr/>
           <p:nvPr/>
         </p:nvSpPr>
         <p:spPr>
           <a:xfrm>
-            <a:off x="7680960" y="2286000"/>
+            <a:off x="7680960" y="2240280"/>
             <a:ext cx="4114800" cy="502920"/>
           </a:xfrm>
           <a:prstGeom prst="roundRect">
@@ -4425,20 +4325,20 @@
                 </a:solidFill>
                 <a:latin typeface="Calibri"/>
               </a:rPr>
-              <a:t>Umsatzsteuer dominiert (966,2 Mio. €)</a:t>
-            </a:r>
-          </a:p>
-        </p:txBody>
-      </p:sp>
-      <p:sp>
-        <p:nvSpPr>
-          <p:cNvPr id="10" name="Rounded Rectangle 9"/>
+              <a:t>Einkommensteuer: 422,5 Mio. €</a:t>
+            </a:r>
+          </a:p>
+        </p:txBody>
+      </p:sp>
+      <p:sp>
+        <p:nvSpPr>
+          <p:cNvPr id="9" name="Rounded Rectangle 8"/>
           <p:cNvSpPr/>
           <p:nvPr/>
         </p:nvSpPr>
         <p:spPr>
           <a:xfrm>
-            <a:off x="7680960" y="2971800"/>
+            <a:off x="7680960" y="2926080"/>
             <a:ext cx="4114800" cy="502920"/>
           </a:xfrm>
           <a:prstGeom prst="roundRect">
@@ -4480,20 +4380,20 @@
                 </a:solidFill>
                 <a:latin typeface="Calibri"/>
               </a:rPr>
-              <a:t>Einkommensteuer: 422,5 Mio. €</a:t>
-            </a:r>
-          </a:p>
-        </p:txBody>
-      </p:sp>
-      <p:sp>
-        <p:nvSpPr>
-          <p:cNvPr id="11" name="Rounded Rectangle 10"/>
+              <a:t>Sonstige Steuern: 416,2 Mio. €</a:t>
+            </a:r>
+          </a:p>
+        </p:txBody>
+      </p:sp>
+      <p:sp>
+        <p:nvSpPr>
+          <p:cNvPr id="10" name="Rounded Rectangle 9"/>
           <p:cNvSpPr/>
           <p:nvPr/>
         </p:nvSpPr>
         <p:spPr>
           <a:xfrm>
-            <a:off x="7680960" y="3657600"/>
+            <a:off x="7680960" y="3611880"/>
             <a:ext cx="4114800" cy="502920"/>
           </a:xfrm>
           <a:prstGeom prst="roundRect">
@@ -4535,29 +4435,27 @@
                 </a:solidFill>
                 <a:latin typeface="Calibri"/>
               </a:rPr>
-              <a:t>Sonstige Steuern: 416,2 Mio. €</a:t>
-            </a:r>
-          </a:p>
-        </p:txBody>
-      </p:sp>
-      <p:sp>
-        <p:nvSpPr>
-          <p:cNvPr id="12" name="Rounded Rectangle 11"/>
+              <a:t>→ USt ist Haupteinfallstor</a:t>
+            </a:r>
+          </a:p>
+        </p:txBody>
+      </p:sp>
+      <p:sp>
+        <p:nvSpPr>
+          <p:cNvPr id="11" name="Rectangle 10"/>
           <p:cNvSpPr/>
           <p:nvPr/>
         </p:nvSpPr>
         <p:spPr>
           <a:xfrm>
-            <a:off x="7680960" y="4343400"/>
-            <a:ext cx="4114800" cy="502920"/>
-          </a:xfrm>
-          <a:prstGeom prst="roundRect">
-            <a:avLst>
-              <a:gd name="adj" fmla="val 50000"/>
-            </a:avLst>
-          </a:prstGeom>
-          <a:solidFill>
-            <a:srgbClr val="00C2A8"/>
+            <a:off x="0" y="6537960"/>
+            <a:ext cx="12191695" cy="320040"/>
+          </a:xfrm>
+          <a:prstGeom prst="rect">
+            <a:avLst/>
+          </a:prstGeom>
+          <a:solidFill>
+            <a:srgbClr val="07142E"/>
           </a:solidFill>
           <a:ln>
             <a:noFill/>
@@ -4579,59 +4477,6 @@
           </a:fontRef>
         </p:style>
         <p:txBody>
-          <a:bodyPr rtlCol="0" anchor="ctr" tIns="18288" bIns="18288"/>
-          <a:lstStyle/>
-          <a:p>
-            <a:pPr algn="ctr"/>
-            <a:r>
-              <a:rPr sz="1400" b="1">
-                <a:solidFill>
-                  <a:srgbClr val="0B1E3F"/>
-                </a:solidFill>
-                <a:latin typeface="Calibri"/>
-              </a:rPr>
-              <a:t>→ USt ist Haupteinfallstor</a:t>
-            </a:r>
-          </a:p>
-        </p:txBody>
-      </p:sp>
-      <p:sp>
-        <p:nvSpPr>
-          <p:cNvPr id="13" name="Rectangle 12"/>
-          <p:cNvSpPr/>
-          <p:nvPr/>
-        </p:nvSpPr>
-        <p:spPr>
-          <a:xfrm>
-            <a:off x="0" y="6537960"/>
-            <a:ext cx="12191695" cy="320040"/>
-          </a:xfrm>
-          <a:prstGeom prst="rect">
-            <a:avLst/>
-          </a:prstGeom>
-          <a:solidFill>
-            <a:srgbClr val="07142E"/>
-          </a:solidFill>
-          <a:ln>
-            <a:noFill/>
-          </a:ln>
-          <a:effectLst/>
-        </p:spPr>
-        <p:style>
-          <a:lnRef idx="1">
-            <a:schemeClr val="accent1"/>
-          </a:lnRef>
-          <a:fillRef idx="3">
-            <a:schemeClr val="accent1"/>
-          </a:fillRef>
-          <a:effectRef idx="2">
-            <a:schemeClr val="accent1"/>
-          </a:effectRef>
-          <a:fontRef idx="minor">
-            <a:schemeClr val="lt1"/>
-          </a:fontRef>
-        </p:style>
-        <p:txBody>
           <a:bodyPr rtlCol="0" anchor="ctr"/>
           <a:lstStyle/>
           <a:p>
@@ -4641,7 +4486,7 @@
       </p:sp>
       <p:sp>
         <p:nvSpPr>
-          <p:cNvPr id="14" name="TextBox 13"/>
+          <p:cNvPr id="12" name="TextBox 11"/>
           <p:cNvSpPr txBox="1"/>
           <p:nvPr/>
         </p:nvSpPr>
@@ -4663,7 +4508,7 @@
           <a:p>
             <a:pPr algn="l"/>
             <a:r>
-              <a:rPr sz="1000" b="0">
+              <a:rPr sz="1000" b="0" i="0">
                 <a:solidFill>
                   <a:srgbClr val="B8C2D6"/>
                 </a:solidFill>
@@ -4676,7 +4521,7 @@
       </p:sp>
       <p:sp>
         <p:nvSpPr>
-          <p:cNvPr id="15" name="TextBox 14"/>
+          <p:cNvPr id="13" name="TextBox 12"/>
           <p:cNvSpPr txBox="1"/>
           <p:nvPr/>
         </p:nvSpPr>
@@ -4698,7 +4543,7 @@
           <a:p>
             <a:pPr algn="r"/>
             <a:r>
-              <a:rPr sz="1000" b="0">
+              <a:rPr sz="1000" b="0" i="0">
                 <a:solidFill>
                   <a:srgbClr val="00C2A8"/>
                 </a:solidFill>
@@ -4847,7 +4692,7 @@
           <a:p>
             <a:pPr algn="l"/>
             <a:r>
-              <a:rPr sz="2600" b="1">
+              <a:rPr sz="2600" b="1" i="0">
                 <a:solidFill>
                   <a:srgbClr val="FFFFFF"/>
                 </a:solidFill>
@@ -4882,7 +4727,7 @@
           <a:p>
             <a:pPr algn="r"/>
             <a:r>
-              <a:rPr sz="1200" b="0">
+              <a:rPr sz="1200" b="0" i="0">
                 <a:solidFill>
                   <a:srgbClr val="00C2A8"/>
                 </a:solidFill>
@@ -4961,7 +4806,7 @@
           <a:p>
             <a:pPr algn="ctr"/>
             <a:r>
-              <a:rPr sz="2800" b="1">
+              <a:rPr sz="2800" b="1" i="0">
                 <a:solidFill>
                   <a:srgbClr val="0B1E3F"/>
                 </a:solidFill>
@@ -4996,7 +4841,7 @@
           <a:p>
             <a:pPr algn="l"/>
             <a:r>
-              <a:rPr sz="2400" b="1">
+              <a:rPr sz="2400" b="1" i="0">
                 <a:solidFill>
                   <a:srgbClr val="0B1E3F"/>
                 </a:solidFill>
@@ -5319,7 +5164,7 @@
           <a:p>
             <a:pPr algn="l"/>
             <a:r>
-              <a:rPr sz="1000" b="0">
+              <a:rPr sz="1000" b="0" i="0">
                 <a:solidFill>
                   <a:srgbClr val="B8C2D6"/>
                 </a:solidFill>
@@ -5354,7 +5199,7 @@
           <a:p>
             <a:pPr algn="r"/>
             <a:r>
-              <a:rPr sz="1000" b="0">
+              <a:rPr sz="1000" b="0" i="0">
                 <a:solidFill>
                   <a:srgbClr val="00C2A8"/>
                 </a:solidFill>
@@ -5503,7 +5348,7 @@
           <a:p>
             <a:pPr algn="l"/>
             <a:r>
-              <a:rPr sz="2600" b="1">
+              <a:rPr sz="2600" b="1" i="0">
                 <a:solidFill>
                   <a:srgbClr val="FFFFFF"/>
                 </a:solidFill>
@@ -5538,7 +5383,7 @@
           <a:p>
             <a:pPr algn="r"/>
             <a:r>
-              <a:rPr sz="1200" b="0">
+              <a:rPr sz="1200" b="0" i="0">
                 <a:solidFill>
                   <a:srgbClr val="00C2A8"/>
                 </a:solidFill>
@@ -5617,7 +5462,7 @@
           <a:p>
             <a:pPr algn="ctr"/>
             <a:r>
-              <a:rPr sz="2800" b="1">
+              <a:rPr sz="2800" b="1" i="0">
                 <a:solidFill>
                   <a:srgbClr val="0B1E3F"/>
                 </a:solidFill>
@@ -5652,7 +5497,7 @@
           <a:p>
             <a:pPr algn="l"/>
             <a:r>
-              <a:rPr sz="2400" b="1">
+              <a:rPr sz="2400" b="1" i="0">
                 <a:solidFill>
                   <a:srgbClr val="0B1E3F"/>
                 </a:solidFill>
@@ -5689,52 +5534,19 @@
       </p:pic>
       <p:sp>
         <p:nvSpPr>
-          <p:cNvPr id="10" name="TextBox 9"/>
-          <p:cNvSpPr txBox="1"/>
-          <p:nvPr/>
-        </p:nvSpPr>
-        <p:spPr>
-          <a:xfrm>
-            <a:off x="6400800" y="2286000"/>
-            <a:ext cx="5303520" cy="457200"/>
-          </a:xfrm>
-          <a:prstGeom prst="rect">
-            <a:avLst/>
-          </a:prstGeom>
-          <a:noFill/>
-        </p:spPr>
-        <p:txBody>
-          <a:bodyPr wrap="square" lIns="45720" rIns="45720" tIns="18288" bIns="18288" anchor="t">
-            <a:spAutoFit/>
-          </a:bodyPr>
-          <a:lstStyle/>
-          <a:p>
-            <a:pPr algn="l"/>
-            <a:r>
-              <a:rPr sz="2000" b="1">
-                <a:solidFill>
-                  <a:srgbClr val="0B1E3F"/>
-                </a:solidFill>
-                <a:latin typeface="Calibri"/>
-              </a:rPr>
-              <a:t>Kernaussagen</a:t>
-            </a:r>
-          </a:p>
-        </p:txBody>
-      </p:sp>
-      <p:sp>
-        <p:nvSpPr>
-          <p:cNvPr id="11" name="Rectangle 10"/>
+          <p:cNvPr id="10" name="Rounded Rectangle 9"/>
           <p:cNvSpPr/>
           <p:nvPr/>
         </p:nvSpPr>
         <p:spPr>
           <a:xfrm>
-            <a:off x="6400800" y="2788920"/>
-            <a:ext cx="1097280" cy="45720"/>
-          </a:xfrm>
-          <a:prstGeom prst="rect">
-            <a:avLst/>
+            <a:off x="6400800" y="2468880"/>
+            <a:ext cx="5303520" cy="502920"/>
+          </a:xfrm>
+          <a:prstGeom prst="roundRect">
+            <a:avLst>
+              <a:gd name="adj" fmla="val 50000"/>
+            </a:avLst>
           </a:prstGeom>
           <a:solidFill>
             <a:srgbClr val="00C2A8"/>
@@ -5759,22 +5571,31 @@
           </a:fontRef>
         </p:style>
         <p:txBody>
-          <a:bodyPr rtlCol="0" anchor="ctr"/>
-          <a:lstStyle/>
-          <a:p>
-            <a:pPr algn="ctr"/>
-          </a:p>
-        </p:txBody>
-      </p:sp>
-      <p:sp>
-        <p:nvSpPr>
-          <p:cNvPr id="12" name="Rounded Rectangle 11"/>
+          <a:bodyPr rtlCol="0" anchor="ctr" tIns="18288" bIns="18288"/>
+          <a:lstStyle/>
+          <a:p>
+            <a:pPr algn="ctr"/>
+            <a:r>
+              <a:rPr sz="1400" b="1">
+                <a:solidFill>
+                  <a:srgbClr val="0B1E3F"/>
+                </a:solidFill>
+                <a:latin typeface="Calibri"/>
+              </a:rPr>
+              <a:t>Berichtspflicht für Konzerne</a:t>
+            </a:r>
+          </a:p>
+        </p:txBody>
+      </p:sp>
+      <p:sp>
+        <p:nvSpPr>
+          <p:cNvPr id="11" name="Rounded Rectangle 10"/>
           <p:cNvSpPr/>
           <p:nvPr/>
         </p:nvSpPr>
         <p:spPr>
           <a:xfrm>
-            <a:off x="6400800" y="3017520"/>
+            <a:off x="6400800" y="3154680"/>
             <a:ext cx="5303520" cy="502920"/>
           </a:xfrm>
           <a:prstGeom prst="roundRect">
@@ -5816,20 +5637,20 @@
                 </a:solidFill>
                 <a:latin typeface="Calibri"/>
               </a:rPr>
-              <a:t>Berichtspflicht für Konzerne</a:t>
-            </a:r>
-          </a:p>
-        </p:txBody>
-      </p:sp>
-      <p:sp>
-        <p:nvSpPr>
-          <p:cNvPr id="13" name="Rounded Rectangle 12"/>
+              <a:t>Steuerdaten pro Land</a:t>
+            </a:r>
+          </a:p>
+        </p:txBody>
+      </p:sp>
+      <p:sp>
+        <p:nvSpPr>
+          <p:cNvPr id="12" name="Rounded Rectangle 11"/>
           <p:cNvSpPr/>
           <p:nvPr/>
         </p:nvSpPr>
         <p:spPr>
           <a:xfrm>
-            <a:off x="6400800" y="3703320"/>
+            <a:off x="6400800" y="3840480"/>
             <a:ext cx="5303520" cy="502920"/>
           </a:xfrm>
           <a:prstGeom prst="roundRect">
@@ -5871,20 +5692,20 @@
                 </a:solidFill>
                 <a:latin typeface="Calibri"/>
               </a:rPr>
-              <a:t>Steuerdaten pro Land</a:t>
-            </a:r>
-          </a:p>
-        </p:txBody>
-      </p:sp>
-      <p:sp>
-        <p:nvSpPr>
-          <p:cNvPr id="14" name="Rounded Rectangle 13"/>
+              <a:t>Umsatzschwelle: 750 Mio. €</a:t>
+            </a:r>
+          </a:p>
+        </p:txBody>
+      </p:sp>
+      <p:sp>
+        <p:nvSpPr>
+          <p:cNvPr id="13" name="Rounded Rectangle 12"/>
           <p:cNvSpPr/>
           <p:nvPr/>
         </p:nvSpPr>
         <p:spPr>
           <a:xfrm>
-            <a:off x="6400800" y="4389120"/>
+            <a:off x="6400800" y="4526280"/>
             <a:ext cx="5303520" cy="502920"/>
           </a:xfrm>
           <a:prstGeom prst="roundRect">
@@ -5926,29 +5747,27 @@
                 </a:solidFill>
                 <a:latin typeface="Calibri"/>
               </a:rPr>
-              <a:t>Umsatzschwelle: 750 Mio. €</a:t>
-            </a:r>
-          </a:p>
-        </p:txBody>
-      </p:sp>
-      <p:sp>
-        <p:nvSpPr>
-          <p:cNvPr id="15" name="Rounded Rectangle 14"/>
+              <a:t>XLSX → XML-Übermittlung</a:t>
+            </a:r>
+          </a:p>
+        </p:txBody>
+      </p:sp>
+      <p:sp>
+        <p:nvSpPr>
+          <p:cNvPr id="14" name="Rectangle 13"/>
           <p:cNvSpPr/>
           <p:nvPr/>
         </p:nvSpPr>
         <p:spPr>
           <a:xfrm>
-            <a:off x="6400800" y="5074920"/>
-            <a:ext cx="5303520" cy="502920"/>
-          </a:xfrm>
-          <a:prstGeom prst="roundRect">
-            <a:avLst>
-              <a:gd name="adj" fmla="val 50000"/>
-            </a:avLst>
-          </a:prstGeom>
-          <a:solidFill>
-            <a:srgbClr val="00C2A8"/>
+            <a:off x="0" y="6537960"/>
+            <a:ext cx="12191695" cy="320040"/>
+          </a:xfrm>
+          <a:prstGeom prst="rect">
+            <a:avLst/>
+          </a:prstGeom>
+          <a:solidFill>
+            <a:srgbClr val="07142E"/>
           </a:solidFill>
           <a:ln>
             <a:noFill/>
@@ -5970,59 +5789,6 @@
           </a:fontRef>
         </p:style>
         <p:txBody>
-          <a:bodyPr rtlCol="0" anchor="ctr" tIns="18288" bIns="18288"/>
-          <a:lstStyle/>
-          <a:p>
-            <a:pPr algn="ctr"/>
-            <a:r>
-              <a:rPr sz="1400" b="1">
-                <a:solidFill>
-                  <a:srgbClr val="0B1E3F"/>
-                </a:solidFill>
-                <a:latin typeface="Calibri"/>
-              </a:rPr>
-              <a:t>XLSX → XML-Übermittlung</a:t>
-            </a:r>
-          </a:p>
-        </p:txBody>
-      </p:sp>
-      <p:sp>
-        <p:nvSpPr>
-          <p:cNvPr id="16" name="Rectangle 15"/>
-          <p:cNvSpPr/>
-          <p:nvPr/>
-        </p:nvSpPr>
-        <p:spPr>
-          <a:xfrm>
-            <a:off x="0" y="6537960"/>
-            <a:ext cx="12191695" cy="320040"/>
-          </a:xfrm>
-          <a:prstGeom prst="rect">
-            <a:avLst/>
-          </a:prstGeom>
-          <a:solidFill>
-            <a:srgbClr val="07142E"/>
-          </a:solidFill>
-          <a:ln>
-            <a:noFill/>
-          </a:ln>
-          <a:effectLst/>
-        </p:spPr>
-        <p:style>
-          <a:lnRef idx="1">
-            <a:schemeClr val="accent1"/>
-          </a:lnRef>
-          <a:fillRef idx="3">
-            <a:schemeClr val="accent1"/>
-          </a:fillRef>
-          <a:effectRef idx="2">
-            <a:schemeClr val="accent1"/>
-          </a:effectRef>
-          <a:fontRef idx="minor">
-            <a:schemeClr val="lt1"/>
-          </a:fontRef>
-        </p:style>
-        <p:txBody>
           <a:bodyPr rtlCol="0" anchor="ctr"/>
           <a:lstStyle/>
           <a:p>
@@ -6032,7 +5798,7 @@
       </p:sp>
       <p:sp>
         <p:nvSpPr>
-          <p:cNvPr id="17" name="TextBox 16"/>
+          <p:cNvPr id="15" name="TextBox 14"/>
           <p:cNvSpPr txBox="1"/>
           <p:nvPr/>
         </p:nvSpPr>
@@ -6054,7 +5820,7 @@
           <a:p>
             <a:pPr algn="l"/>
             <a:r>
-              <a:rPr sz="1000" b="0">
+              <a:rPr sz="1000" b="0" i="0">
                 <a:solidFill>
                   <a:srgbClr val="B8C2D6"/>
                 </a:solidFill>
@@ -6067,7 +5833,7 @@
       </p:sp>
       <p:sp>
         <p:nvSpPr>
-          <p:cNvPr id="18" name="TextBox 17"/>
+          <p:cNvPr id="16" name="TextBox 15"/>
           <p:cNvSpPr txBox="1"/>
           <p:nvPr/>
         </p:nvSpPr>
@@ -6089,7 +5855,7 @@
           <a:p>
             <a:pPr algn="r"/>
             <a:r>
-              <a:rPr sz="1000" b="0">
+              <a:rPr sz="1000" b="0" i="0">
                 <a:solidFill>
                   <a:srgbClr val="00C2A8"/>
                 </a:solidFill>
@@ -6238,7 +6004,7 @@
           <a:p>
             <a:pPr algn="l"/>
             <a:r>
-              <a:rPr sz="2600" b="1">
+              <a:rPr sz="2600" b="1" i="0">
                 <a:solidFill>
                   <a:srgbClr val="FFFFFF"/>
                 </a:solidFill>
@@ -6273,7 +6039,7 @@
           <a:p>
             <a:pPr algn="r"/>
             <a:r>
-              <a:rPr sz="1200" b="0">
+              <a:rPr sz="1200" b="0" i="0">
                 <a:solidFill>
                   <a:srgbClr val="00C2A8"/>
                 </a:solidFill>
@@ -6352,7 +6118,7 @@
           <a:p>
             <a:pPr algn="ctr"/>
             <a:r>
-              <a:rPr sz="2800" b="1">
+              <a:rPr sz="2800" b="1" i="0">
                 <a:solidFill>
                   <a:srgbClr val="0B1E3F"/>
                 </a:solidFill>
@@ -6387,7 +6153,7 @@
           <a:p>
             <a:pPr algn="l"/>
             <a:r>
-              <a:rPr sz="2200" b="1">
+              <a:rPr sz="2200" b="1" i="0">
                 <a:solidFill>
                   <a:srgbClr val="0B1E3F"/>
                 </a:solidFill>
@@ -6424,52 +6190,19 @@
       </p:pic>
       <p:sp>
         <p:nvSpPr>
-          <p:cNvPr id="10" name="TextBox 9"/>
-          <p:cNvSpPr txBox="1"/>
-          <p:nvPr/>
-        </p:nvSpPr>
-        <p:spPr>
-          <a:xfrm>
-            <a:off x="8229600" y="2286000"/>
-            <a:ext cx="3474720" cy="457200"/>
-          </a:xfrm>
-          <a:prstGeom prst="rect">
-            <a:avLst/>
-          </a:prstGeom>
-          <a:noFill/>
-        </p:spPr>
-        <p:txBody>
-          <a:bodyPr wrap="square" lIns="45720" rIns="45720" tIns="18288" bIns="18288" anchor="t">
-            <a:spAutoFit/>
-          </a:bodyPr>
-          <a:lstStyle/>
-          <a:p>
-            <a:pPr algn="l"/>
-            <a:r>
-              <a:rPr sz="2000" b="1">
-                <a:solidFill>
-                  <a:srgbClr val="0B1E3F"/>
-                </a:solidFill>
-                <a:latin typeface="Calibri"/>
-              </a:rPr>
-              <a:t>Kernaussagen</a:t>
-            </a:r>
-          </a:p>
-        </p:txBody>
-      </p:sp>
-      <p:sp>
-        <p:nvSpPr>
-          <p:cNvPr id="11" name="Rectangle 10"/>
+          <p:cNvPr id="10" name="Rounded Rectangle 9"/>
           <p:cNvSpPr/>
           <p:nvPr/>
         </p:nvSpPr>
         <p:spPr>
           <a:xfrm>
-            <a:off x="8229600" y="2788920"/>
-            <a:ext cx="1097280" cy="45720"/>
-          </a:xfrm>
-          <a:prstGeom prst="rect">
-            <a:avLst/>
+            <a:off x="8229600" y="2468880"/>
+            <a:ext cx="3474720" cy="502920"/>
+          </a:xfrm>
+          <a:prstGeom prst="roundRect">
+            <a:avLst>
+              <a:gd name="adj" fmla="val 50000"/>
+            </a:avLst>
           </a:prstGeom>
           <a:solidFill>
             <a:srgbClr val="00C2A8"/>
@@ -6494,22 +6227,31 @@
           </a:fontRef>
         </p:style>
         <p:txBody>
-          <a:bodyPr rtlCol="0" anchor="ctr"/>
-          <a:lstStyle/>
-          <a:p>
-            <a:pPr algn="ctr"/>
-          </a:p>
-        </p:txBody>
-      </p:sp>
-      <p:sp>
-        <p:nvSpPr>
-          <p:cNvPr id="12" name="Rounded Rectangle 11"/>
+          <a:bodyPr rtlCol="0" anchor="ctr" tIns="18288" bIns="18288"/>
+          <a:lstStyle/>
+          <a:p>
+            <a:pPr algn="ctr"/>
+            <a:r>
+              <a:rPr sz="1400" b="1">
+                <a:solidFill>
+                  <a:srgbClr val="0B1E3F"/>
+                </a:solidFill>
+                <a:latin typeface="Calibri"/>
+              </a:rPr>
+              <a:t>US-Gesetz von 2010</a:t>
+            </a:r>
+          </a:p>
+        </p:txBody>
+      </p:sp>
+      <p:sp>
+        <p:nvSpPr>
+          <p:cNvPr id="11" name="Rounded Rectangle 10"/>
           <p:cNvSpPr/>
           <p:nvPr/>
         </p:nvSpPr>
         <p:spPr>
           <a:xfrm>
-            <a:off x="8229600" y="3017520"/>
+            <a:off x="8229600" y="3154680"/>
             <a:ext cx="3474720" cy="502920"/>
           </a:xfrm>
           <a:prstGeom prst="roundRect">
@@ -6551,20 +6293,20 @@
                 </a:solidFill>
                 <a:latin typeface="Calibri"/>
               </a:rPr>
-              <a:t>US-Gesetz von 2010</a:t>
-            </a:r>
-          </a:p>
-        </p:txBody>
-      </p:sp>
-      <p:sp>
-        <p:nvSpPr>
-          <p:cNvPr id="13" name="Rounded Rectangle 12"/>
+              <a:t>Meldepflicht für Banken</a:t>
+            </a:r>
+          </a:p>
+        </p:txBody>
+      </p:sp>
+      <p:sp>
+        <p:nvSpPr>
+          <p:cNvPr id="12" name="Rounded Rectangle 11"/>
           <p:cNvSpPr/>
           <p:nvPr/>
         </p:nvSpPr>
         <p:spPr>
           <a:xfrm>
-            <a:off x="8229600" y="3703320"/>
+            <a:off x="8229600" y="3840480"/>
             <a:ext cx="3474720" cy="502920"/>
           </a:xfrm>
           <a:prstGeom prst="roundRect">
@@ -6606,20 +6348,20 @@
                 </a:solidFill>
                 <a:latin typeface="Calibri"/>
               </a:rPr>
-              <a:t>Meldepflicht für Banken</a:t>
-            </a:r>
-          </a:p>
-        </p:txBody>
-      </p:sp>
-      <p:sp>
-        <p:nvSpPr>
-          <p:cNvPr id="14" name="Rounded Rectangle 13"/>
+              <a:t>Erfasst Auslandskonten</a:t>
+            </a:r>
+          </a:p>
+        </p:txBody>
+      </p:sp>
+      <p:sp>
+        <p:nvSpPr>
+          <p:cNvPr id="13" name="Rounded Rectangle 12"/>
           <p:cNvSpPr/>
           <p:nvPr/>
         </p:nvSpPr>
         <p:spPr>
           <a:xfrm>
-            <a:off x="8229600" y="4389120"/>
+            <a:off x="8229600" y="4526280"/>
             <a:ext cx="3474720" cy="502920"/>
           </a:xfrm>
           <a:prstGeom prst="roundRect">
@@ -6661,29 +6403,27 @@
                 </a:solidFill>
                 <a:latin typeface="Calibri"/>
               </a:rPr>
-              <a:t>Erfasst Auslandskonten</a:t>
-            </a:r>
-          </a:p>
-        </p:txBody>
-      </p:sp>
-      <p:sp>
-        <p:nvSpPr>
-          <p:cNvPr id="15" name="Rounded Rectangle 14"/>
+              <a:t>Verhindert Steuerflucht</a:t>
+            </a:r>
+          </a:p>
+        </p:txBody>
+      </p:sp>
+      <p:sp>
+        <p:nvSpPr>
+          <p:cNvPr id="14" name="Rectangle 13"/>
           <p:cNvSpPr/>
           <p:nvPr/>
         </p:nvSpPr>
         <p:spPr>
           <a:xfrm>
-            <a:off x="8229600" y="5074920"/>
-            <a:ext cx="3474720" cy="502920"/>
-          </a:xfrm>
-          <a:prstGeom prst="roundRect">
-            <a:avLst>
-              <a:gd name="adj" fmla="val 50000"/>
-            </a:avLst>
-          </a:prstGeom>
-          <a:solidFill>
-            <a:srgbClr val="00C2A8"/>
+            <a:off x="0" y="6537960"/>
+            <a:ext cx="12191695" cy="320040"/>
+          </a:xfrm>
+          <a:prstGeom prst="rect">
+            <a:avLst/>
+          </a:prstGeom>
+          <a:solidFill>
+            <a:srgbClr val="07142E"/>
           </a:solidFill>
           <a:ln>
             <a:noFill/>
@@ -6705,59 +6445,6 @@
           </a:fontRef>
         </p:style>
         <p:txBody>
-          <a:bodyPr rtlCol="0" anchor="ctr" tIns="18288" bIns="18288"/>
-          <a:lstStyle/>
-          <a:p>
-            <a:pPr algn="ctr"/>
-            <a:r>
-              <a:rPr sz="1400" b="1">
-                <a:solidFill>
-                  <a:srgbClr val="0B1E3F"/>
-                </a:solidFill>
-                <a:latin typeface="Calibri"/>
-              </a:rPr>
-              <a:t>Verhindert Steuerflucht</a:t>
-            </a:r>
-          </a:p>
-        </p:txBody>
-      </p:sp>
-      <p:sp>
-        <p:nvSpPr>
-          <p:cNvPr id="16" name="Rectangle 15"/>
-          <p:cNvSpPr/>
-          <p:nvPr/>
-        </p:nvSpPr>
-        <p:spPr>
-          <a:xfrm>
-            <a:off x="0" y="6537960"/>
-            <a:ext cx="12191695" cy="320040"/>
-          </a:xfrm>
-          <a:prstGeom prst="rect">
-            <a:avLst/>
-          </a:prstGeom>
-          <a:solidFill>
-            <a:srgbClr val="07142E"/>
-          </a:solidFill>
-          <a:ln>
-            <a:noFill/>
-          </a:ln>
-          <a:effectLst/>
-        </p:spPr>
-        <p:style>
-          <a:lnRef idx="1">
-            <a:schemeClr val="accent1"/>
-          </a:lnRef>
-          <a:fillRef idx="3">
-            <a:schemeClr val="accent1"/>
-          </a:fillRef>
-          <a:effectRef idx="2">
-            <a:schemeClr val="accent1"/>
-          </a:effectRef>
-          <a:fontRef idx="minor">
-            <a:schemeClr val="lt1"/>
-          </a:fontRef>
-        </p:style>
-        <p:txBody>
           <a:bodyPr rtlCol="0" anchor="ctr"/>
           <a:lstStyle/>
           <a:p>
@@ -6767,7 +6454,7 @@
       </p:sp>
       <p:sp>
         <p:nvSpPr>
-          <p:cNvPr id="17" name="TextBox 16"/>
+          <p:cNvPr id="15" name="TextBox 14"/>
           <p:cNvSpPr txBox="1"/>
           <p:nvPr/>
         </p:nvSpPr>
@@ -6789,7 +6476,7 @@
           <a:p>
             <a:pPr algn="l"/>
             <a:r>
-              <a:rPr sz="1000" b="0">
+              <a:rPr sz="1000" b="0" i="0">
                 <a:solidFill>
                   <a:srgbClr val="B8C2D6"/>
                 </a:solidFill>
@@ -6802,7 +6489,7 @@
       </p:sp>
       <p:sp>
         <p:nvSpPr>
-          <p:cNvPr id="18" name="TextBox 17"/>
+          <p:cNvPr id="16" name="TextBox 15"/>
           <p:cNvSpPr txBox="1"/>
           <p:nvPr/>
         </p:nvSpPr>
@@ -6824,7 +6511,7 @@
           <a:p>
             <a:pPr algn="r"/>
             <a:r>
-              <a:rPr sz="1000" b="0">
+              <a:rPr sz="1000" b="0" i="0">
                 <a:solidFill>
                   <a:srgbClr val="00C2A8"/>
                 </a:solidFill>
@@ -6973,7 +6660,7 @@
           <a:p>
             <a:pPr algn="l"/>
             <a:r>
-              <a:rPr sz="2600" b="1">
+              <a:rPr sz="2600" b="1" i="0">
                 <a:solidFill>
                   <a:srgbClr val="FFFFFF"/>
                 </a:solidFill>
@@ -7008,7 +6695,7 @@
           <a:p>
             <a:pPr algn="r"/>
             <a:r>
-              <a:rPr sz="1200" b="0">
+              <a:rPr sz="1200" b="0" i="0">
                 <a:solidFill>
                   <a:srgbClr val="00C2A8"/>
                 </a:solidFill>
@@ -7087,7 +6774,7 @@
           <a:p>
             <a:pPr algn="ctr"/>
             <a:r>
-              <a:rPr sz="2800" b="1">
+              <a:rPr sz="2800" b="1" i="0">
                 <a:solidFill>
                   <a:srgbClr val="0B1E3F"/>
                 </a:solidFill>
@@ -7122,7 +6809,7 @@
           <a:p>
             <a:pPr algn="l"/>
             <a:r>
-              <a:rPr sz="2400" b="1">
+              <a:rPr sz="2400" b="1" i="0">
                 <a:solidFill>
                   <a:srgbClr val="0B1E3F"/>
                 </a:solidFill>
@@ -7181,7 +6868,7 @@
           <a:p>
             <a:pPr algn="ctr"/>
             <a:r>
-              <a:rPr sz="1100" b="0">
+              <a:rPr sz="1100" b="0" i="0">
                 <a:solidFill>
                   <a:srgbClr val="6E7A8C"/>
                 </a:solidFill>
@@ -7194,52 +6881,19 @@
       </p:sp>
       <p:sp>
         <p:nvSpPr>
-          <p:cNvPr id="11" name="TextBox 10"/>
-          <p:cNvSpPr txBox="1"/>
-          <p:nvPr/>
-        </p:nvSpPr>
-        <p:spPr>
-          <a:xfrm>
-            <a:off x="8229600" y="2286000"/>
-            <a:ext cx="3474720" cy="457200"/>
-          </a:xfrm>
-          <a:prstGeom prst="rect">
-            <a:avLst/>
-          </a:prstGeom>
-          <a:noFill/>
-        </p:spPr>
-        <p:txBody>
-          <a:bodyPr wrap="square" lIns="45720" rIns="45720" tIns="18288" bIns="18288" anchor="t">
-            <a:spAutoFit/>
-          </a:bodyPr>
-          <a:lstStyle/>
-          <a:p>
-            <a:pPr algn="l"/>
-            <a:r>
-              <a:rPr sz="2000" b="1">
-                <a:solidFill>
-                  <a:srgbClr val="0B1E3F"/>
-                </a:solidFill>
-                <a:latin typeface="Calibri"/>
-              </a:rPr>
-              <a:t>Kernaussagen</a:t>
-            </a:r>
-          </a:p>
-        </p:txBody>
-      </p:sp>
-      <p:sp>
-        <p:nvSpPr>
-          <p:cNvPr id="12" name="Rectangle 11"/>
+          <p:cNvPr id="11" name="Rounded Rectangle 10"/>
           <p:cNvSpPr/>
           <p:nvPr/>
         </p:nvSpPr>
         <p:spPr>
           <a:xfrm>
-            <a:off x="8229600" y="2788920"/>
-            <a:ext cx="1097280" cy="45720"/>
-          </a:xfrm>
-          <a:prstGeom prst="rect">
-            <a:avLst/>
+            <a:off x="8229600" y="2468880"/>
+            <a:ext cx="3474720" cy="502920"/>
+          </a:xfrm>
+          <a:prstGeom prst="roundRect">
+            <a:avLst>
+              <a:gd name="adj" fmla="val 50000"/>
+            </a:avLst>
           </a:prstGeom>
           <a:solidFill>
             <a:srgbClr val="00C2A8"/>
@@ -7264,22 +6918,31 @@
           </a:fontRef>
         </p:style>
         <p:txBody>
-          <a:bodyPr rtlCol="0" anchor="ctr"/>
-          <a:lstStyle/>
-          <a:p>
-            <a:pPr algn="ctr"/>
-          </a:p>
-        </p:txBody>
-      </p:sp>
-      <p:sp>
-        <p:nvSpPr>
-          <p:cNvPr id="13" name="Rounded Rectangle 12"/>
+          <a:bodyPr rtlCol="0" anchor="ctr" tIns="18288" bIns="18288"/>
+          <a:lstStyle/>
+          <a:p>
+            <a:pPr algn="ctr"/>
+            <a:r>
+              <a:rPr sz="1400" b="1">
+                <a:solidFill>
+                  <a:srgbClr val="0B1E3F"/>
+                </a:solidFill>
+                <a:latin typeface="Calibri"/>
+              </a:rPr>
+              <a:t>11,5 Mio. Dokumente geleakt</a:t>
+            </a:r>
+          </a:p>
+        </p:txBody>
+      </p:sp>
+      <p:sp>
+        <p:nvSpPr>
+          <p:cNvPr id="12" name="Rounded Rectangle 11"/>
           <p:cNvSpPr/>
           <p:nvPr/>
         </p:nvSpPr>
         <p:spPr>
           <a:xfrm>
-            <a:off x="8229600" y="3017520"/>
+            <a:off x="8229600" y="3154680"/>
             <a:ext cx="3474720" cy="502920"/>
           </a:xfrm>
           <a:prstGeom prst="roundRect">
@@ -7321,20 +6984,20 @@
                 </a:solidFill>
                 <a:latin typeface="Calibri"/>
               </a:rPr>
-              <a:t>11,5 Mio. Dokumente geleakt</a:t>
-            </a:r>
-          </a:p>
-        </p:txBody>
-      </p:sp>
-      <p:sp>
-        <p:nvSpPr>
-          <p:cNvPr id="14" name="Rounded Rectangle 13"/>
+              <a:t>Briefkastenfirmen in Panama</a:t>
+            </a:r>
+          </a:p>
+        </p:txBody>
+      </p:sp>
+      <p:sp>
+        <p:nvSpPr>
+          <p:cNvPr id="13" name="Rounded Rectangle 12"/>
           <p:cNvSpPr/>
           <p:nvPr/>
         </p:nvSpPr>
         <p:spPr>
           <a:xfrm>
-            <a:off x="8229600" y="3703320"/>
+            <a:off x="8229600" y="3840480"/>
             <a:ext cx="3474720" cy="502920"/>
           </a:xfrm>
           <a:prstGeom prst="roundRect">
@@ -7376,20 +7039,20 @@
                 </a:solidFill>
                 <a:latin typeface="Calibri"/>
               </a:rPr>
-              <a:t>Briefkastenfirmen in Panama</a:t>
-            </a:r>
-          </a:p>
-        </p:txBody>
-      </p:sp>
-      <p:sp>
-        <p:nvSpPr>
-          <p:cNvPr id="15" name="Rounded Rectangle 14"/>
+              <a:t>Aufgedeckt durch Datenanalyse</a:t>
+            </a:r>
+          </a:p>
+        </p:txBody>
+      </p:sp>
+      <p:sp>
+        <p:nvSpPr>
+          <p:cNvPr id="14" name="Rounded Rectangle 13"/>
           <p:cNvSpPr/>
           <p:nvPr/>
         </p:nvSpPr>
         <p:spPr>
           <a:xfrm>
-            <a:off x="8229600" y="4389120"/>
+            <a:off x="8229600" y="4526280"/>
             <a:ext cx="3474720" cy="502920"/>
           </a:xfrm>
           <a:prstGeom prst="roundRect">
@@ -7431,29 +7094,27 @@
                 </a:solidFill>
                 <a:latin typeface="Calibri"/>
               </a:rPr>
-              <a:t>Aufgedeckt durch Datenanalyse</a:t>
-            </a:r>
-          </a:p>
-        </p:txBody>
-      </p:sp>
-      <p:sp>
-        <p:nvSpPr>
-          <p:cNvPr id="16" name="Rounded Rectangle 15"/>
+              <a:t>ICIJ-Recherche 2016</a:t>
+            </a:r>
+          </a:p>
+        </p:txBody>
+      </p:sp>
+      <p:sp>
+        <p:nvSpPr>
+          <p:cNvPr id="15" name="Rectangle 14"/>
           <p:cNvSpPr/>
           <p:nvPr/>
         </p:nvSpPr>
         <p:spPr>
           <a:xfrm>
-            <a:off x="8229600" y="5074920"/>
-            <a:ext cx="3474720" cy="502920"/>
-          </a:xfrm>
-          <a:prstGeom prst="roundRect">
-            <a:avLst>
-              <a:gd name="adj" fmla="val 50000"/>
-            </a:avLst>
-          </a:prstGeom>
-          <a:solidFill>
-            <a:srgbClr val="00C2A8"/>
+            <a:off x="0" y="6537960"/>
+            <a:ext cx="12191695" cy="320040"/>
+          </a:xfrm>
+          <a:prstGeom prst="rect">
+            <a:avLst/>
+          </a:prstGeom>
+          <a:solidFill>
+            <a:srgbClr val="07142E"/>
           </a:solidFill>
           <a:ln>
             <a:noFill/>
@@ -7475,59 +7136,6 @@
           </a:fontRef>
         </p:style>
         <p:txBody>
-          <a:bodyPr rtlCol="0" anchor="ctr" tIns="18288" bIns="18288"/>
-          <a:lstStyle/>
-          <a:p>
-            <a:pPr algn="ctr"/>
-            <a:r>
-              <a:rPr sz="1400" b="1">
-                <a:solidFill>
-                  <a:srgbClr val="0B1E3F"/>
-                </a:solidFill>
-                <a:latin typeface="Calibri"/>
-              </a:rPr>
-              <a:t>ICIJ-Recherche 2016</a:t>
-            </a:r>
-          </a:p>
-        </p:txBody>
-      </p:sp>
-      <p:sp>
-        <p:nvSpPr>
-          <p:cNvPr id="17" name="Rectangle 16"/>
-          <p:cNvSpPr/>
-          <p:nvPr/>
-        </p:nvSpPr>
-        <p:spPr>
-          <a:xfrm>
-            <a:off x="0" y="6537960"/>
-            <a:ext cx="12191695" cy="320040"/>
-          </a:xfrm>
-          <a:prstGeom prst="rect">
-            <a:avLst/>
-          </a:prstGeom>
-          <a:solidFill>
-            <a:srgbClr val="07142E"/>
-          </a:solidFill>
-          <a:ln>
-            <a:noFill/>
-          </a:ln>
-          <a:effectLst/>
-        </p:spPr>
-        <p:style>
-          <a:lnRef idx="1">
-            <a:schemeClr val="accent1"/>
-          </a:lnRef>
-          <a:fillRef idx="3">
-            <a:schemeClr val="accent1"/>
-          </a:fillRef>
-          <a:effectRef idx="2">
-            <a:schemeClr val="accent1"/>
-          </a:effectRef>
-          <a:fontRef idx="minor">
-            <a:schemeClr val="lt1"/>
-          </a:fontRef>
-        </p:style>
-        <p:txBody>
           <a:bodyPr rtlCol="0" anchor="ctr"/>
           <a:lstStyle/>
           <a:p>
@@ -7537,7 +7145,7 @@
       </p:sp>
       <p:sp>
         <p:nvSpPr>
-          <p:cNvPr id="18" name="TextBox 17"/>
+          <p:cNvPr id="16" name="TextBox 15"/>
           <p:cNvSpPr txBox="1"/>
           <p:nvPr/>
         </p:nvSpPr>
@@ -7559,7 +7167,7 @@
           <a:p>
             <a:pPr algn="l"/>
             <a:r>
-              <a:rPr sz="1000" b="0">
+              <a:rPr sz="1000" b="0" i="0">
                 <a:solidFill>
                   <a:srgbClr val="B8C2D6"/>
                 </a:solidFill>
@@ -7572,7 +7180,7 @@
       </p:sp>
       <p:sp>
         <p:nvSpPr>
-          <p:cNvPr id="19" name="TextBox 18"/>
+          <p:cNvPr id="17" name="TextBox 16"/>
           <p:cNvSpPr txBox="1"/>
           <p:nvPr/>
         </p:nvSpPr>
@@ -7594,7 +7202,7 @@
           <a:p>
             <a:pPr algn="r"/>
             <a:r>
-              <a:rPr sz="1000" b="0">
+              <a:rPr sz="1000" b="0" i="0">
                 <a:solidFill>
                   <a:srgbClr val="00C2A8"/>
                 </a:solidFill>
@@ -7619,7 +7227,7 @@
     <p:bg>
       <p:bgPr>
         <a:solidFill>
-          <a:srgbClr val="0B1E3F"/>
+          <a:srgbClr val="F2F5FA"/>
         </a:solidFill>
         <a:effectLst/>
       </p:bgPr>
@@ -7639,14 +7247,14 @@
         </p:nvSpPr>
         <p:spPr>
           <a:xfrm>
-            <a:off x="640080" y="640080"/>
-            <a:ext cx="137160" cy="822960"/>
-          </a:xfrm>
-          <a:prstGeom prst="rect">
-            <a:avLst/>
-          </a:prstGeom>
-          <a:solidFill>
-            <a:srgbClr val="00C2A8"/>
+            <a:off x="0" y="0"/>
+            <a:ext cx="12191695" cy="914400"/>
+          </a:xfrm>
+          <a:prstGeom prst="rect">
+            <a:avLst/>
+          </a:prstGeom>
+          <a:solidFill>
+            <a:srgbClr val="0B1E3F"/>
           </a:solidFill>
           <a:ln>
             <a:noFill/>
@@ -7677,57 +7285,20 @@
       </p:sp>
       <p:sp>
         <p:nvSpPr>
-          <p:cNvPr id="3" name="TextBox 2"/>
-          <p:cNvSpPr txBox="1"/>
-          <p:nvPr/>
-        </p:nvSpPr>
-        <p:spPr>
-          <a:xfrm>
-            <a:off x="914400" y="640080"/>
-            <a:ext cx="7315200" cy="822960"/>
-          </a:xfrm>
-          <a:prstGeom prst="rect">
-            <a:avLst/>
-          </a:prstGeom>
-          <a:noFill/>
-        </p:spPr>
-        <p:txBody>
-          <a:bodyPr wrap="square" lIns="45720" rIns="45720" tIns="18288" bIns="18288" anchor="t">
-            <a:spAutoFit/>
-          </a:bodyPr>
-          <a:lstStyle/>
-          <a:p>
-            <a:pPr algn="l"/>
-            <a:r>
-              <a:rPr sz="4800" b="1">
-                <a:solidFill>
-                  <a:srgbClr val="FFFFFF"/>
-                </a:solidFill>
-                <a:latin typeface="Calibri"/>
-              </a:rPr>
-              <a:t>FAZIT</a:t>
-            </a:r>
-          </a:p>
-        </p:txBody>
-      </p:sp>
-      <p:sp>
-        <p:nvSpPr>
-          <p:cNvPr id="4" name="Rounded Rectangle 3"/>
+          <p:cNvPr id="3" name="Rectangle 2"/>
           <p:cNvSpPr/>
           <p:nvPr/>
         </p:nvSpPr>
         <p:spPr>
           <a:xfrm>
-            <a:off x="640080" y="1920240"/>
-            <a:ext cx="10881360" cy="1280160"/>
-          </a:xfrm>
-          <a:prstGeom prst="roundRect">
-            <a:avLst>
-              <a:gd name="adj" fmla="val 8000"/>
-            </a:avLst>
-          </a:prstGeom>
-          <a:solidFill>
-            <a:srgbClr val="07142E"/>
+            <a:off x="365760" y="201168"/>
+            <a:ext cx="73152" cy="502920"/>
+          </a:xfrm>
+          <a:prstGeom prst="rect">
+            <a:avLst/>
+          </a:prstGeom>
+          <a:solidFill>
+            <a:srgbClr val="00C2A8"/>
           </a:solidFill>
           <a:ln>
             <a:noFill/>
@@ -7758,20 +7329,127 @@
       </p:sp>
       <p:sp>
         <p:nvSpPr>
-          <p:cNvPr id="5" name="Rectangle 4"/>
+          <p:cNvPr id="4" name="TextBox 3"/>
+          <p:cNvSpPr txBox="1"/>
+          <p:nvPr/>
+        </p:nvSpPr>
+        <p:spPr>
+          <a:xfrm>
+            <a:off x="548640" y="164592"/>
+            <a:ext cx="9144000" cy="640080"/>
+          </a:xfrm>
+          <a:prstGeom prst="rect">
+            <a:avLst/>
+          </a:prstGeom>
+          <a:noFill/>
+        </p:spPr>
+        <p:txBody>
+          <a:bodyPr wrap="square" lIns="45720" rIns="45720" tIns="18288" bIns="18288" anchor="ctr">
+            <a:spAutoFit/>
+          </a:bodyPr>
+          <a:lstStyle/>
+          <a:p>
+            <a:pPr algn="l"/>
+            <a:r>
+              <a:rPr sz="2600" b="1" i="0">
+                <a:solidFill>
+                  <a:srgbClr val="FFFFFF"/>
+                </a:solidFill>
+                <a:latin typeface="Calibri"/>
+              </a:rPr>
+              <a:t>Wie funktioniert KI-gestützte Steuerprüfung?</a:t>
+            </a:r>
+          </a:p>
+        </p:txBody>
+      </p:sp>
+      <p:sp>
+        <p:nvSpPr>
+          <p:cNvPr id="5" name="TextBox 4"/>
+          <p:cNvSpPr txBox="1"/>
+          <p:nvPr/>
+        </p:nvSpPr>
+        <p:spPr>
+          <a:xfrm>
+            <a:off x="9722815" y="274320"/>
+            <a:ext cx="2194560" cy="365760"/>
+          </a:xfrm>
+          <a:prstGeom prst="rect">
+            <a:avLst/>
+          </a:prstGeom>
+          <a:noFill/>
+        </p:spPr>
+        <p:txBody>
+          <a:bodyPr wrap="square" lIns="45720" rIns="45720" tIns="18288" bIns="18288" anchor="ctr">
+            <a:spAutoFit/>
+          </a:bodyPr>
+          <a:lstStyle/>
+          <a:p>
+            <a:pPr algn="r"/>
+            <a:r>
+              <a:rPr sz="1200" b="0" i="0">
+                <a:solidFill>
+                  <a:srgbClr val="00C2A8"/>
+                </a:solidFill>
+                <a:latin typeface="Calibri"/>
+              </a:rPr>
+              <a:t>Funktionsweise</a:t>
+            </a:r>
+          </a:p>
+        </p:txBody>
+      </p:sp>
+      <p:sp>
+        <p:nvSpPr>
+          <p:cNvPr id="6" name="TextBox 5"/>
+          <p:cNvSpPr txBox="1"/>
+          <p:nvPr/>
+        </p:nvSpPr>
+        <p:spPr>
+          <a:xfrm>
+            <a:off x="548640" y="1097280"/>
+            <a:ext cx="11155680" cy="457200"/>
+          </a:xfrm>
+          <a:prstGeom prst="rect">
+            <a:avLst/>
+          </a:prstGeom>
+          <a:noFill/>
+        </p:spPr>
+        <p:txBody>
+          <a:bodyPr wrap="square" lIns="45720" rIns="45720" tIns="18288" bIns="18288" anchor="t">
+            <a:spAutoFit/>
+          </a:bodyPr>
+          <a:lstStyle/>
+          <a:p>
+            <a:pPr algn="l"/>
+            <a:r>
+              <a:rPr sz="1600" b="0" i="1">
+                <a:solidFill>
+                  <a:srgbClr val="6E7A8C"/>
+                </a:solidFill>
+                <a:latin typeface="Calibri"/>
+              </a:rPr>
+              <a:t>Vom Datenstrom zur Verdachtsmeldung – in vier Schritten</a:t>
+            </a:r>
+          </a:p>
+        </p:txBody>
+      </p:sp>
+      <p:sp>
+        <p:nvSpPr>
+          <p:cNvPr id="7" name="Rounded Rectangle 6"/>
           <p:cNvSpPr/>
           <p:nvPr/>
         </p:nvSpPr>
         <p:spPr>
           <a:xfrm>
-            <a:off x="640080" y="1920240"/>
-            <a:ext cx="137160" cy="1280160"/>
-          </a:xfrm>
-          <a:prstGeom prst="rect">
-            <a:avLst/>
-          </a:prstGeom>
-          <a:solidFill>
-            <a:srgbClr val="00C2A8"/>
+            <a:off x="540867" y="1828800"/>
+            <a:ext cx="2606040" cy="3291840"/>
+          </a:xfrm>
+          <a:prstGeom prst="roundRect">
+            <a:avLst>
+              <a:gd name="adj" fmla="val 6000"/>
+            </a:avLst>
+          </a:prstGeom>
+          <a:solidFill>
+            <a:srgbClr val="FFFFFF"/>
           </a:solidFill>
           <a:ln>
             <a:noFill/>
@@ -7802,127 +7480,20 @@
       </p:sp>
       <p:sp>
         <p:nvSpPr>
-          <p:cNvPr id="6" name="TextBox 5"/>
-          <p:cNvSpPr txBox="1"/>
-          <p:nvPr/>
-        </p:nvSpPr>
-        <p:spPr>
-          <a:xfrm>
-            <a:off x="914400" y="2057400"/>
-            <a:ext cx="1097280" cy="1005840"/>
-          </a:xfrm>
-          <a:prstGeom prst="rect">
-            <a:avLst/>
-          </a:prstGeom>
-          <a:noFill/>
-        </p:spPr>
-        <p:txBody>
-          <a:bodyPr wrap="square" lIns="45720" rIns="45720" tIns="18288" bIns="18288" anchor="ctr">
-            <a:spAutoFit/>
-          </a:bodyPr>
-          <a:lstStyle/>
-          <a:p>
-            <a:pPr algn="l"/>
-            <a:r>
-              <a:rPr sz="3600" b="1">
-                <a:solidFill>
-                  <a:srgbClr val="00C2A8"/>
-                </a:solidFill>
-                <a:latin typeface="Calibri"/>
-              </a:rPr>
-              <a:t>01</a:t>
-            </a:r>
-          </a:p>
-        </p:txBody>
-      </p:sp>
-      <p:sp>
-        <p:nvSpPr>
-          <p:cNvPr id="7" name="TextBox 6"/>
-          <p:cNvSpPr txBox="1"/>
-          <p:nvPr/>
-        </p:nvSpPr>
-        <p:spPr>
-          <a:xfrm>
-            <a:off x="2103120" y="2057400"/>
-            <a:ext cx="9144000" cy="457200"/>
-          </a:xfrm>
-          <a:prstGeom prst="rect">
-            <a:avLst/>
-          </a:prstGeom>
-          <a:noFill/>
-        </p:spPr>
-        <p:txBody>
-          <a:bodyPr wrap="square" lIns="45720" rIns="45720" tIns="18288" bIns="18288" anchor="ctr">
-            <a:spAutoFit/>
-          </a:bodyPr>
-          <a:lstStyle/>
-          <a:p>
-            <a:pPr algn="l"/>
-            <a:r>
-              <a:rPr sz="1800" b="1">
-                <a:solidFill>
-                  <a:srgbClr val="FFFFFF"/>
-                </a:solidFill>
-                <a:latin typeface="Calibri"/>
-              </a:rPr>
-              <a:t>Riesige Steuerlücke</a:t>
-            </a:r>
-          </a:p>
-        </p:txBody>
-      </p:sp>
-      <p:sp>
-        <p:nvSpPr>
-          <p:cNvPr id="8" name="TextBox 7"/>
-          <p:cNvSpPr txBox="1"/>
-          <p:nvPr/>
-        </p:nvSpPr>
-        <p:spPr>
-          <a:xfrm>
-            <a:off x="2103120" y="2514600"/>
-            <a:ext cx="9144000" cy="640080"/>
-          </a:xfrm>
-          <a:prstGeom prst="rect">
-            <a:avLst/>
-          </a:prstGeom>
-          <a:noFill/>
-        </p:spPr>
-        <p:txBody>
-          <a:bodyPr wrap="square" lIns="45720" rIns="45720" tIns="18288" bIns="18288" anchor="t">
-            <a:spAutoFit/>
-          </a:bodyPr>
-          <a:lstStyle/>
-          <a:p>
-            <a:pPr algn="l"/>
-            <a:r>
-              <a:rPr sz="1300" b="0">
-                <a:solidFill>
-                  <a:srgbClr val="CFD8E6"/>
-                </a:solidFill>
-                <a:latin typeface="Calibri"/>
-              </a:rPr>
-              <a:t>Bis zu 100 Mrd. € entgehen dem deutschen Staat jährlich – die klassische Steuerfahndung deckt nur einen Bruchteil auf.</a:t>
-            </a:r>
-          </a:p>
-        </p:txBody>
-      </p:sp>
-      <p:sp>
-        <p:nvSpPr>
-          <p:cNvPr id="9" name="Rounded Rectangle 8"/>
+          <p:cNvPr id="8" name="Oval 7"/>
           <p:cNvSpPr/>
           <p:nvPr/>
         </p:nvSpPr>
         <p:spPr>
           <a:xfrm>
-            <a:off x="640080" y="3337560"/>
-            <a:ext cx="10881360" cy="1280160"/>
-          </a:xfrm>
-          <a:prstGeom prst="roundRect">
-            <a:avLst>
-              <a:gd name="adj" fmla="val 8000"/>
-            </a:avLst>
-          </a:prstGeom>
-          <a:solidFill>
-            <a:srgbClr val="07142E"/>
+            <a:off x="723747" y="2011680"/>
+            <a:ext cx="640080" cy="640080"/>
+          </a:xfrm>
+          <a:prstGeom prst="ellipse">
+            <a:avLst/>
+          </a:prstGeom>
+          <a:solidFill>
+            <a:srgbClr val="00C2A8"/>
           </a:solidFill>
           <a:ln>
             <a:noFill/>
@@ -7944,34 +7515,148 @@
           </a:fontRef>
         </p:style>
         <p:txBody>
-          <a:bodyPr rtlCol="0" anchor="ctr"/>
-          <a:lstStyle/>
-          <a:p>
-            <a:pPr algn="ctr"/>
-          </a:p>
-        </p:txBody>
-      </p:sp>
-      <p:sp>
-        <p:nvSpPr>
-          <p:cNvPr id="10" name="Rectangle 9"/>
+          <a:bodyPr rtlCol="0" anchor="ctr" lIns="0" rIns="0" tIns="0" bIns="0"/>
+          <a:lstStyle/>
+          <a:p>
+            <a:pPr algn="ctr"/>
+            <a:r>
+              <a:rPr sz="2400" b="1">
+                <a:solidFill>
+                  <a:srgbClr val="0B1E3F"/>
+                </a:solidFill>
+                <a:latin typeface="Calibri"/>
+              </a:rPr>
+              <a:t>1</a:t>
+            </a:r>
+          </a:p>
+        </p:txBody>
+      </p:sp>
+      <p:sp>
+        <p:nvSpPr>
+          <p:cNvPr id="9" name="TextBox 8"/>
+          <p:cNvSpPr txBox="1"/>
+          <p:nvPr/>
+        </p:nvSpPr>
+        <p:spPr>
+          <a:xfrm>
+            <a:off x="678027" y="2788920"/>
+            <a:ext cx="2331720" cy="457200"/>
+          </a:xfrm>
+          <a:prstGeom prst="rect">
+            <a:avLst/>
+          </a:prstGeom>
+          <a:noFill/>
+        </p:spPr>
+        <p:txBody>
+          <a:bodyPr wrap="square" lIns="45720" rIns="45720" tIns="18288" bIns="18288" anchor="t">
+            <a:spAutoFit/>
+          </a:bodyPr>
+          <a:lstStyle/>
+          <a:p>
+            <a:pPr algn="ctr"/>
+            <a:r>
+              <a:rPr sz="1500" b="1" i="0">
+                <a:solidFill>
+                  <a:srgbClr val="0B1E3F"/>
+                </a:solidFill>
+                <a:latin typeface="Calibri"/>
+              </a:rPr>
+              <a:t>Datenerfassung</a:t>
+            </a:r>
+          </a:p>
+        </p:txBody>
+      </p:sp>
+      <p:sp>
+        <p:nvSpPr>
+          <p:cNvPr id="10" name="TextBox 9"/>
+          <p:cNvSpPr txBox="1"/>
+          <p:nvPr/>
+        </p:nvSpPr>
+        <p:spPr>
+          <a:xfrm>
+            <a:off x="678027" y="3337560"/>
+            <a:ext cx="2331720" cy="1645920"/>
+          </a:xfrm>
+          <a:prstGeom prst="rect">
+            <a:avLst/>
+          </a:prstGeom>
+          <a:noFill/>
+        </p:spPr>
+        <p:txBody>
+          <a:bodyPr wrap="square" lIns="45720" rIns="45720" tIns="18288" bIns="18288" anchor="t">
+            <a:spAutoFit/>
+          </a:bodyPr>
+          <a:lstStyle/>
+          <a:p>
+            <a:pPr algn="ctr"/>
+            <a:r>
+              <a:rPr sz="1100" b="0" i="0">
+                <a:solidFill>
+                  <a:srgbClr val="1B263A"/>
+                </a:solidFill>
+                <a:latin typeface="Calibri"/>
+              </a:rPr>
+              <a:t>Steuererklärungen,</a:t>
+            </a:r>
+          </a:p>
+          <a:p>
+            <a:pPr algn="ctr"/>
+            <a:r>
+              <a:rPr sz="1100" b="0" i="0">
+                <a:solidFill>
+                  <a:srgbClr val="1B263A"/>
+                </a:solidFill>
+                <a:latin typeface="Calibri"/>
+              </a:rPr>
+              <a:t>Rechnungen,</a:t>
+            </a:r>
+          </a:p>
+          <a:p>
+            <a:pPr algn="ctr"/>
+            <a:r>
+              <a:rPr sz="1100" b="0" i="0">
+                <a:solidFill>
+                  <a:srgbClr val="1B263A"/>
+                </a:solidFill>
+                <a:latin typeface="Calibri"/>
+              </a:rPr>
+              <a:t>Bankdaten, CRS- /</a:t>
+            </a:r>
+          </a:p>
+          <a:p>
+            <a:pPr algn="ctr"/>
+            <a:r>
+              <a:rPr sz="1100" b="0" i="0">
+                <a:solidFill>
+                  <a:srgbClr val="1B263A"/>
+                </a:solidFill>
+                <a:latin typeface="Calibri"/>
+              </a:rPr>
+              <a:t>CbCR-Meldungen</a:t>
+            </a:r>
+          </a:p>
+        </p:txBody>
+      </p:sp>
+      <p:sp>
+        <p:nvSpPr>
+          <p:cNvPr id="11" name="Right Arrow 10"/>
           <p:cNvSpPr/>
           <p:nvPr/>
         </p:nvSpPr>
         <p:spPr>
           <a:xfrm>
-            <a:off x="640080" y="3337560"/>
-            <a:ext cx="137160" cy="1280160"/>
-          </a:xfrm>
-          <a:prstGeom prst="rect">
-            <a:avLst/>
-          </a:prstGeom>
-          <a:solidFill>
-            <a:srgbClr val="00C2A8"/>
+            <a:off x="3165195" y="3383280"/>
+            <a:ext cx="192024" cy="365760"/>
+          </a:xfrm>
+          <a:prstGeom prst="rightArrow">
+            <a:avLst/>
+          </a:prstGeom>
+          <a:solidFill>
+            <a:srgbClr val="0B1E3F"/>
           </a:solidFill>
           <a:ln>
             <a:noFill/>
           </a:ln>
-          <a:effectLst/>
         </p:spPr>
         <p:style>
           <a:lnRef idx="1">
@@ -7997,127 +7682,22 @@
       </p:sp>
       <p:sp>
         <p:nvSpPr>
-          <p:cNvPr id="11" name="TextBox 10"/>
-          <p:cNvSpPr txBox="1"/>
-          <p:nvPr/>
-        </p:nvSpPr>
-        <p:spPr>
-          <a:xfrm>
-            <a:off x="914400" y="3474720"/>
-            <a:ext cx="1097280" cy="1005840"/>
-          </a:xfrm>
-          <a:prstGeom prst="rect">
-            <a:avLst/>
-          </a:prstGeom>
-          <a:noFill/>
-        </p:spPr>
-        <p:txBody>
-          <a:bodyPr wrap="square" lIns="45720" rIns="45720" tIns="18288" bIns="18288" anchor="ctr">
-            <a:spAutoFit/>
-          </a:bodyPr>
-          <a:lstStyle/>
-          <a:p>
-            <a:pPr algn="l"/>
-            <a:r>
-              <a:rPr sz="3600" b="1">
-                <a:solidFill>
-                  <a:srgbClr val="00C2A8"/>
-                </a:solidFill>
-                <a:latin typeface="Calibri"/>
-              </a:rPr>
-              <a:t>02</a:t>
-            </a:r>
-          </a:p>
-        </p:txBody>
-      </p:sp>
-      <p:sp>
-        <p:nvSpPr>
-          <p:cNvPr id="12" name="TextBox 11"/>
-          <p:cNvSpPr txBox="1"/>
-          <p:nvPr/>
-        </p:nvSpPr>
-        <p:spPr>
-          <a:xfrm>
-            <a:off x="2103120" y="3474720"/>
-            <a:ext cx="9144000" cy="457200"/>
-          </a:xfrm>
-          <a:prstGeom prst="rect">
-            <a:avLst/>
-          </a:prstGeom>
-          <a:noFill/>
-        </p:spPr>
-        <p:txBody>
-          <a:bodyPr wrap="square" lIns="45720" rIns="45720" tIns="18288" bIns="18288" anchor="ctr">
-            <a:spAutoFit/>
-          </a:bodyPr>
-          <a:lstStyle/>
-          <a:p>
-            <a:pPr algn="l"/>
-            <a:r>
-              <a:rPr sz="1800" b="1">
-                <a:solidFill>
-                  <a:srgbClr val="FFFFFF"/>
-                </a:solidFill>
-                <a:latin typeface="Calibri"/>
-              </a:rPr>
-              <a:t>KI als Gamechanger</a:t>
-            </a:r>
-          </a:p>
-        </p:txBody>
-      </p:sp>
-      <p:sp>
-        <p:nvSpPr>
-          <p:cNvPr id="13" name="TextBox 12"/>
-          <p:cNvSpPr txBox="1"/>
-          <p:nvPr/>
-        </p:nvSpPr>
-        <p:spPr>
-          <a:xfrm>
-            <a:off x="2103120" y="3931920"/>
-            <a:ext cx="9144000" cy="640080"/>
-          </a:xfrm>
-          <a:prstGeom prst="rect">
-            <a:avLst/>
-          </a:prstGeom>
-          <a:noFill/>
-        </p:spPr>
-        <p:txBody>
-          <a:bodyPr wrap="square" lIns="45720" rIns="45720" tIns="18288" bIns="18288" anchor="t">
-            <a:spAutoFit/>
-          </a:bodyPr>
-          <a:lstStyle/>
-          <a:p>
-            <a:pPr algn="l"/>
-            <a:r>
-              <a:rPr sz="1300" b="0">
-                <a:solidFill>
-                  <a:srgbClr val="CFD8E6"/>
-                </a:solidFill>
-                <a:latin typeface="Calibri"/>
-              </a:rPr>
-              <a:t>RAG-Systeme, LLMs und Big-Data-Analysen (TaDeA, NRW.Genius) erkennen Muster, die Menschen übersehen würden.</a:t>
-            </a:r>
-          </a:p>
-        </p:txBody>
-      </p:sp>
-      <p:sp>
-        <p:nvSpPr>
-          <p:cNvPr id="14" name="Rounded Rectangle 13"/>
+          <p:cNvPr id="12" name="Rounded Rectangle 11"/>
           <p:cNvSpPr/>
           <p:nvPr/>
         </p:nvSpPr>
         <p:spPr>
           <a:xfrm>
-            <a:off x="640080" y="4754880"/>
-            <a:ext cx="10881360" cy="1280160"/>
+            <a:off x="3375507" y="1828800"/>
+            <a:ext cx="2606040" cy="3291840"/>
           </a:xfrm>
           <a:prstGeom prst="roundRect">
             <a:avLst>
-              <a:gd name="adj" fmla="val 8000"/>
+              <a:gd name="adj" fmla="val 6000"/>
             </a:avLst>
           </a:prstGeom>
           <a:solidFill>
-            <a:srgbClr val="07142E"/>
+            <a:srgbClr val="FFFFFF"/>
           </a:solidFill>
           <a:ln>
             <a:noFill/>
@@ -8148,16 +7728,16 @@
       </p:sp>
       <p:sp>
         <p:nvSpPr>
-          <p:cNvPr id="15" name="Rectangle 14"/>
+          <p:cNvPr id="13" name="Oval 12"/>
           <p:cNvSpPr/>
           <p:nvPr/>
         </p:nvSpPr>
         <p:spPr>
           <a:xfrm>
-            <a:off x="640080" y="4754880"/>
-            <a:ext cx="137160" cy="1280160"/>
-          </a:xfrm>
-          <a:prstGeom prst="rect">
+            <a:off x="3558387" y="2011680"/>
+            <a:ext cx="640080" cy="640080"/>
+          </a:xfrm>
+          <a:prstGeom prst="ellipse">
             <a:avLst/>
           </a:prstGeom>
           <a:solidFill>
@@ -8183,6 +7763,164 @@
           </a:fontRef>
         </p:style>
         <p:txBody>
+          <a:bodyPr rtlCol="0" anchor="ctr" lIns="0" rIns="0" tIns="0" bIns="0"/>
+          <a:lstStyle/>
+          <a:p>
+            <a:pPr algn="ctr"/>
+            <a:r>
+              <a:rPr sz="2400" b="1">
+                <a:solidFill>
+                  <a:srgbClr val="0B1E3F"/>
+                </a:solidFill>
+                <a:latin typeface="Calibri"/>
+              </a:rPr>
+              <a:t>2</a:t>
+            </a:r>
+          </a:p>
+        </p:txBody>
+      </p:sp>
+      <p:sp>
+        <p:nvSpPr>
+          <p:cNvPr id="14" name="TextBox 13"/>
+          <p:cNvSpPr txBox="1"/>
+          <p:nvPr/>
+        </p:nvSpPr>
+        <p:spPr>
+          <a:xfrm>
+            <a:off x="3512667" y="2788920"/>
+            <a:ext cx="2331720" cy="457200"/>
+          </a:xfrm>
+          <a:prstGeom prst="rect">
+            <a:avLst/>
+          </a:prstGeom>
+          <a:noFill/>
+        </p:spPr>
+        <p:txBody>
+          <a:bodyPr wrap="square" lIns="45720" rIns="45720" tIns="18288" bIns="18288" anchor="t">
+            <a:spAutoFit/>
+          </a:bodyPr>
+          <a:lstStyle/>
+          <a:p>
+            <a:pPr algn="ctr"/>
+            <a:r>
+              <a:rPr sz="1500" b="1" i="0">
+                <a:solidFill>
+                  <a:srgbClr val="0B1E3F"/>
+                </a:solidFill>
+                <a:latin typeface="Calibri"/>
+              </a:rPr>
+              <a:t>KI-Analyse</a:t>
+            </a:r>
+          </a:p>
+        </p:txBody>
+      </p:sp>
+      <p:sp>
+        <p:nvSpPr>
+          <p:cNvPr id="15" name="TextBox 14"/>
+          <p:cNvSpPr txBox="1"/>
+          <p:nvPr/>
+        </p:nvSpPr>
+        <p:spPr>
+          <a:xfrm>
+            <a:off x="3512667" y="3337560"/>
+            <a:ext cx="2331720" cy="1645920"/>
+          </a:xfrm>
+          <a:prstGeom prst="rect">
+            <a:avLst/>
+          </a:prstGeom>
+          <a:noFill/>
+        </p:spPr>
+        <p:txBody>
+          <a:bodyPr wrap="square" lIns="45720" rIns="45720" tIns="18288" bIns="18288" anchor="t">
+            <a:spAutoFit/>
+          </a:bodyPr>
+          <a:lstStyle/>
+          <a:p>
+            <a:pPr algn="ctr"/>
+            <a:r>
+              <a:rPr sz="1100" b="0" i="0">
+                <a:solidFill>
+                  <a:srgbClr val="1B263A"/>
+                </a:solidFill>
+                <a:latin typeface="Calibri"/>
+              </a:rPr>
+              <a:t>LLMs &amp; Big-Data-</a:t>
+            </a:r>
+          </a:p>
+          <a:p>
+            <a:pPr algn="ctr"/>
+            <a:r>
+              <a:rPr sz="1100" b="0" i="0">
+                <a:solidFill>
+                  <a:srgbClr val="1B263A"/>
+                </a:solidFill>
+                <a:latin typeface="Calibri"/>
+              </a:rPr>
+              <a:t>Methoden erkennen</a:t>
+            </a:r>
+          </a:p>
+          <a:p>
+            <a:pPr algn="ctr"/>
+            <a:r>
+              <a:rPr sz="1100" b="0" i="0">
+                <a:solidFill>
+                  <a:srgbClr val="1B263A"/>
+                </a:solidFill>
+                <a:latin typeface="Calibri"/>
+              </a:rPr>
+              <a:t>Muster und</a:t>
+            </a:r>
+          </a:p>
+          <a:p>
+            <a:pPr algn="ctr"/>
+            <a:r>
+              <a:rPr sz="1100" b="0" i="0">
+                <a:solidFill>
+                  <a:srgbClr val="1B263A"/>
+                </a:solidFill>
+                <a:latin typeface="Calibri"/>
+              </a:rPr>
+              <a:t>Auffälligkeiten</a:t>
+            </a:r>
+          </a:p>
+        </p:txBody>
+      </p:sp>
+      <p:sp>
+        <p:nvSpPr>
+          <p:cNvPr id="16" name="Right Arrow 15"/>
+          <p:cNvSpPr/>
+          <p:nvPr/>
+        </p:nvSpPr>
+        <p:spPr>
+          <a:xfrm>
+            <a:off x="5999835" y="3383280"/>
+            <a:ext cx="192024" cy="365760"/>
+          </a:xfrm>
+          <a:prstGeom prst="rightArrow">
+            <a:avLst/>
+          </a:prstGeom>
+          <a:solidFill>
+            <a:srgbClr val="0B1E3F"/>
+          </a:solidFill>
+          <a:ln>
+            <a:noFill/>
+          </a:ln>
+        </p:spPr>
+        <p:style>
+          <a:lnRef idx="1">
+            <a:schemeClr val="accent1"/>
+          </a:lnRef>
+          <a:fillRef idx="3">
+            <a:schemeClr val="accent1"/>
+          </a:fillRef>
+          <a:effectRef idx="2">
+            <a:schemeClr val="accent1"/>
+          </a:effectRef>
+          <a:fontRef idx="minor">
+            <a:schemeClr val="lt1"/>
+          </a:fontRef>
+        </p:style>
+        <p:txBody>
           <a:bodyPr rtlCol="0" anchor="ctr"/>
           <a:lstStyle/>
           <a:p>
@@ -8192,14 +7930,501 @@
       </p:sp>
       <p:sp>
         <p:nvSpPr>
-          <p:cNvPr id="16" name="TextBox 15"/>
+          <p:cNvPr id="17" name="Rounded Rectangle 16"/>
+          <p:cNvSpPr/>
+          <p:nvPr/>
+        </p:nvSpPr>
+        <p:spPr>
+          <a:xfrm>
+            <a:off x="6210147" y="1828800"/>
+            <a:ext cx="2606040" cy="3291840"/>
+          </a:xfrm>
+          <a:prstGeom prst="roundRect">
+            <a:avLst>
+              <a:gd name="adj" fmla="val 6000"/>
+            </a:avLst>
+          </a:prstGeom>
+          <a:solidFill>
+            <a:srgbClr val="FFFFFF"/>
+          </a:solidFill>
+          <a:ln>
+            <a:noFill/>
+          </a:ln>
+          <a:effectLst/>
+        </p:spPr>
+        <p:style>
+          <a:lnRef idx="1">
+            <a:schemeClr val="accent1"/>
+          </a:lnRef>
+          <a:fillRef idx="3">
+            <a:schemeClr val="accent1"/>
+          </a:fillRef>
+          <a:effectRef idx="2">
+            <a:schemeClr val="accent1"/>
+          </a:effectRef>
+          <a:fontRef idx="minor">
+            <a:schemeClr val="lt1"/>
+          </a:fontRef>
+        </p:style>
+        <p:txBody>
+          <a:bodyPr rtlCol="0" anchor="ctr"/>
+          <a:lstStyle/>
+          <a:p>
+            <a:pPr algn="ctr"/>
+          </a:p>
+        </p:txBody>
+      </p:sp>
+      <p:sp>
+        <p:nvSpPr>
+          <p:cNvPr id="18" name="Oval 17"/>
+          <p:cNvSpPr/>
+          <p:nvPr/>
+        </p:nvSpPr>
+        <p:spPr>
+          <a:xfrm>
+            <a:off x="6393027" y="2011680"/>
+            <a:ext cx="640080" cy="640080"/>
+          </a:xfrm>
+          <a:prstGeom prst="ellipse">
+            <a:avLst/>
+          </a:prstGeom>
+          <a:solidFill>
+            <a:srgbClr val="00C2A8"/>
+          </a:solidFill>
+          <a:ln>
+            <a:noFill/>
+          </a:ln>
+          <a:effectLst/>
+        </p:spPr>
+        <p:style>
+          <a:lnRef idx="1">
+            <a:schemeClr val="accent1"/>
+          </a:lnRef>
+          <a:fillRef idx="3">
+            <a:schemeClr val="accent1"/>
+          </a:fillRef>
+          <a:effectRef idx="2">
+            <a:schemeClr val="accent1"/>
+          </a:effectRef>
+          <a:fontRef idx="minor">
+            <a:schemeClr val="lt1"/>
+          </a:fontRef>
+        </p:style>
+        <p:txBody>
+          <a:bodyPr rtlCol="0" anchor="ctr" lIns="0" rIns="0" tIns="0" bIns="0"/>
+          <a:lstStyle/>
+          <a:p>
+            <a:pPr algn="ctr"/>
+            <a:r>
+              <a:rPr sz="2400" b="1">
+                <a:solidFill>
+                  <a:srgbClr val="0B1E3F"/>
+                </a:solidFill>
+                <a:latin typeface="Calibri"/>
+              </a:rPr>
+              <a:t>3</a:t>
+            </a:r>
+          </a:p>
+        </p:txBody>
+      </p:sp>
+      <p:sp>
+        <p:nvSpPr>
+          <p:cNvPr id="19" name="TextBox 18"/>
           <p:cNvSpPr txBox="1"/>
           <p:nvPr/>
         </p:nvSpPr>
         <p:spPr>
           <a:xfrm>
-            <a:off x="914400" y="4892040"/>
-            <a:ext cx="1097280" cy="1005840"/>
+            <a:off x="6347307" y="2788920"/>
+            <a:ext cx="2331720" cy="457200"/>
+          </a:xfrm>
+          <a:prstGeom prst="rect">
+            <a:avLst/>
+          </a:prstGeom>
+          <a:noFill/>
+        </p:spPr>
+        <p:txBody>
+          <a:bodyPr wrap="square" lIns="45720" rIns="45720" tIns="18288" bIns="18288" anchor="t">
+            <a:spAutoFit/>
+          </a:bodyPr>
+          <a:lstStyle/>
+          <a:p>
+            <a:pPr algn="ctr"/>
+            <a:r>
+              <a:rPr sz="1500" b="1" i="0">
+                <a:solidFill>
+                  <a:srgbClr val="0B1E3F"/>
+                </a:solidFill>
+                <a:latin typeface="Calibri"/>
+              </a:rPr>
+              <a:t>Risiko-Scoring</a:t>
+            </a:r>
+          </a:p>
+        </p:txBody>
+      </p:sp>
+      <p:sp>
+        <p:nvSpPr>
+          <p:cNvPr id="20" name="TextBox 19"/>
+          <p:cNvSpPr txBox="1"/>
+          <p:nvPr/>
+        </p:nvSpPr>
+        <p:spPr>
+          <a:xfrm>
+            <a:off x="6347307" y="3337560"/>
+            <a:ext cx="2331720" cy="1645920"/>
+          </a:xfrm>
+          <a:prstGeom prst="rect">
+            <a:avLst/>
+          </a:prstGeom>
+          <a:noFill/>
+        </p:spPr>
+        <p:txBody>
+          <a:bodyPr wrap="square" lIns="45720" rIns="45720" tIns="18288" bIns="18288" anchor="t">
+            <a:spAutoFit/>
+          </a:bodyPr>
+          <a:lstStyle/>
+          <a:p>
+            <a:pPr algn="ctr"/>
+            <a:r>
+              <a:rPr sz="1100" b="0" i="0">
+                <a:solidFill>
+                  <a:srgbClr val="1B263A"/>
+                </a:solidFill>
+                <a:latin typeface="Calibri"/>
+              </a:rPr>
+              <a:t>Algorithmus vergibt</a:t>
+            </a:r>
+          </a:p>
+          <a:p>
+            <a:pPr algn="ctr"/>
+            <a:r>
+              <a:rPr sz="1100" b="0" i="0">
+                <a:solidFill>
+                  <a:srgbClr val="1B263A"/>
+                </a:solidFill>
+                <a:latin typeface="Calibri"/>
+              </a:rPr>
+              <a:t>eine Risiko-Punktzahl</a:t>
+            </a:r>
+          </a:p>
+          <a:p>
+            <a:pPr algn="ctr"/>
+            <a:r>
+              <a:rPr sz="1100" b="0" i="0">
+                <a:solidFill>
+                  <a:srgbClr val="1B263A"/>
+                </a:solidFill>
+                <a:latin typeface="Calibri"/>
+              </a:rPr>
+              <a:t>pro Fall (low / mid /</a:t>
+            </a:r>
+          </a:p>
+          <a:p>
+            <a:pPr algn="ctr"/>
+            <a:r>
+              <a:rPr sz="1100" b="0" i="0">
+                <a:solidFill>
+                  <a:srgbClr val="1B263A"/>
+                </a:solidFill>
+                <a:latin typeface="Calibri"/>
+              </a:rPr>
+              <a:t>high)</a:t>
+            </a:r>
+          </a:p>
+        </p:txBody>
+      </p:sp>
+      <p:sp>
+        <p:nvSpPr>
+          <p:cNvPr id="21" name="Right Arrow 20"/>
+          <p:cNvSpPr/>
+          <p:nvPr/>
+        </p:nvSpPr>
+        <p:spPr>
+          <a:xfrm>
+            <a:off x="8834475" y="3383280"/>
+            <a:ext cx="192024" cy="365760"/>
+          </a:xfrm>
+          <a:prstGeom prst="rightArrow">
+            <a:avLst/>
+          </a:prstGeom>
+          <a:solidFill>
+            <a:srgbClr val="0B1E3F"/>
+          </a:solidFill>
+          <a:ln>
+            <a:noFill/>
+          </a:ln>
+        </p:spPr>
+        <p:style>
+          <a:lnRef idx="1">
+            <a:schemeClr val="accent1"/>
+          </a:lnRef>
+          <a:fillRef idx="3">
+            <a:schemeClr val="accent1"/>
+          </a:fillRef>
+          <a:effectRef idx="2">
+            <a:schemeClr val="accent1"/>
+          </a:effectRef>
+          <a:fontRef idx="minor">
+            <a:schemeClr val="lt1"/>
+          </a:fontRef>
+        </p:style>
+        <p:txBody>
+          <a:bodyPr rtlCol="0" anchor="ctr"/>
+          <a:lstStyle/>
+          <a:p>
+            <a:pPr algn="ctr"/>
+          </a:p>
+        </p:txBody>
+      </p:sp>
+      <p:sp>
+        <p:nvSpPr>
+          <p:cNvPr id="22" name="Rounded Rectangle 21"/>
+          <p:cNvSpPr/>
+          <p:nvPr/>
+        </p:nvSpPr>
+        <p:spPr>
+          <a:xfrm>
+            <a:off x="9044787" y="1828800"/>
+            <a:ext cx="2606040" cy="3291840"/>
+          </a:xfrm>
+          <a:prstGeom prst="roundRect">
+            <a:avLst>
+              <a:gd name="adj" fmla="val 6000"/>
+            </a:avLst>
+          </a:prstGeom>
+          <a:solidFill>
+            <a:srgbClr val="FFFFFF"/>
+          </a:solidFill>
+          <a:ln>
+            <a:noFill/>
+          </a:ln>
+          <a:effectLst/>
+        </p:spPr>
+        <p:style>
+          <a:lnRef idx="1">
+            <a:schemeClr val="accent1"/>
+          </a:lnRef>
+          <a:fillRef idx="3">
+            <a:schemeClr val="accent1"/>
+          </a:fillRef>
+          <a:effectRef idx="2">
+            <a:schemeClr val="accent1"/>
+          </a:effectRef>
+          <a:fontRef idx="minor">
+            <a:schemeClr val="lt1"/>
+          </a:fontRef>
+        </p:style>
+        <p:txBody>
+          <a:bodyPr rtlCol="0" anchor="ctr"/>
+          <a:lstStyle/>
+          <a:p>
+            <a:pPr algn="ctr"/>
+          </a:p>
+        </p:txBody>
+      </p:sp>
+      <p:sp>
+        <p:nvSpPr>
+          <p:cNvPr id="23" name="Oval 22"/>
+          <p:cNvSpPr/>
+          <p:nvPr/>
+        </p:nvSpPr>
+        <p:spPr>
+          <a:xfrm>
+            <a:off x="9227667" y="2011680"/>
+            <a:ext cx="640080" cy="640080"/>
+          </a:xfrm>
+          <a:prstGeom prst="ellipse">
+            <a:avLst/>
+          </a:prstGeom>
+          <a:solidFill>
+            <a:srgbClr val="00C2A8"/>
+          </a:solidFill>
+          <a:ln>
+            <a:noFill/>
+          </a:ln>
+          <a:effectLst/>
+        </p:spPr>
+        <p:style>
+          <a:lnRef idx="1">
+            <a:schemeClr val="accent1"/>
+          </a:lnRef>
+          <a:fillRef idx="3">
+            <a:schemeClr val="accent1"/>
+          </a:fillRef>
+          <a:effectRef idx="2">
+            <a:schemeClr val="accent1"/>
+          </a:effectRef>
+          <a:fontRef idx="minor">
+            <a:schemeClr val="lt1"/>
+          </a:fontRef>
+        </p:style>
+        <p:txBody>
+          <a:bodyPr rtlCol="0" anchor="ctr" lIns="0" rIns="0" tIns="0" bIns="0"/>
+          <a:lstStyle/>
+          <a:p>
+            <a:pPr algn="ctr"/>
+            <a:r>
+              <a:rPr sz="2400" b="1">
+                <a:solidFill>
+                  <a:srgbClr val="0B1E3F"/>
+                </a:solidFill>
+                <a:latin typeface="Calibri"/>
+              </a:rPr>
+              <a:t>4</a:t>
+            </a:r>
+          </a:p>
+        </p:txBody>
+      </p:sp>
+      <p:sp>
+        <p:nvSpPr>
+          <p:cNvPr id="24" name="TextBox 23"/>
+          <p:cNvSpPr txBox="1"/>
+          <p:nvPr/>
+        </p:nvSpPr>
+        <p:spPr>
+          <a:xfrm>
+            <a:off x="9181947" y="2788920"/>
+            <a:ext cx="2331720" cy="457200"/>
+          </a:xfrm>
+          <a:prstGeom prst="rect">
+            <a:avLst/>
+          </a:prstGeom>
+          <a:noFill/>
+        </p:spPr>
+        <p:txBody>
+          <a:bodyPr wrap="square" lIns="45720" rIns="45720" tIns="18288" bIns="18288" anchor="t">
+            <a:spAutoFit/>
+          </a:bodyPr>
+          <a:lstStyle/>
+          <a:p>
+            <a:pPr algn="ctr"/>
+            <a:r>
+              <a:rPr sz="1500" b="1" i="0">
+                <a:solidFill>
+                  <a:srgbClr val="0B1E3F"/>
+                </a:solidFill>
+                <a:latin typeface="Calibri"/>
+              </a:rPr>
+              <a:t>Mensch entscheidet</a:t>
+            </a:r>
+          </a:p>
+        </p:txBody>
+      </p:sp>
+      <p:sp>
+        <p:nvSpPr>
+          <p:cNvPr id="25" name="TextBox 24"/>
+          <p:cNvSpPr txBox="1"/>
+          <p:nvPr/>
+        </p:nvSpPr>
+        <p:spPr>
+          <a:xfrm>
+            <a:off x="9181947" y="3337560"/>
+            <a:ext cx="2331720" cy="1645920"/>
+          </a:xfrm>
+          <a:prstGeom prst="rect">
+            <a:avLst/>
+          </a:prstGeom>
+          <a:noFill/>
+        </p:spPr>
+        <p:txBody>
+          <a:bodyPr wrap="square" lIns="45720" rIns="45720" tIns="18288" bIns="18288" anchor="t">
+            <a:spAutoFit/>
+          </a:bodyPr>
+          <a:lstStyle/>
+          <a:p>
+            <a:pPr algn="ctr"/>
+            <a:r>
+              <a:rPr sz="1100" b="0" i="0">
+                <a:solidFill>
+                  <a:srgbClr val="1B263A"/>
+                </a:solidFill>
+                <a:latin typeface="Calibri"/>
+              </a:rPr>
+              <a:t>Prüfer prüft</a:t>
+            </a:r>
+          </a:p>
+          <a:p>
+            <a:pPr algn="ctr"/>
+            <a:r>
+              <a:rPr sz="1100" b="0" i="0">
+                <a:solidFill>
+                  <a:srgbClr val="1B263A"/>
+                </a:solidFill>
+                <a:latin typeface="Calibri"/>
+              </a:rPr>
+              <a:t>Verdachtsfall –</a:t>
+            </a:r>
+          </a:p>
+          <a:p>
+            <a:pPr algn="ctr"/>
+            <a:r>
+              <a:rPr sz="1100" b="0" i="0">
+                <a:solidFill>
+                  <a:srgbClr val="1B263A"/>
+                </a:solidFill>
+                <a:latin typeface="Calibri"/>
+              </a:rPr>
+              <a:t>Human-in-the-Loop</a:t>
+            </a:r>
+          </a:p>
+        </p:txBody>
+      </p:sp>
+      <p:sp>
+        <p:nvSpPr>
+          <p:cNvPr id="26" name="Rounded Rectangle 25"/>
+          <p:cNvSpPr/>
+          <p:nvPr/>
+        </p:nvSpPr>
+        <p:spPr>
+          <a:xfrm>
+            <a:off x="548640" y="5349240"/>
+            <a:ext cx="11155680" cy="731520"/>
+          </a:xfrm>
+          <a:prstGeom prst="roundRect">
+            <a:avLst>
+              <a:gd name="adj" fmla="val 20000"/>
+            </a:avLst>
+          </a:prstGeom>
+          <a:solidFill>
+            <a:srgbClr val="0B1E3F"/>
+          </a:solidFill>
+          <a:ln>
+            <a:noFill/>
+          </a:ln>
+          <a:effectLst/>
+        </p:spPr>
+        <p:style>
+          <a:lnRef idx="1">
+            <a:schemeClr val="accent1"/>
+          </a:lnRef>
+          <a:fillRef idx="3">
+            <a:schemeClr val="accent1"/>
+          </a:fillRef>
+          <a:effectRef idx="2">
+            <a:schemeClr val="accent1"/>
+          </a:effectRef>
+          <a:fontRef idx="minor">
+            <a:schemeClr val="lt1"/>
+          </a:fontRef>
+        </p:style>
+        <p:txBody>
+          <a:bodyPr rtlCol="0" anchor="ctr"/>
+          <a:lstStyle/>
+          <a:p>
+            <a:pPr algn="ctr"/>
+          </a:p>
+        </p:txBody>
+      </p:sp>
+      <p:sp>
+        <p:nvSpPr>
+          <p:cNvPr id="27" name="TextBox 26"/>
+          <p:cNvSpPr txBox="1"/>
+          <p:nvPr/>
+        </p:nvSpPr>
+        <p:spPr>
+          <a:xfrm>
+            <a:off x="731520" y="5349240"/>
+            <a:ext cx="10972800" cy="731520"/>
           </a:xfrm>
           <a:prstGeom prst="rect">
             <a:avLst/>
@@ -8214,27 +8439,71 @@
           <a:p>
             <a:pPr algn="l"/>
             <a:r>
-              <a:rPr sz="3600" b="1">
-                <a:solidFill>
-                  <a:srgbClr val="00C2A8"/>
-                </a:solidFill>
-                <a:latin typeface="Calibri"/>
-              </a:rPr>
-              <a:t>03</a:t>
-            </a:r>
-          </a:p>
-        </p:txBody>
-      </p:sp>
-      <p:sp>
-        <p:nvSpPr>
-          <p:cNvPr id="17" name="TextBox 16"/>
+              <a:rPr sz="1400" b="1" i="0">
+                <a:solidFill>
+                  <a:srgbClr val="FFFFFF"/>
+                </a:solidFill>
+                <a:latin typeface="Calibri"/>
+              </a:rPr>
+              <a:t>  Mensch &amp; Maschine arbeiten zusammen – die KI sortiert vor, der Prüfer entscheidet.</a:t>
+            </a:r>
+          </a:p>
+        </p:txBody>
+      </p:sp>
+      <p:sp>
+        <p:nvSpPr>
+          <p:cNvPr id="28" name="Rectangle 27"/>
+          <p:cNvSpPr/>
+          <p:nvPr/>
+        </p:nvSpPr>
+        <p:spPr>
+          <a:xfrm>
+            <a:off x="0" y="6537960"/>
+            <a:ext cx="12191695" cy="320040"/>
+          </a:xfrm>
+          <a:prstGeom prst="rect">
+            <a:avLst/>
+          </a:prstGeom>
+          <a:solidFill>
+            <a:srgbClr val="07142E"/>
+          </a:solidFill>
+          <a:ln>
+            <a:noFill/>
+          </a:ln>
+          <a:effectLst/>
+        </p:spPr>
+        <p:style>
+          <a:lnRef idx="1">
+            <a:schemeClr val="accent1"/>
+          </a:lnRef>
+          <a:fillRef idx="3">
+            <a:schemeClr val="accent1"/>
+          </a:fillRef>
+          <a:effectRef idx="2">
+            <a:schemeClr val="accent1"/>
+          </a:effectRef>
+          <a:fontRef idx="minor">
+            <a:schemeClr val="lt1"/>
+          </a:fontRef>
+        </p:style>
+        <p:txBody>
+          <a:bodyPr rtlCol="0" anchor="ctr"/>
+          <a:lstStyle/>
+          <a:p>
+            <a:pPr algn="ctr"/>
+          </a:p>
+        </p:txBody>
+      </p:sp>
+      <p:sp>
+        <p:nvSpPr>
+          <p:cNvPr id="29" name="TextBox 28"/>
           <p:cNvSpPr txBox="1"/>
           <p:nvPr/>
         </p:nvSpPr>
         <p:spPr>
           <a:xfrm>
-            <a:off x="2103120" y="4892040"/>
-            <a:ext cx="9144000" cy="457200"/>
+            <a:off x="365760" y="6556248"/>
+            <a:ext cx="7315200" cy="274320"/>
           </a:xfrm>
           <a:prstGeom prst="rect">
             <a:avLst/>
@@ -8249,62 +8518,27 @@
           <a:p>
             <a:pPr algn="l"/>
             <a:r>
-              <a:rPr sz="1800" b="1">
-                <a:solidFill>
-                  <a:srgbClr val="FFFFFF"/>
-                </a:solidFill>
-                <a:latin typeface="Calibri"/>
-              </a:rPr>
-              <a:t>Internationale Vernetzung</a:t>
-            </a:r>
-          </a:p>
-        </p:txBody>
-      </p:sp>
-      <p:sp>
-        <p:nvSpPr>
-          <p:cNvPr id="18" name="TextBox 17"/>
+              <a:rPr sz="1000" b="0" i="0">
+                <a:solidFill>
+                  <a:srgbClr val="B8C2D6"/>
+                </a:solidFill>
+                <a:latin typeface="Calibri"/>
+              </a:rPr>
+              <a:t>KI-Technik &amp; Steuerhinterziehung  •  Bastian &amp; Ibrahim</a:t>
+            </a:r>
+          </a:p>
+        </p:txBody>
+      </p:sp>
+      <p:sp>
+        <p:nvSpPr>
+          <p:cNvPr id="30" name="TextBox 29"/>
           <p:cNvSpPr txBox="1"/>
           <p:nvPr/>
         </p:nvSpPr>
         <p:spPr>
           <a:xfrm>
-            <a:off x="2103120" y="5349240"/>
-            <a:ext cx="9144000" cy="640080"/>
-          </a:xfrm>
-          <a:prstGeom prst="rect">
-            <a:avLst/>
-          </a:prstGeom>
-          <a:noFill/>
-        </p:spPr>
-        <p:txBody>
-          <a:bodyPr wrap="square" lIns="45720" rIns="45720" tIns="18288" bIns="18288" anchor="t">
-            <a:spAutoFit/>
-          </a:bodyPr>
-          <a:lstStyle/>
-          <a:p>
-            <a:pPr algn="l"/>
-            <a:r>
-              <a:rPr sz="1300" b="0">
-                <a:solidFill>
-                  <a:srgbClr val="CFD8E6"/>
-                </a:solidFill>
-                <a:latin typeface="Calibri"/>
-              </a:rPr>
-              <a:t>CRS, CbCR, FATCA und DAC 8 schaffen die Datenbasis, die KI-Systeme erst wirksam macht.</a:t>
-            </a:r>
-          </a:p>
-        </p:txBody>
-      </p:sp>
-      <p:sp>
-        <p:nvSpPr>
-          <p:cNvPr id="19" name="TextBox 18"/>
-          <p:cNvSpPr txBox="1"/>
-          <p:nvPr/>
-        </p:nvSpPr>
-        <p:spPr>
-          <a:xfrm>
-            <a:off x="0" y="6217920"/>
-            <a:ext cx="12191695" cy="457200"/>
+            <a:off x="11094415" y="6556248"/>
+            <a:ext cx="731520" cy="274320"/>
           </a:xfrm>
           <a:prstGeom prst="rect">
             <a:avLst/>
@@ -8317,15 +8551,15 @@
           </a:bodyPr>
           <a:lstStyle/>
           <a:p>
-            <a:pPr algn="ctr"/>
-            <a:r>
-              <a:rPr sz="2000" b="1">
+            <a:pPr algn="r"/>
+            <a:r>
+              <a:rPr sz="1000" b="0" i="0">
                 <a:solidFill>
                   <a:srgbClr val="00C2A8"/>
                 </a:solidFill>
                 <a:latin typeface="Calibri"/>
               </a:rPr>
-              <a:t>Vielen Dank für Ihre Aufmerksamkeit!</a:t>
+              <a:t>16</a:t>
             </a:r>
           </a:p>
         </p:txBody>
@@ -8468,13 +8702,13 @@
           <a:p>
             <a:pPr algn="l"/>
             <a:r>
-              <a:rPr sz="2600" b="1">
+              <a:rPr sz="2600" b="1" i="0">
                 <a:solidFill>
                   <a:srgbClr val="FFFFFF"/>
                 </a:solidFill>
                 <a:latin typeface="Calibri"/>
               </a:rPr>
-              <a:t>Quellenverzeichnis</a:t>
+              <a:t>Chancen &amp; Risiken des KI-Einsatzes</a:t>
             </a:r>
           </a:p>
         </p:txBody>
@@ -8503,13 +8737,13 @@
           <a:p>
             <a:pPr algn="r"/>
             <a:r>
-              <a:rPr sz="1200" b="0">
+              <a:rPr sz="1200" b="0" i="0">
                 <a:solidFill>
                   <a:srgbClr val="00C2A8"/>
                 </a:solidFill>
                 <a:latin typeface="Calibri"/>
               </a:rPr>
-              <a:t>Sources</a:t>
+              <a:t>Bewertung</a:t>
             </a:r>
           </a:p>
         </p:txBody>
@@ -8522,16 +8756,16 @@
         </p:nvSpPr>
         <p:spPr>
           <a:xfrm>
-            <a:off x="457200" y="1097280"/>
-            <a:ext cx="11247120" cy="640080"/>
+            <a:off x="502920" y="1188720"/>
+            <a:ext cx="5486400" cy="4754880"/>
           </a:xfrm>
           <a:prstGeom prst="roundRect">
             <a:avLst>
-              <a:gd name="adj" fmla="val 15000"/>
+              <a:gd name="adj" fmla="val 4000"/>
             </a:avLst>
           </a:prstGeom>
           <a:solidFill>
-            <a:srgbClr val="FFFFFF"/>
+            <a:srgbClr val="E6F6F2"/>
           </a:solidFill>
           <a:ln>
             <a:noFill/>
@@ -8562,20 +8796,22 @@
       </p:sp>
       <p:sp>
         <p:nvSpPr>
-          <p:cNvPr id="7" name="Rectangle 6"/>
+          <p:cNvPr id="7" name="Rounded Rectangle 6"/>
           <p:cNvSpPr/>
           <p:nvPr/>
         </p:nvSpPr>
         <p:spPr>
           <a:xfrm>
-            <a:off x="457200" y="1097280"/>
-            <a:ext cx="109728" cy="640080"/>
-          </a:xfrm>
-          <a:prstGeom prst="rect">
-            <a:avLst/>
-          </a:prstGeom>
-          <a:solidFill>
-            <a:srgbClr val="00C2A8"/>
+            <a:off x="502920" y="1188720"/>
+            <a:ext cx="5486400" cy="640080"/>
+          </a:xfrm>
+          <a:prstGeom prst="roundRect">
+            <a:avLst>
+              <a:gd name="adj" fmla="val 15000"/>
+            </a:avLst>
+          </a:prstGeom>
+          <a:solidFill>
+            <a:srgbClr val="00A084"/>
           </a:solidFill>
           <a:ln>
             <a:noFill/>
@@ -8612,8 +8848,8 @@
         </p:nvSpPr>
         <p:spPr>
           <a:xfrm>
-            <a:off x="685800" y="1170432"/>
-            <a:ext cx="548640" cy="502920"/>
+            <a:off x="502920" y="1188720"/>
+            <a:ext cx="5486400" cy="640080"/>
           </a:xfrm>
           <a:prstGeom prst="rect">
             <a:avLst/>
@@ -8628,13 +8864,13 @@
           <a:p>
             <a:pPr algn="l"/>
             <a:r>
-              <a:rPr sz="1800" b="1">
-                <a:solidFill>
-                  <a:srgbClr val="00C2A8"/>
-                </a:solidFill>
-                <a:latin typeface="Calibri"/>
-              </a:rPr>
-              <a:t>1</a:t>
+              <a:rPr sz="2000" b="1" i="0">
+                <a:solidFill>
+                  <a:srgbClr val="FFFFFF"/>
+                </a:solidFill>
+                <a:latin typeface="Calibri"/>
+              </a:rPr>
+              <a:t>  ✓  Chancen</a:t>
             </a:r>
           </a:p>
         </p:txBody>
@@ -8647,8 +8883,8 @@
         </p:nvSpPr>
         <p:spPr>
           <a:xfrm>
-            <a:off x="1234440" y="1143000"/>
-            <a:ext cx="7772400" cy="292608"/>
+            <a:off x="868680" y="2103120"/>
+            <a:ext cx="4937760" cy="502920"/>
           </a:xfrm>
           <a:prstGeom prst="rect">
             <a:avLst/>
@@ -8663,13 +8899,13 @@
           <a:p>
             <a:pPr algn="l"/>
             <a:r>
-              <a:rPr sz="1200" b="1">
-                <a:solidFill>
-                  <a:srgbClr val="0B1E3F"/>
-                </a:solidFill>
-                <a:latin typeface="Calibri"/>
-              </a:rPr>
-              <a:t>Künstliche Intelligenz in der Finanzverwaltung NRW</a:t>
+              <a:rPr sz="1400" b="0" i="0">
+                <a:solidFill>
+                  <a:srgbClr val="1B263A"/>
+                </a:solidFill>
+                <a:latin typeface="Calibri"/>
+              </a:rPr>
+              <a:t>•  Schnellere Bearbeitung von Millionen Fällen</a:t>
             </a:r>
           </a:p>
         </p:txBody>
@@ -8682,8 +8918,8 @@
         </p:nvSpPr>
         <p:spPr>
           <a:xfrm>
-            <a:off x="1234440" y="1444752"/>
-            <a:ext cx="10058400" cy="274320"/>
+            <a:off x="868680" y="2816352"/>
+            <a:ext cx="4937760" cy="502920"/>
           </a:xfrm>
           <a:prstGeom prst="rect">
             <a:avLst/>
@@ -8698,35 +8934,140 @@
           <a:p>
             <a:pPr algn="l"/>
             <a:r>
-              <a:rPr sz="1000" b="0">
-                <a:solidFill>
-                  <a:srgbClr val="6E7A8C"/>
-                </a:solidFill>
-                <a:latin typeface="Calibri"/>
-              </a:rPr>
-              <a:t>finanzverwaltung.nrw – abgerufen am 23.05.2026</a:t>
-            </a:r>
-          </a:p>
-        </p:txBody>
-      </p:sp>
-      <p:sp>
-        <p:nvSpPr>
-          <p:cNvPr id="11" name="Rounded Rectangle 10"/>
+              <a:rPr sz="1400" b="0" i="0">
+                <a:solidFill>
+                  <a:srgbClr val="1B263A"/>
+                </a:solidFill>
+                <a:latin typeface="Calibri"/>
+              </a:rPr>
+              <a:t>•  Erkennung komplexer Betrugsmuster</a:t>
+            </a:r>
+          </a:p>
+        </p:txBody>
+      </p:sp>
+      <p:sp>
+        <p:nvSpPr>
+          <p:cNvPr id="11" name="TextBox 10"/>
+          <p:cNvSpPr txBox="1"/>
+          <p:nvPr/>
+        </p:nvSpPr>
+        <p:spPr>
+          <a:xfrm>
+            <a:off x="868680" y="3529584"/>
+            <a:ext cx="4937760" cy="502920"/>
+          </a:xfrm>
+          <a:prstGeom prst="rect">
+            <a:avLst/>
+          </a:prstGeom>
+          <a:noFill/>
+        </p:spPr>
+        <p:txBody>
+          <a:bodyPr wrap="square" lIns="45720" rIns="45720" tIns="18288" bIns="18288" anchor="ctr">
+            <a:spAutoFit/>
+          </a:bodyPr>
+          <a:lstStyle/>
+          <a:p>
+            <a:pPr algn="l"/>
+            <a:r>
+              <a:rPr sz="1400" b="0" i="0">
+                <a:solidFill>
+                  <a:srgbClr val="1B263A"/>
+                </a:solidFill>
+                <a:latin typeface="Calibri"/>
+              </a:rPr>
+              <a:t>•  Entlastung der Finanzbeamten</a:t>
+            </a:r>
+          </a:p>
+        </p:txBody>
+      </p:sp>
+      <p:sp>
+        <p:nvSpPr>
+          <p:cNvPr id="12" name="TextBox 11"/>
+          <p:cNvSpPr txBox="1"/>
+          <p:nvPr/>
+        </p:nvSpPr>
+        <p:spPr>
+          <a:xfrm>
+            <a:off x="868680" y="4242816"/>
+            <a:ext cx="4937760" cy="502920"/>
+          </a:xfrm>
+          <a:prstGeom prst="rect">
+            <a:avLst/>
+          </a:prstGeom>
+          <a:noFill/>
+        </p:spPr>
+        <p:txBody>
+          <a:bodyPr wrap="square" lIns="45720" rIns="45720" tIns="18288" bIns="18288" anchor="ctr">
+            <a:spAutoFit/>
+          </a:bodyPr>
+          <a:lstStyle/>
+          <a:p>
+            <a:pPr algn="l"/>
+            <a:r>
+              <a:rPr sz="1400" b="0" i="0">
+                <a:solidFill>
+                  <a:srgbClr val="1B263A"/>
+                </a:solidFill>
+                <a:latin typeface="Calibri"/>
+              </a:rPr>
+              <a:t>•  Mehr Steuereinnahmen für den Staat</a:t>
+            </a:r>
+          </a:p>
+        </p:txBody>
+      </p:sp>
+      <p:sp>
+        <p:nvSpPr>
+          <p:cNvPr id="13" name="TextBox 12"/>
+          <p:cNvSpPr txBox="1"/>
+          <p:nvPr/>
+        </p:nvSpPr>
+        <p:spPr>
+          <a:xfrm>
+            <a:off x="868680" y="4956048"/>
+            <a:ext cx="4937760" cy="502920"/>
+          </a:xfrm>
+          <a:prstGeom prst="rect">
+            <a:avLst/>
+          </a:prstGeom>
+          <a:noFill/>
+        </p:spPr>
+        <p:txBody>
+          <a:bodyPr wrap="square" lIns="45720" rIns="45720" tIns="18288" bIns="18288" anchor="ctr">
+            <a:spAutoFit/>
+          </a:bodyPr>
+          <a:lstStyle/>
+          <a:p>
+            <a:pPr algn="l"/>
+            <a:r>
+              <a:rPr sz="1400" b="0" i="0">
+                <a:solidFill>
+                  <a:srgbClr val="1B263A"/>
+                </a:solidFill>
+                <a:latin typeface="Calibri"/>
+              </a:rPr>
+              <a:t>•  Internationale Vernetzung der Daten</a:t>
+            </a:r>
+          </a:p>
+        </p:txBody>
+      </p:sp>
+      <p:sp>
+        <p:nvSpPr>
+          <p:cNvPr id="14" name="Rounded Rectangle 13"/>
           <p:cNvSpPr/>
           <p:nvPr/>
         </p:nvSpPr>
         <p:spPr>
           <a:xfrm>
-            <a:off x="457200" y="1847088"/>
-            <a:ext cx="11247120" cy="640080"/>
+            <a:off x="6202375" y="1188720"/>
+            <a:ext cx="5486400" cy="4754880"/>
           </a:xfrm>
           <a:prstGeom prst="roundRect">
             <a:avLst>
-              <a:gd name="adj" fmla="val 15000"/>
+              <a:gd name="adj" fmla="val 4000"/>
             </a:avLst>
           </a:prstGeom>
           <a:solidFill>
-            <a:srgbClr val="FFFFFF"/>
+            <a:srgbClr val="FDF1DC"/>
           </a:solidFill>
           <a:ln>
             <a:noFill/>
@@ -8757,20 +9098,22 @@
       </p:sp>
       <p:sp>
         <p:nvSpPr>
-          <p:cNvPr id="12" name="Rectangle 11"/>
+          <p:cNvPr id="15" name="Rounded Rectangle 14"/>
           <p:cNvSpPr/>
           <p:nvPr/>
         </p:nvSpPr>
         <p:spPr>
           <a:xfrm>
-            <a:off x="457200" y="1847088"/>
-            <a:ext cx="109728" cy="640080"/>
-          </a:xfrm>
-          <a:prstGeom prst="rect">
-            <a:avLst/>
-          </a:prstGeom>
-          <a:solidFill>
-            <a:srgbClr val="00C2A8"/>
+            <a:off x="6202375" y="1188720"/>
+            <a:ext cx="5486400" cy="640080"/>
+          </a:xfrm>
+          <a:prstGeom prst="roundRect">
+            <a:avLst>
+              <a:gd name="adj" fmla="val 15000"/>
+            </a:avLst>
+          </a:prstGeom>
+          <a:solidFill>
+            <a:srgbClr val="CE821F"/>
           </a:solidFill>
           <a:ln>
             <a:noFill/>
@@ -8801,14 +9144,14 @@
       </p:sp>
       <p:sp>
         <p:nvSpPr>
-          <p:cNvPr id="13" name="TextBox 12"/>
+          <p:cNvPr id="16" name="TextBox 15"/>
           <p:cNvSpPr txBox="1"/>
           <p:nvPr/>
         </p:nvSpPr>
         <p:spPr>
           <a:xfrm>
-            <a:off x="685800" y="1920240"/>
-            <a:ext cx="548640" cy="502920"/>
+            <a:off x="6202375" y="1188720"/>
+            <a:ext cx="5486400" cy="640080"/>
           </a:xfrm>
           <a:prstGeom prst="rect">
             <a:avLst/>
@@ -8823,27 +9166,27 @@
           <a:p>
             <a:pPr algn="l"/>
             <a:r>
-              <a:rPr sz="1800" b="1">
-                <a:solidFill>
-                  <a:srgbClr val="00C2A8"/>
-                </a:solidFill>
-                <a:latin typeface="Calibri"/>
-              </a:rPr>
-              <a:t>2</a:t>
-            </a:r>
-          </a:p>
-        </p:txBody>
-      </p:sp>
-      <p:sp>
-        <p:nvSpPr>
-          <p:cNvPr id="14" name="TextBox 13"/>
+              <a:rPr sz="2000" b="1" i="0">
+                <a:solidFill>
+                  <a:srgbClr val="FFFFFF"/>
+                </a:solidFill>
+                <a:latin typeface="Calibri"/>
+              </a:rPr>
+              <a:t>  !  Risiken</a:t>
+            </a:r>
+          </a:p>
+        </p:txBody>
+      </p:sp>
+      <p:sp>
+        <p:nvSpPr>
+          <p:cNvPr id="17" name="TextBox 16"/>
           <p:cNvSpPr txBox="1"/>
           <p:nvPr/>
         </p:nvSpPr>
         <p:spPr>
           <a:xfrm>
-            <a:off x="1234440" y="1892808"/>
-            <a:ext cx="7772400" cy="292608"/>
+            <a:off x="6568135" y="2103120"/>
+            <a:ext cx="4937760" cy="502920"/>
           </a:xfrm>
           <a:prstGeom prst="rect">
             <a:avLst/>
@@ -8858,27 +9201,27 @@
           <a:p>
             <a:pPr algn="l"/>
             <a:r>
-              <a:rPr sz="1200" b="1">
-                <a:solidFill>
-                  <a:srgbClr val="0B1E3F"/>
-                </a:solidFill>
-                <a:latin typeface="Calibri"/>
-              </a:rPr>
-              <a:t>NRW &amp; Fraunhofer IAIS erproben KI-Einsatz bei der Steuerfahndung</a:t>
-            </a:r>
-          </a:p>
-        </p:txBody>
-      </p:sp>
-      <p:sp>
-        <p:nvSpPr>
-          <p:cNvPr id="15" name="TextBox 14"/>
+              <a:rPr sz="1400" b="0" i="0">
+                <a:solidFill>
+                  <a:srgbClr val="1B263A"/>
+                </a:solidFill>
+                <a:latin typeface="Calibri"/>
+              </a:rPr>
+              <a:t>•  Datenschutz &amp; Persönlichkeitsrechte</a:t>
+            </a:r>
+          </a:p>
+        </p:txBody>
+      </p:sp>
+      <p:sp>
+        <p:nvSpPr>
+          <p:cNvPr id="18" name="TextBox 17"/>
           <p:cNvSpPr txBox="1"/>
           <p:nvPr/>
         </p:nvSpPr>
         <p:spPr>
           <a:xfrm>
-            <a:off x="1234440" y="2194560"/>
-            <a:ext cx="10058400" cy="274320"/>
+            <a:off x="6568135" y="2816352"/>
+            <a:ext cx="4937760" cy="502920"/>
           </a:xfrm>
           <a:prstGeom prst="rect">
             <a:avLst/>
@@ -8893,35 +9236,173 @@
           <a:p>
             <a:pPr algn="l"/>
             <a:r>
-              <a:rPr sz="1000" b="0">
-                <a:solidFill>
-                  <a:srgbClr val="6E7A8C"/>
-                </a:solidFill>
-                <a:latin typeface="Calibri"/>
-              </a:rPr>
-              <a:t>Pressemitteilung Finanzverwaltung NRW, 10.06.2025</a:t>
-            </a:r>
-          </a:p>
-        </p:txBody>
-      </p:sp>
-      <p:sp>
-        <p:nvSpPr>
-          <p:cNvPr id="16" name="Rounded Rectangle 15"/>
+              <a:rPr sz="1400" b="0" i="0">
+                <a:solidFill>
+                  <a:srgbClr val="1B263A"/>
+                </a:solidFill>
+                <a:latin typeface="Calibri"/>
+              </a:rPr>
+              <a:t>•  Falsche Treffer (False Positives)</a:t>
+            </a:r>
+          </a:p>
+        </p:txBody>
+      </p:sp>
+      <p:sp>
+        <p:nvSpPr>
+          <p:cNvPr id="19" name="TextBox 18"/>
+          <p:cNvSpPr txBox="1"/>
+          <p:nvPr/>
+        </p:nvSpPr>
+        <p:spPr>
+          <a:xfrm>
+            <a:off x="6568135" y="3529584"/>
+            <a:ext cx="4937760" cy="502920"/>
+          </a:xfrm>
+          <a:prstGeom prst="rect">
+            <a:avLst/>
+          </a:prstGeom>
+          <a:noFill/>
+        </p:spPr>
+        <p:txBody>
+          <a:bodyPr wrap="square" lIns="45720" rIns="45720" tIns="18288" bIns="18288" anchor="ctr">
+            <a:spAutoFit/>
+          </a:bodyPr>
+          <a:lstStyle/>
+          <a:p>
+            <a:pPr algn="l"/>
+            <a:r>
+              <a:rPr sz="1400" b="0" i="0">
+                <a:solidFill>
+                  <a:srgbClr val="1B263A"/>
+                </a:solidFill>
+                <a:latin typeface="Calibri"/>
+              </a:rPr>
+              <a:t>•  Black-Box-Problem: KI-Entscheidung schwer nachvollziehbar</a:t>
+            </a:r>
+          </a:p>
+        </p:txBody>
+      </p:sp>
+      <p:sp>
+        <p:nvSpPr>
+          <p:cNvPr id="20" name="TextBox 19"/>
+          <p:cNvSpPr txBox="1"/>
+          <p:nvPr/>
+        </p:nvSpPr>
+        <p:spPr>
+          <a:xfrm>
+            <a:off x="6568135" y="4242816"/>
+            <a:ext cx="4937760" cy="502920"/>
+          </a:xfrm>
+          <a:prstGeom prst="rect">
+            <a:avLst/>
+          </a:prstGeom>
+          <a:noFill/>
+        </p:spPr>
+        <p:txBody>
+          <a:bodyPr wrap="square" lIns="45720" rIns="45720" tIns="18288" bIns="18288" anchor="ctr">
+            <a:spAutoFit/>
+          </a:bodyPr>
+          <a:lstStyle/>
+          <a:p>
+            <a:pPr algn="l"/>
+            <a:r>
+              <a:rPr sz="1400" b="0" i="0">
+                <a:solidFill>
+                  <a:srgbClr val="1B263A"/>
+                </a:solidFill>
+                <a:latin typeface="Calibri"/>
+              </a:rPr>
+              <a:t>•  Abhängigkeit von Tech-Anbietern</a:t>
+            </a:r>
+          </a:p>
+        </p:txBody>
+      </p:sp>
+      <p:sp>
+        <p:nvSpPr>
+          <p:cNvPr id="21" name="TextBox 20"/>
+          <p:cNvSpPr txBox="1"/>
+          <p:nvPr/>
+        </p:nvSpPr>
+        <p:spPr>
+          <a:xfrm>
+            <a:off x="6568135" y="4956048"/>
+            <a:ext cx="4937760" cy="502920"/>
+          </a:xfrm>
+          <a:prstGeom prst="rect">
+            <a:avLst/>
+          </a:prstGeom>
+          <a:noFill/>
+        </p:spPr>
+        <p:txBody>
+          <a:bodyPr wrap="square" lIns="45720" rIns="45720" tIns="18288" bIns="18288" anchor="ctr">
+            <a:spAutoFit/>
+          </a:bodyPr>
+          <a:lstStyle/>
+          <a:p>
+            <a:pPr algn="l"/>
+            <a:r>
+              <a:rPr sz="1400" b="0" i="0">
+                <a:solidFill>
+                  <a:srgbClr val="1B263A"/>
+                </a:solidFill>
+                <a:latin typeface="Calibri"/>
+              </a:rPr>
+              <a:t>•  Hohe Kosten für Aufbau &amp; Betrieb</a:t>
+            </a:r>
+          </a:p>
+        </p:txBody>
+      </p:sp>
+      <p:sp>
+        <p:nvSpPr>
+          <p:cNvPr id="22" name="TextBox 21"/>
+          <p:cNvSpPr txBox="1"/>
+          <p:nvPr/>
+        </p:nvSpPr>
+        <p:spPr>
+          <a:xfrm>
+            <a:off x="548640" y="6126480"/>
+            <a:ext cx="11155680" cy="365760"/>
+          </a:xfrm>
+          <a:prstGeom prst="rect">
+            <a:avLst/>
+          </a:prstGeom>
+          <a:noFill/>
+        </p:spPr>
+        <p:txBody>
+          <a:bodyPr wrap="square" lIns="45720" rIns="45720" tIns="18288" bIns="18288" anchor="t">
+            <a:spAutoFit/>
+          </a:bodyPr>
+          <a:lstStyle/>
+          <a:p>
+            <a:pPr algn="ctr"/>
+            <a:r>
+              <a:rPr sz="1300" b="1" i="1">
+                <a:solidFill>
+                  <a:srgbClr val="0B1E3F"/>
+                </a:solidFill>
+                <a:latin typeface="Calibri"/>
+              </a:rPr>
+              <a:t>→ Entscheidend bleibt das Prinzip „Human in the Loop" – die KI unterstützt, sie ersetzt nicht.</a:t>
+            </a:r>
+          </a:p>
+        </p:txBody>
+      </p:sp>
+      <p:sp>
+        <p:nvSpPr>
+          <p:cNvPr id="23" name="Rectangle 22"/>
           <p:cNvSpPr/>
           <p:nvPr/>
         </p:nvSpPr>
         <p:spPr>
           <a:xfrm>
-            <a:off x="457200" y="2596896"/>
-            <a:ext cx="11247120" cy="640080"/>
-          </a:xfrm>
-          <a:prstGeom prst="roundRect">
-            <a:avLst>
-              <a:gd name="adj" fmla="val 15000"/>
-            </a:avLst>
-          </a:prstGeom>
-          <a:solidFill>
-            <a:srgbClr val="FFFFFF"/>
+            <a:off x="0" y="6537960"/>
+            <a:ext cx="12191695" cy="320040"/>
+          </a:xfrm>
+          <a:prstGeom prst="rect">
+            <a:avLst/>
+          </a:prstGeom>
+          <a:solidFill>
+            <a:srgbClr val="07142E"/>
           </a:solidFill>
           <a:ln>
             <a:noFill/>
@@ -8952,20 +9433,116 @@
       </p:sp>
       <p:sp>
         <p:nvSpPr>
-          <p:cNvPr id="17" name="Rectangle 16"/>
+          <p:cNvPr id="24" name="TextBox 23"/>
+          <p:cNvSpPr txBox="1"/>
+          <p:nvPr/>
+        </p:nvSpPr>
+        <p:spPr>
+          <a:xfrm>
+            <a:off x="365760" y="6556248"/>
+            <a:ext cx="7315200" cy="274320"/>
+          </a:xfrm>
+          <a:prstGeom prst="rect">
+            <a:avLst/>
+          </a:prstGeom>
+          <a:noFill/>
+        </p:spPr>
+        <p:txBody>
+          <a:bodyPr wrap="square" lIns="45720" rIns="45720" tIns="18288" bIns="18288" anchor="ctr">
+            <a:spAutoFit/>
+          </a:bodyPr>
+          <a:lstStyle/>
+          <a:p>
+            <a:pPr algn="l"/>
+            <a:r>
+              <a:rPr sz="1000" b="0" i="0">
+                <a:solidFill>
+                  <a:srgbClr val="B8C2D6"/>
+                </a:solidFill>
+                <a:latin typeface="Calibri"/>
+              </a:rPr>
+              <a:t>KI-Technik &amp; Steuerhinterziehung  •  Bastian &amp; Ibrahim</a:t>
+            </a:r>
+          </a:p>
+        </p:txBody>
+      </p:sp>
+      <p:sp>
+        <p:nvSpPr>
+          <p:cNvPr id="25" name="TextBox 24"/>
+          <p:cNvSpPr txBox="1"/>
+          <p:nvPr/>
+        </p:nvSpPr>
+        <p:spPr>
+          <a:xfrm>
+            <a:off x="11094415" y="6556248"/>
+            <a:ext cx="731520" cy="274320"/>
+          </a:xfrm>
+          <a:prstGeom prst="rect">
+            <a:avLst/>
+          </a:prstGeom>
+          <a:noFill/>
+        </p:spPr>
+        <p:txBody>
+          <a:bodyPr wrap="square" lIns="45720" rIns="45720" tIns="18288" bIns="18288" anchor="ctr">
+            <a:spAutoFit/>
+          </a:bodyPr>
+          <a:lstStyle/>
+          <a:p>
+            <a:pPr algn="r"/>
+            <a:r>
+              <a:rPr sz="1000" b="0" i="0">
+                <a:solidFill>
+                  <a:srgbClr val="00C2A8"/>
+                </a:solidFill>
+                <a:latin typeface="Calibri"/>
+              </a:rPr>
+              <a:t>17</a:t>
+            </a:r>
+          </a:p>
+        </p:txBody>
+      </p:sp>
+    </p:spTree>
+  </p:cSld>
+  <p:clrMapOvr>
+    <a:masterClrMapping/>
+  </p:clrMapOvr>
+</p:sld>
+</file>
+
+<file path=ppt/slides/slide18.xml><?xml version="1.0" encoding="utf-8"?>
+<p:sld xmlns:a="http://schemas.openxmlformats.org/drawingml/2006/main" xmlns:p="http://schemas.openxmlformats.org/presentationml/2006/main" xmlns:r="http://schemas.openxmlformats.org/officeDocument/2006/relationships">
+  <p:cSld>
+    <p:bg>
+      <p:bgPr>
+        <a:solidFill>
+          <a:srgbClr val="F2F5FA"/>
+        </a:solidFill>
+        <a:effectLst/>
+      </p:bgPr>
+    </p:bg>
+    <p:spTree>
+      <p:nvGrpSpPr>
+        <p:cNvPr id="1" name=""/>
+        <p:cNvGrpSpPr/>
+        <p:nvPr/>
+      </p:nvGrpSpPr>
+      <p:grpSpPr/>
+      <p:sp>
+        <p:nvSpPr>
+          <p:cNvPr id="2" name="Rectangle 1"/>
           <p:cNvSpPr/>
           <p:nvPr/>
         </p:nvSpPr>
         <p:spPr>
           <a:xfrm>
-            <a:off x="457200" y="2596896"/>
-            <a:ext cx="109728" cy="640080"/>
-          </a:xfrm>
-          <a:prstGeom prst="rect">
-            <a:avLst/>
-          </a:prstGeom>
-          <a:solidFill>
-            <a:srgbClr val="00C2A8"/>
+            <a:off x="0" y="0"/>
+            <a:ext cx="12191695" cy="914400"/>
+          </a:xfrm>
+          <a:prstGeom prst="rect">
+            <a:avLst/>
+          </a:prstGeom>
+          <a:solidFill>
+            <a:srgbClr val="0B1E3F"/>
           </a:solidFill>
           <a:ln>
             <a:noFill/>
@@ -8996,127 +9573,20 @@
       </p:sp>
       <p:sp>
         <p:nvSpPr>
-          <p:cNvPr id="18" name="TextBox 17"/>
-          <p:cNvSpPr txBox="1"/>
-          <p:nvPr/>
-        </p:nvSpPr>
-        <p:spPr>
-          <a:xfrm>
-            <a:off x="685800" y="2670048"/>
-            <a:ext cx="548640" cy="502920"/>
-          </a:xfrm>
-          <a:prstGeom prst="rect">
-            <a:avLst/>
-          </a:prstGeom>
-          <a:noFill/>
-        </p:spPr>
-        <p:txBody>
-          <a:bodyPr wrap="square" lIns="45720" rIns="45720" tIns="18288" bIns="18288" anchor="ctr">
-            <a:spAutoFit/>
-          </a:bodyPr>
-          <a:lstStyle/>
-          <a:p>
-            <a:pPr algn="l"/>
-            <a:r>
-              <a:rPr sz="1800" b="1">
-                <a:solidFill>
-                  <a:srgbClr val="00C2A8"/>
-                </a:solidFill>
-                <a:latin typeface="Calibri"/>
-              </a:rPr>
-              <a:t>3</a:t>
-            </a:r>
-          </a:p>
-        </p:txBody>
-      </p:sp>
-      <p:sp>
-        <p:nvSpPr>
-          <p:cNvPr id="19" name="TextBox 18"/>
-          <p:cNvSpPr txBox="1"/>
-          <p:nvPr/>
-        </p:nvSpPr>
-        <p:spPr>
-          <a:xfrm>
-            <a:off x="1234440" y="2642616"/>
-            <a:ext cx="7772400" cy="292608"/>
-          </a:xfrm>
-          <a:prstGeom prst="rect">
-            <a:avLst/>
-          </a:prstGeom>
-          <a:noFill/>
-        </p:spPr>
-        <p:txBody>
-          <a:bodyPr wrap="square" lIns="45720" rIns="45720" tIns="18288" bIns="18288" anchor="ctr">
-            <a:spAutoFit/>
-          </a:bodyPr>
-          <a:lstStyle/>
-          <a:p>
-            <a:pPr algn="l"/>
-            <a:r>
-              <a:rPr sz="1200" b="1">
-                <a:solidFill>
-                  <a:srgbClr val="0B1E3F"/>
-                </a:solidFill>
-                <a:latin typeface="Calibri"/>
-              </a:rPr>
-              <a:t>Finanzkriminalität mit Kryptowerten: Sachsen setzt auf KI</a:t>
-            </a:r>
-          </a:p>
-        </p:txBody>
-      </p:sp>
-      <p:sp>
-        <p:nvSpPr>
-          <p:cNvPr id="20" name="TextBox 19"/>
-          <p:cNvSpPr txBox="1"/>
-          <p:nvPr/>
-        </p:nvSpPr>
-        <p:spPr>
-          <a:xfrm>
-            <a:off x="1234440" y="2944368"/>
-            <a:ext cx="10058400" cy="274320"/>
-          </a:xfrm>
-          <a:prstGeom prst="rect">
-            <a:avLst/>
-          </a:prstGeom>
-          <a:noFill/>
-        </p:spPr>
-        <p:txBody>
-          <a:bodyPr wrap="square" lIns="45720" rIns="45720" tIns="18288" bIns="18288" anchor="ctr">
-            <a:spAutoFit/>
-          </a:bodyPr>
-          <a:lstStyle/>
-          <a:p>
-            <a:pPr algn="l"/>
-            <a:r>
-              <a:rPr sz="1000" b="0">
-                <a:solidFill>
-                  <a:srgbClr val="6E7A8C"/>
-                </a:solidFill>
-                <a:latin typeface="Calibri"/>
-              </a:rPr>
-              <a:t>Pressemitteilung, 12.11.2025</a:t>
-            </a:r>
-          </a:p>
-        </p:txBody>
-      </p:sp>
-      <p:sp>
-        <p:nvSpPr>
-          <p:cNvPr id="21" name="Rounded Rectangle 20"/>
+          <p:cNvPr id="3" name="Rectangle 2"/>
           <p:cNvSpPr/>
           <p:nvPr/>
         </p:nvSpPr>
         <p:spPr>
           <a:xfrm>
-            <a:off x="457200" y="3346704"/>
-            <a:ext cx="11247120" cy="640080"/>
-          </a:xfrm>
-          <a:prstGeom prst="roundRect">
-            <a:avLst>
-              <a:gd name="adj" fmla="val 15000"/>
-            </a:avLst>
-          </a:prstGeom>
-          <a:solidFill>
-            <a:srgbClr val="FFFFFF"/>
+            <a:off x="365760" y="201168"/>
+            <a:ext cx="73152" cy="502920"/>
+          </a:xfrm>
+          <a:prstGeom prst="rect">
+            <a:avLst/>
+          </a:prstGeom>
+          <a:solidFill>
+            <a:srgbClr val="00C2A8"/>
           </a:solidFill>
           <a:ln>
             <a:noFill/>
@@ -9147,20 +9617,90 @@
       </p:sp>
       <p:sp>
         <p:nvSpPr>
-          <p:cNvPr id="22" name="Rectangle 21"/>
+          <p:cNvPr id="4" name="TextBox 3"/>
+          <p:cNvSpPr txBox="1"/>
+          <p:nvPr/>
+        </p:nvSpPr>
+        <p:spPr>
+          <a:xfrm>
+            <a:off x="548640" y="164592"/>
+            <a:ext cx="9144000" cy="640080"/>
+          </a:xfrm>
+          <a:prstGeom prst="rect">
+            <a:avLst/>
+          </a:prstGeom>
+          <a:noFill/>
+        </p:spPr>
+        <p:txBody>
+          <a:bodyPr wrap="square" lIns="45720" rIns="45720" tIns="18288" bIns="18288" anchor="ctr">
+            <a:spAutoFit/>
+          </a:bodyPr>
+          <a:lstStyle/>
+          <a:p>
+            <a:pPr algn="l"/>
+            <a:r>
+              <a:rPr sz="2600" b="1" i="0">
+                <a:solidFill>
+                  <a:srgbClr val="FFFFFF"/>
+                </a:solidFill>
+                <a:latin typeface="Calibri"/>
+              </a:rPr>
+              <a:t>Ausblick – Was kommt 2026 und danach?</a:t>
+            </a:r>
+          </a:p>
+        </p:txBody>
+      </p:sp>
+      <p:sp>
+        <p:nvSpPr>
+          <p:cNvPr id="5" name="TextBox 4"/>
+          <p:cNvSpPr txBox="1"/>
+          <p:nvPr/>
+        </p:nvSpPr>
+        <p:spPr>
+          <a:xfrm>
+            <a:off x="9722815" y="274320"/>
+            <a:ext cx="2194560" cy="365760"/>
+          </a:xfrm>
+          <a:prstGeom prst="rect">
+            <a:avLst/>
+          </a:prstGeom>
+          <a:noFill/>
+        </p:spPr>
+        <p:txBody>
+          <a:bodyPr wrap="square" lIns="45720" rIns="45720" tIns="18288" bIns="18288" anchor="ctr">
+            <a:spAutoFit/>
+          </a:bodyPr>
+          <a:lstStyle/>
+          <a:p>
+            <a:pPr algn="r"/>
+            <a:r>
+              <a:rPr sz="1200" b="0" i="0">
+                <a:solidFill>
+                  <a:srgbClr val="00C2A8"/>
+                </a:solidFill>
+                <a:latin typeface="Calibri"/>
+              </a:rPr>
+              <a:t>Roadmap</a:t>
+            </a:r>
+          </a:p>
+        </p:txBody>
+      </p:sp>
+      <p:sp>
+        <p:nvSpPr>
+          <p:cNvPr id="6" name="Rectangle 5"/>
           <p:cNvSpPr/>
           <p:nvPr/>
         </p:nvSpPr>
         <p:spPr>
           <a:xfrm>
-            <a:off x="457200" y="3346704"/>
-            <a:ext cx="109728" cy="640080"/>
-          </a:xfrm>
-          <a:prstGeom prst="rect">
-            <a:avLst/>
-          </a:prstGeom>
-          <a:solidFill>
-            <a:srgbClr val="00C2A8"/>
+            <a:off x="731520" y="3200400"/>
+            <a:ext cx="10698480" cy="73152"/>
+          </a:xfrm>
+          <a:prstGeom prst="rect">
+            <a:avLst/>
+          </a:prstGeom>
+          <a:solidFill>
+            <a:srgbClr val="0B1E3F"/>
           </a:solidFill>
           <a:ln>
             <a:noFill/>
@@ -9191,127 +9731,20 @@
       </p:sp>
       <p:sp>
         <p:nvSpPr>
-          <p:cNvPr id="23" name="TextBox 22"/>
-          <p:cNvSpPr txBox="1"/>
-          <p:nvPr/>
-        </p:nvSpPr>
-        <p:spPr>
-          <a:xfrm>
-            <a:off x="685800" y="3419856"/>
-            <a:ext cx="548640" cy="502920"/>
-          </a:xfrm>
-          <a:prstGeom prst="rect">
-            <a:avLst/>
-          </a:prstGeom>
-          <a:noFill/>
-        </p:spPr>
-        <p:txBody>
-          <a:bodyPr wrap="square" lIns="45720" rIns="45720" tIns="18288" bIns="18288" anchor="ctr">
-            <a:spAutoFit/>
-          </a:bodyPr>
-          <a:lstStyle/>
-          <a:p>
-            <a:pPr algn="l"/>
-            <a:r>
-              <a:rPr sz="1800" b="1">
-                <a:solidFill>
-                  <a:srgbClr val="00C2A8"/>
-                </a:solidFill>
-                <a:latin typeface="Calibri"/>
-              </a:rPr>
-              <a:t>4</a:t>
-            </a:r>
-          </a:p>
-        </p:txBody>
-      </p:sp>
-      <p:sp>
-        <p:nvSpPr>
-          <p:cNvPr id="24" name="TextBox 23"/>
-          <p:cNvSpPr txBox="1"/>
-          <p:nvPr/>
-        </p:nvSpPr>
-        <p:spPr>
-          <a:xfrm>
-            <a:off x="1234440" y="3392424"/>
-            <a:ext cx="7772400" cy="292608"/>
-          </a:xfrm>
-          <a:prstGeom prst="rect">
-            <a:avLst/>
-          </a:prstGeom>
-          <a:noFill/>
-        </p:spPr>
-        <p:txBody>
-          <a:bodyPr wrap="square" lIns="45720" rIns="45720" tIns="18288" bIns="18288" anchor="ctr">
-            <a:spAutoFit/>
-          </a:bodyPr>
-          <a:lstStyle/>
-          <a:p>
-            <a:pPr algn="l"/>
-            <a:r>
-              <a:rPr sz="1200" b="1">
-                <a:solidFill>
-                  <a:srgbClr val="0B1E3F"/>
-                </a:solidFill>
-                <a:latin typeface="Calibri"/>
-              </a:rPr>
-              <a:t>TaDeA – Universität Oldenburg</a:t>
-            </a:r>
-          </a:p>
-        </p:txBody>
-      </p:sp>
-      <p:sp>
-        <p:nvSpPr>
-          <p:cNvPr id="25" name="TextBox 24"/>
-          <p:cNvSpPr txBox="1"/>
-          <p:nvPr/>
-        </p:nvSpPr>
-        <p:spPr>
-          <a:xfrm>
-            <a:off x="1234440" y="3694176"/>
-            <a:ext cx="10058400" cy="274320"/>
-          </a:xfrm>
-          <a:prstGeom prst="rect">
-            <a:avLst/>
-          </a:prstGeom>
-          <a:noFill/>
-        </p:spPr>
-        <p:txBody>
-          <a:bodyPr wrap="square" lIns="45720" rIns="45720" tIns="18288" bIns="18288" anchor="ctr">
-            <a:spAutoFit/>
-          </a:bodyPr>
-          <a:lstStyle/>
-          <a:p>
-            <a:pPr algn="l"/>
-            <a:r>
-              <a:rPr sz="1000" b="0">
-                <a:solidFill>
-                  <a:srgbClr val="6E7A8C"/>
-                </a:solidFill>
-                <a:latin typeface="Calibri"/>
-              </a:rPr>
-              <a:t>tadea-ol.de – abgerufen am 26.05.2026</a:t>
-            </a:r>
-          </a:p>
-        </p:txBody>
-      </p:sp>
-      <p:sp>
-        <p:nvSpPr>
-          <p:cNvPr id="26" name="Rounded Rectangle 25"/>
+          <p:cNvPr id="7" name="Oval 6"/>
           <p:cNvSpPr/>
           <p:nvPr/>
         </p:nvSpPr>
         <p:spPr>
           <a:xfrm>
-            <a:off x="457200" y="4096512"/>
-            <a:ext cx="11247120" cy="640080"/>
-          </a:xfrm>
-          <a:prstGeom prst="roundRect">
-            <a:avLst>
-              <a:gd name="adj" fmla="val 15000"/>
-            </a:avLst>
-          </a:prstGeom>
-          <a:solidFill>
-            <a:srgbClr val="FFFFFF"/>
+            <a:off x="1869948" y="3072384"/>
+            <a:ext cx="329184" cy="329184"/>
+          </a:xfrm>
+          <a:prstGeom prst="ellipse">
+            <a:avLst/>
+          </a:prstGeom>
+          <a:solidFill>
+            <a:srgbClr val="00C2A8"/>
           </a:solidFill>
           <a:ln>
             <a:noFill/>
@@ -9342,16 +9775,133 @@
       </p:sp>
       <p:sp>
         <p:nvSpPr>
-          <p:cNvPr id="27" name="Rectangle 26"/>
+          <p:cNvPr id="8" name="TextBox 7"/>
+          <p:cNvSpPr txBox="1"/>
+          <p:nvPr/>
+        </p:nvSpPr>
+        <p:spPr>
+          <a:xfrm>
+            <a:off x="731520" y="2286000"/>
+            <a:ext cx="2606040" cy="548640"/>
+          </a:xfrm>
+          <a:prstGeom prst="rect">
+            <a:avLst/>
+          </a:prstGeom>
+          <a:noFill/>
+        </p:spPr>
+        <p:txBody>
+          <a:bodyPr wrap="square" lIns="45720" rIns="45720" tIns="18288" bIns="18288" anchor="ctr">
+            <a:spAutoFit/>
+          </a:bodyPr>
+          <a:lstStyle/>
+          <a:p>
+            <a:pPr algn="ctr"/>
+            <a:r>
+              <a:rPr sz="2800" b="1" i="0">
+                <a:solidFill>
+                  <a:srgbClr val="0B1E3F"/>
+                </a:solidFill>
+                <a:latin typeface="Calibri"/>
+              </a:rPr>
+              <a:t>2025</a:t>
+            </a:r>
+          </a:p>
+        </p:txBody>
+      </p:sp>
+      <p:sp>
+        <p:nvSpPr>
+          <p:cNvPr id="9" name="TextBox 8"/>
+          <p:cNvSpPr txBox="1"/>
+          <p:nvPr/>
+        </p:nvSpPr>
+        <p:spPr>
+          <a:xfrm>
+            <a:off x="731520" y="3566160"/>
+            <a:ext cx="2606040" cy="457200"/>
+          </a:xfrm>
+          <a:prstGeom prst="rect">
+            <a:avLst/>
+          </a:prstGeom>
+          <a:noFill/>
+        </p:spPr>
+        <p:txBody>
+          <a:bodyPr wrap="square" lIns="45720" rIns="45720" tIns="18288" bIns="18288" anchor="t">
+            <a:spAutoFit/>
+          </a:bodyPr>
+          <a:lstStyle/>
+          <a:p>
+            <a:pPr algn="ctr"/>
+            <a:r>
+              <a:rPr sz="1300" b="1" i="0">
+                <a:solidFill>
+                  <a:srgbClr val="0B1E3F"/>
+                </a:solidFill>
+                <a:latin typeface="Calibri"/>
+              </a:rPr>
+              <a:t>Pilot NRW / Fraunhofer IAIS startet</a:t>
+            </a:r>
+          </a:p>
+        </p:txBody>
+      </p:sp>
+      <p:sp>
+        <p:nvSpPr>
+          <p:cNvPr id="10" name="TextBox 9"/>
+          <p:cNvSpPr txBox="1"/>
+          <p:nvPr/>
+        </p:nvSpPr>
+        <p:spPr>
+          <a:xfrm>
+            <a:off x="731520" y="4114800"/>
+            <a:ext cx="2606040" cy="1463040"/>
+          </a:xfrm>
+          <a:prstGeom prst="rect">
+            <a:avLst/>
+          </a:prstGeom>
+          <a:noFill/>
+        </p:spPr>
+        <p:txBody>
+          <a:bodyPr wrap="square" lIns="45720" rIns="45720" tIns="18288" bIns="18288" anchor="t">
+            <a:spAutoFit/>
+          </a:bodyPr>
+          <a:lstStyle/>
+          <a:p>
+            <a:pPr algn="ctr"/>
+            <a:r>
+              <a:rPr sz="1100" b="0" i="0">
+                <a:solidFill>
+                  <a:srgbClr val="1B263A"/>
+                </a:solidFill>
+                <a:latin typeface="Calibri"/>
+              </a:rPr>
+              <a:t>RAG-System gegen</a:t>
+            </a:r>
+          </a:p>
+          <a:p>
+            <a:pPr algn="ctr"/>
+            <a:r>
+              <a:rPr sz="1100" b="0" i="0">
+                <a:solidFill>
+                  <a:srgbClr val="1B263A"/>
+                </a:solidFill>
+                <a:latin typeface="Calibri"/>
+              </a:rPr>
+              <a:t>Terrorfinanzierung</a:t>
+            </a:r>
+          </a:p>
+        </p:txBody>
+      </p:sp>
+      <p:sp>
+        <p:nvSpPr>
+          <p:cNvPr id="11" name="Oval 10"/>
           <p:cNvSpPr/>
           <p:nvPr/>
         </p:nvSpPr>
         <p:spPr>
           <a:xfrm>
-            <a:off x="457200" y="4096512"/>
-            <a:ext cx="109728" cy="640080"/>
-          </a:xfrm>
-          <a:prstGeom prst="rect">
+            <a:off x="4567428" y="3072384"/>
+            <a:ext cx="329184" cy="329184"/>
+          </a:xfrm>
+          <a:prstGeom prst="ellipse">
             <a:avLst/>
           </a:prstGeom>
           <a:solidFill>
@@ -9386,14 +9936,14 @@
       </p:sp>
       <p:sp>
         <p:nvSpPr>
-          <p:cNvPr id="28" name="TextBox 27"/>
+          <p:cNvPr id="12" name="TextBox 11"/>
           <p:cNvSpPr txBox="1"/>
           <p:nvPr/>
         </p:nvSpPr>
         <p:spPr>
           <a:xfrm>
-            <a:off x="685800" y="4169664"/>
-            <a:ext cx="548640" cy="502920"/>
+            <a:off x="3429000" y="2286000"/>
+            <a:ext cx="2606040" cy="548640"/>
           </a:xfrm>
           <a:prstGeom prst="rect">
             <a:avLst/>
@@ -9406,29 +9956,29 @@
           </a:bodyPr>
           <a:lstStyle/>
           <a:p>
-            <a:pPr algn="l"/>
-            <a:r>
-              <a:rPr sz="1800" b="1">
-                <a:solidFill>
-                  <a:srgbClr val="00C2A8"/>
-                </a:solidFill>
-                <a:latin typeface="Calibri"/>
-              </a:rPr>
-              <a:t>5</a:t>
-            </a:r>
-          </a:p>
-        </p:txBody>
-      </p:sp>
-      <p:sp>
-        <p:nvSpPr>
-          <p:cNvPr id="29" name="TextBox 28"/>
+            <a:pPr algn="ctr"/>
+            <a:r>
+              <a:rPr sz="2800" b="1" i="0">
+                <a:solidFill>
+                  <a:srgbClr val="0B1E3F"/>
+                </a:solidFill>
+                <a:latin typeface="Calibri"/>
+              </a:rPr>
+              <a:t>2026</a:t>
+            </a:r>
+          </a:p>
+        </p:txBody>
+      </p:sp>
+      <p:sp>
+        <p:nvSpPr>
+          <p:cNvPr id="13" name="TextBox 12"/>
           <p:cNvSpPr txBox="1"/>
           <p:nvPr/>
         </p:nvSpPr>
         <p:spPr>
           <a:xfrm>
-            <a:off x="1234440" y="4142232"/>
-            <a:ext cx="7772400" cy="292608"/>
+            <a:off x="3429000" y="3566160"/>
+            <a:ext cx="2606040" cy="457200"/>
           </a:xfrm>
           <a:prstGeom prst="rect">
             <a:avLst/>
@@ -9436,34 +9986,34 @@
           <a:noFill/>
         </p:spPr>
         <p:txBody>
-          <a:bodyPr wrap="square" lIns="45720" rIns="45720" tIns="18288" bIns="18288" anchor="ctr">
+          <a:bodyPr wrap="square" lIns="45720" rIns="45720" tIns="18288" bIns="18288" anchor="t">
             <a:spAutoFit/>
           </a:bodyPr>
           <a:lstStyle/>
           <a:p>
-            <a:pPr algn="l"/>
-            <a:r>
-              <a:rPr sz="1200" b="1">
+            <a:pPr algn="ctr"/>
+            <a:r>
+              <a:rPr sz="1300" b="1" i="0">
                 <a:solidFill>
                   <a:srgbClr val="0B1E3F"/>
                 </a:solidFill>
                 <a:latin typeface="Calibri"/>
               </a:rPr>
-              <a:t>Statista: Steuerhinterziehung in EU-Staaten / Steuerfahndung-Mehrsteuern</a:t>
-            </a:r>
-          </a:p>
-        </p:txBody>
-      </p:sp>
-      <p:sp>
-        <p:nvSpPr>
-          <p:cNvPr id="30" name="TextBox 29"/>
+              <a:t>Flächendeckender Roll-out</a:t>
+            </a:r>
+          </a:p>
+        </p:txBody>
+      </p:sp>
+      <p:sp>
+        <p:nvSpPr>
+          <p:cNvPr id="14" name="TextBox 13"/>
           <p:cNvSpPr txBox="1"/>
           <p:nvPr/>
         </p:nvSpPr>
         <p:spPr>
           <a:xfrm>
-            <a:off x="1234440" y="4443984"/>
-            <a:ext cx="10058400" cy="274320"/>
+            <a:off x="3429000" y="4114800"/>
+            <a:ext cx="2606040" cy="1463040"/>
           </a:xfrm>
           <a:prstGeom prst="rect">
             <a:avLst/>
@@ -9471,42 +10021,64 @@
           <a:noFill/>
         </p:spPr>
         <p:txBody>
-          <a:bodyPr wrap="square" lIns="45720" rIns="45720" tIns="18288" bIns="18288" anchor="ctr">
+          <a:bodyPr wrap="square" lIns="45720" rIns="45720" tIns="18288" bIns="18288" anchor="t">
             <a:spAutoFit/>
           </a:bodyPr>
           <a:lstStyle/>
           <a:p>
-            <a:pPr algn="l"/>
-            <a:r>
-              <a:rPr sz="1000" b="0">
-                <a:solidFill>
-                  <a:srgbClr val="6E7A8C"/>
-                </a:solidFill>
-                <a:latin typeface="Calibri"/>
-              </a:rPr>
-              <a:t>statista.com</a:t>
-            </a:r>
-          </a:p>
-        </p:txBody>
-      </p:sp>
-      <p:sp>
-        <p:nvSpPr>
-          <p:cNvPr id="31" name="Rounded Rectangle 30"/>
+            <a:pPr algn="ctr"/>
+            <a:r>
+              <a:rPr sz="1100" b="0" i="0">
+                <a:solidFill>
+                  <a:srgbClr val="1B263A"/>
+                </a:solidFill>
+                <a:latin typeface="Calibri"/>
+              </a:rPr>
+              <a:t>KI-Modul in der</a:t>
+            </a:r>
+          </a:p>
+          <a:p>
+            <a:pPr algn="ctr"/>
+            <a:r>
+              <a:rPr sz="1100" b="0" i="0">
+                <a:solidFill>
+                  <a:srgbClr val="1B263A"/>
+                </a:solidFill>
+                <a:latin typeface="Calibri"/>
+              </a:rPr>
+              <a:t>Steuerveranlagung</a:t>
+            </a:r>
+          </a:p>
+          <a:p>
+            <a:pPr algn="ctr"/>
+            <a:r>
+              <a:rPr sz="1100" b="0" i="0">
+                <a:solidFill>
+                  <a:srgbClr val="1B263A"/>
+                </a:solidFill>
+                <a:latin typeface="Calibri"/>
+              </a:rPr>
+              <a:t>(risikoarme Fälle)</a:t>
+            </a:r>
+          </a:p>
+        </p:txBody>
+      </p:sp>
+      <p:sp>
+        <p:nvSpPr>
+          <p:cNvPr id="15" name="Oval 14"/>
           <p:cNvSpPr/>
           <p:nvPr/>
         </p:nvSpPr>
         <p:spPr>
           <a:xfrm>
-            <a:off x="457200" y="4846320"/>
-            <a:ext cx="11247120" cy="640080"/>
-          </a:xfrm>
-          <a:prstGeom prst="roundRect">
-            <a:avLst>
-              <a:gd name="adj" fmla="val 15000"/>
-            </a:avLst>
-          </a:prstGeom>
-          <a:solidFill>
-            <a:srgbClr val="FFFFFF"/>
+            <a:off x="7264908" y="3072384"/>
+            <a:ext cx="329184" cy="329184"/>
+          </a:xfrm>
+          <a:prstGeom prst="ellipse">
+            <a:avLst/>
+          </a:prstGeom>
+          <a:solidFill>
+            <a:srgbClr val="00C2A8"/>
           </a:solidFill>
           <a:ln>
             <a:noFill/>
@@ -9537,16 +10109,133 @@
       </p:sp>
       <p:sp>
         <p:nvSpPr>
-          <p:cNvPr id="32" name="Rectangle 31"/>
+          <p:cNvPr id="16" name="TextBox 15"/>
+          <p:cNvSpPr txBox="1"/>
+          <p:nvPr/>
+        </p:nvSpPr>
+        <p:spPr>
+          <a:xfrm>
+            <a:off x="6126480" y="2286000"/>
+            <a:ext cx="2606040" cy="548640"/>
+          </a:xfrm>
+          <a:prstGeom prst="rect">
+            <a:avLst/>
+          </a:prstGeom>
+          <a:noFill/>
+        </p:spPr>
+        <p:txBody>
+          <a:bodyPr wrap="square" lIns="45720" rIns="45720" tIns="18288" bIns="18288" anchor="ctr">
+            <a:spAutoFit/>
+          </a:bodyPr>
+          <a:lstStyle/>
+          <a:p>
+            <a:pPr algn="ctr"/>
+            <a:r>
+              <a:rPr sz="2800" b="1" i="0">
+                <a:solidFill>
+                  <a:srgbClr val="0B1E3F"/>
+                </a:solidFill>
+                <a:latin typeface="Calibri"/>
+              </a:rPr>
+              <a:t>2027</a:t>
+            </a:r>
+          </a:p>
+        </p:txBody>
+      </p:sp>
+      <p:sp>
+        <p:nvSpPr>
+          <p:cNvPr id="17" name="TextBox 16"/>
+          <p:cNvSpPr txBox="1"/>
+          <p:nvPr/>
+        </p:nvSpPr>
+        <p:spPr>
+          <a:xfrm>
+            <a:off x="6126480" y="3566160"/>
+            <a:ext cx="2606040" cy="457200"/>
+          </a:xfrm>
+          <a:prstGeom prst="rect">
+            <a:avLst/>
+          </a:prstGeom>
+          <a:noFill/>
+        </p:spPr>
+        <p:txBody>
+          <a:bodyPr wrap="square" lIns="45720" rIns="45720" tIns="18288" bIns="18288" anchor="t">
+            <a:spAutoFit/>
+          </a:bodyPr>
+          <a:lstStyle/>
+          <a:p>
+            <a:pPr algn="ctr"/>
+            <a:r>
+              <a:rPr sz="1300" b="1" i="0">
+                <a:solidFill>
+                  <a:srgbClr val="0B1E3F"/>
+                </a:solidFill>
+                <a:latin typeface="Calibri"/>
+              </a:rPr>
+              <a:t>DAC 8 wird verbindlich</a:t>
+            </a:r>
+          </a:p>
+        </p:txBody>
+      </p:sp>
+      <p:sp>
+        <p:nvSpPr>
+          <p:cNvPr id="18" name="TextBox 17"/>
+          <p:cNvSpPr txBox="1"/>
+          <p:nvPr/>
+        </p:nvSpPr>
+        <p:spPr>
+          <a:xfrm>
+            <a:off x="6126480" y="4114800"/>
+            <a:ext cx="2606040" cy="1463040"/>
+          </a:xfrm>
+          <a:prstGeom prst="rect">
+            <a:avLst/>
+          </a:prstGeom>
+          <a:noFill/>
+        </p:spPr>
+        <p:txBody>
+          <a:bodyPr wrap="square" lIns="45720" rIns="45720" tIns="18288" bIns="18288" anchor="t">
+            <a:spAutoFit/>
+          </a:bodyPr>
+          <a:lstStyle/>
+          <a:p>
+            <a:pPr algn="ctr"/>
+            <a:r>
+              <a:rPr sz="1100" b="0" i="0">
+                <a:solidFill>
+                  <a:srgbClr val="1B263A"/>
+                </a:solidFill>
+                <a:latin typeface="Calibri"/>
+              </a:rPr>
+              <a:t>Krypto-Daten</a:t>
+            </a:r>
+          </a:p>
+          <a:p>
+            <a:pPr algn="ctr"/>
+            <a:r>
+              <a:rPr sz="1100" b="0" i="0">
+                <a:solidFill>
+                  <a:srgbClr val="1B263A"/>
+                </a:solidFill>
+                <a:latin typeface="Calibri"/>
+              </a:rPr>
+              <a:t>fließen EU-weit</a:t>
+            </a:r>
+          </a:p>
+        </p:txBody>
+      </p:sp>
+      <p:sp>
+        <p:nvSpPr>
+          <p:cNvPr id="19" name="Oval 18"/>
           <p:cNvSpPr/>
           <p:nvPr/>
         </p:nvSpPr>
         <p:spPr>
           <a:xfrm>
-            <a:off x="457200" y="4846320"/>
-            <a:ext cx="109728" cy="640080"/>
-          </a:xfrm>
-          <a:prstGeom prst="rect">
+            <a:off x="9962388" y="3072384"/>
+            <a:ext cx="329184" cy="329184"/>
+          </a:xfrm>
+          <a:prstGeom prst="ellipse">
             <a:avLst/>
           </a:prstGeom>
           <a:solidFill>
@@ -9581,14 +10270,14 @@
       </p:sp>
       <p:sp>
         <p:nvSpPr>
-          <p:cNvPr id="33" name="TextBox 32"/>
+          <p:cNvPr id="20" name="TextBox 19"/>
           <p:cNvSpPr txBox="1"/>
           <p:nvPr/>
         </p:nvSpPr>
         <p:spPr>
           <a:xfrm>
-            <a:off x="685800" y="4919472"/>
-            <a:ext cx="548640" cy="502920"/>
+            <a:off x="8823960" y="2286000"/>
+            <a:ext cx="2606040" cy="548640"/>
           </a:xfrm>
           <a:prstGeom prst="rect">
             <a:avLst/>
@@ -9601,29 +10290,29 @@
           </a:bodyPr>
           <a:lstStyle/>
           <a:p>
-            <a:pPr algn="l"/>
-            <a:r>
-              <a:rPr sz="1800" b="1">
-                <a:solidFill>
-                  <a:srgbClr val="00C2A8"/>
-                </a:solidFill>
-                <a:latin typeface="Calibri"/>
-              </a:rPr>
-              <a:t>6</a:t>
-            </a:r>
-          </a:p>
-        </p:txBody>
-      </p:sp>
-      <p:sp>
-        <p:nvSpPr>
-          <p:cNvPr id="34" name="TextBox 33"/>
+            <a:pPr algn="ctr"/>
+            <a:r>
+              <a:rPr sz="2800" b="1" i="0">
+                <a:solidFill>
+                  <a:srgbClr val="0B1E3F"/>
+                </a:solidFill>
+                <a:latin typeface="Calibri"/>
+              </a:rPr>
+              <a:t>2028+</a:t>
+            </a:r>
+          </a:p>
+        </p:txBody>
+      </p:sp>
+      <p:sp>
+        <p:nvSpPr>
+          <p:cNvPr id="21" name="TextBox 20"/>
           <p:cNvSpPr txBox="1"/>
           <p:nvPr/>
         </p:nvSpPr>
         <p:spPr>
           <a:xfrm>
-            <a:off x="1234440" y="4892040"/>
-            <a:ext cx="7772400" cy="292608"/>
+            <a:off x="8823960" y="3566160"/>
+            <a:ext cx="2606040" cy="457200"/>
           </a:xfrm>
           <a:prstGeom prst="rect">
             <a:avLst/>
@@ -9631,34 +10320,34 @@
           <a:noFill/>
         </p:spPr>
         <p:txBody>
-          <a:bodyPr wrap="square" lIns="45720" rIns="45720" tIns="18288" bIns="18288" anchor="ctr">
+          <a:bodyPr wrap="square" lIns="45720" rIns="45720" tIns="18288" bIns="18288" anchor="t">
             <a:spAutoFit/>
           </a:bodyPr>
           <a:lstStyle/>
           <a:p>
-            <a:pPr algn="l"/>
-            <a:r>
-              <a:rPr sz="1200" b="1">
+            <a:pPr algn="ctr"/>
+            <a:r>
+              <a:rPr sz="1300" b="1" i="0">
                 <a:solidFill>
                   <a:srgbClr val="0B1E3F"/>
                 </a:solidFill>
                 <a:latin typeface="Calibri"/>
               </a:rPr>
-              <a:t>Prof. Dr. F. Schneider, JKU Linz – Schaden durch Sozial- und Abgabenbetrug</a:t>
-            </a:r>
-          </a:p>
-        </p:txBody>
-      </p:sp>
-      <p:sp>
-        <p:nvSpPr>
-          <p:cNvPr id="35" name="TextBox 34"/>
+              <a:t>KI als Standard-Werkzeug</a:t>
+            </a:r>
+          </a:p>
+        </p:txBody>
+      </p:sp>
+      <p:sp>
+        <p:nvSpPr>
+          <p:cNvPr id="22" name="TextBox 21"/>
           <p:cNvSpPr txBox="1"/>
           <p:nvPr/>
         </p:nvSpPr>
         <p:spPr>
           <a:xfrm>
-            <a:off x="1234440" y="5193792"/>
-            <a:ext cx="10058400" cy="274320"/>
+            <a:off x="8823960" y="4114800"/>
+            <a:ext cx="2606040" cy="1463040"/>
           </a:xfrm>
           <a:prstGeom prst="rect">
             <a:avLst/>
@@ -9666,42 +10355,136 @@
           <a:noFill/>
         </p:spPr>
         <p:txBody>
-          <a:bodyPr wrap="square" lIns="45720" rIns="45720" tIns="18288" bIns="18288" anchor="ctr">
+          <a:bodyPr wrap="square" lIns="45720" rIns="45720" tIns="18288" bIns="18288" anchor="t">
             <a:spAutoFit/>
           </a:bodyPr>
           <a:lstStyle/>
           <a:p>
+            <a:pPr algn="ctr"/>
+            <a:r>
+              <a:rPr sz="1100" b="0" i="0">
+                <a:solidFill>
+                  <a:srgbClr val="1B263A"/>
+                </a:solidFill>
+                <a:latin typeface="Calibri"/>
+              </a:rPr>
+              <a:t>Echtzeit-Prüfung &amp;</a:t>
+            </a:r>
+          </a:p>
+          <a:p>
+            <a:pPr algn="ctr"/>
+            <a:r>
+              <a:rPr sz="1100" b="0" i="0">
+                <a:solidFill>
+                  <a:srgbClr val="1B263A"/>
+                </a:solidFill>
+                <a:latin typeface="Calibri"/>
+              </a:rPr>
+              <a:t>automatische</a:t>
+            </a:r>
+          </a:p>
+          <a:p>
+            <a:pPr algn="ctr"/>
+            <a:r>
+              <a:rPr sz="1100" b="0" i="0">
+                <a:solidFill>
+                  <a:srgbClr val="1B263A"/>
+                </a:solidFill>
+                <a:latin typeface="Calibri"/>
+              </a:rPr>
+              <a:t>Vorabentscheidungen</a:t>
+            </a:r>
+          </a:p>
+        </p:txBody>
+      </p:sp>
+      <p:sp>
+        <p:nvSpPr>
+          <p:cNvPr id="23" name="TextBox 22"/>
+          <p:cNvSpPr txBox="1"/>
+          <p:nvPr/>
+        </p:nvSpPr>
+        <p:spPr>
+          <a:xfrm>
+            <a:off x="548640" y="1097280"/>
+            <a:ext cx="11155680" cy="457200"/>
+          </a:xfrm>
+          <a:prstGeom prst="rect">
+            <a:avLst/>
+          </a:prstGeom>
+          <a:noFill/>
+        </p:spPr>
+        <p:txBody>
+          <a:bodyPr wrap="square" lIns="45720" rIns="45720" tIns="18288" bIns="18288" anchor="t">
+            <a:spAutoFit/>
+          </a:bodyPr>
+          <a:lstStyle/>
+          <a:p>
             <a:pPr algn="l"/>
             <a:r>
-              <a:rPr sz="1000" b="0">
+              <a:rPr sz="1800" b="1" i="0">
+                <a:solidFill>
+                  <a:srgbClr val="0B1E3F"/>
+                </a:solidFill>
+                <a:latin typeface="Calibri"/>
+              </a:rPr>
+              <a:t>Die KI-Steuerverwaltung steht erst am Anfang.</a:t>
+            </a:r>
+          </a:p>
+        </p:txBody>
+      </p:sp>
+      <p:sp>
+        <p:nvSpPr>
+          <p:cNvPr id="24" name="TextBox 23"/>
+          <p:cNvSpPr txBox="1"/>
+          <p:nvPr/>
+        </p:nvSpPr>
+        <p:spPr>
+          <a:xfrm>
+            <a:off x="548640" y="1554480"/>
+            <a:ext cx="11155680" cy="457200"/>
+          </a:xfrm>
+          <a:prstGeom prst="rect">
+            <a:avLst/>
+          </a:prstGeom>
+          <a:noFill/>
+        </p:spPr>
+        <p:txBody>
+          <a:bodyPr wrap="square" lIns="45720" rIns="45720" tIns="18288" bIns="18288" anchor="t">
+            <a:spAutoFit/>
+          </a:bodyPr>
+          <a:lstStyle/>
+          <a:p>
+            <a:pPr algn="l"/>
+            <a:r>
+              <a:rPr sz="1300" b="0" i="0">
                 <a:solidFill>
                   <a:srgbClr val="6E7A8C"/>
                 </a:solidFill>
                 <a:latin typeface="Calibri"/>
               </a:rPr>
-              <a:t>ZDF heute, 2023</a:t>
-            </a:r>
-          </a:p>
-        </p:txBody>
-      </p:sp>
-      <p:sp>
-        <p:nvSpPr>
-          <p:cNvPr id="36" name="Rounded Rectangle 35"/>
+              <a:t>Vier Meilensteine auf dem Weg zur datengetriebenen Finanzverwaltung:</a:t>
+            </a:r>
+          </a:p>
+        </p:txBody>
+      </p:sp>
+      <p:sp>
+        <p:nvSpPr>
+          <p:cNvPr id="25" name="Rounded Rectangle 24"/>
           <p:cNvSpPr/>
           <p:nvPr/>
         </p:nvSpPr>
         <p:spPr>
           <a:xfrm>
-            <a:off x="457200" y="5596128"/>
-            <a:ext cx="11247120" cy="640080"/>
+            <a:off x="548640" y="5852160"/>
+            <a:ext cx="11155680" cy="640080"/>
           </a:xfrm>
           <a:prstGeom prst="roundRect">
             <a:avLst>
-              <a:gd name="adj" fmla="val 15000"/>
+              <a:gd name="adj" fmla="val 20000"/>
             </a:avLst>
           </a:prstGeom>
           <a:solidFill>
-            <a:srgbClr val="FFFFFF"/>
+            <a:srgbClr val="0B1E3F"/>
           </a:solidFill>
           <a:ln>
             <a:noFill/>
@@ -9732,20 +10515,55 @@
       </p:sp>
       <p:sp>
         <p:nvSpPr>
-          <p:cNvPr id="37" name="Rectangle 36"/>
+          <p:cNvPr id="26" name="TextBox 25"/>
+          <p:cNvSpPr txBox="1"/>
+          <p:nvPr/>
+        </p:nvSpPr>
+        <p:spPr>
+          <a:xfrm>
+            <a:off x="548640" y="5852160"/>
+            <a:ext cx="11155680" cy="640080"/>
+          </a:xfrm>
+          <a:prstGeom prst="rect">
+            <a:avLst/>
+          </a:prstGeom>
+          <a:noFill/>
+        </p:spPr>
+        <p:txBody>
+          <a:bodyPr wrap="square" lIns="45720" rIns="45720" tIns="18288" bIns="18288" anchor="ctr">
+            <a:spAutoFit/>
+          </a:bodyPr>
+          <a:lstStyle/>
+          <a:p>
+            <a:pPr algn="ctr"/>
+            <a:r>
+              <a:rPr sz="1400" b="1" i="0">
+                <a:solidFill>
+                  <a:srgbClr val="FFFFFF"/>
+                </a:solidFill>
+                <a:latin typeface="Calibri"/>
+              </a:rPr>
+              <a:t>Vision 2030:  KI als selbstverständlicher Partner in jeder Finanzbehörde.</a:t>
+            </a:r>
+          </a:p>
+        </p:txBody>
+      </p:sp>
+      <p:sp>
+        <p:nvSpPr>
+          <p:cNvPr id="27" name="Rectangle 26"/>
           <p:cNvSpPr/>
           <p:nvPr/>
         </p:nvSpPr>
         <p:spPr>
           <a:xfrm>
-            <a:off x="457200" y="5596128"/>
-            <a:ext cx="109728" cy="640080"/>
-          </a:xfrm>
-          <a:prstGeom prst="rect">
-            <a:avLst/>
-          </a:prstGeom>
-          <a:solidFill>
-            <a:srgbClr val="00C2A8"/>
+            <a:off x="0" y="6537960"/>
+            <a:ext cx="12191695" cy="320040"/>
+          </a:xfrm>
+          <a:prstGeom prst="rect">
+            <a:avLst/>
+          </a:prstGeom>
+          <a:solidFill>
+            <a:srgbClr val="07142E"/>
           </a:solidFill>
           <a:ln>
             <a:noFill/>
@@ -9776,14 +10594,14 @@
       </p:sp>
       <p:sp>
         <p:nvSpPr>
-          <p:cNvPr id="38" name="TextBox 37"/>
+          <p:cNvPr id="28" name="TextBox 27"/>
           <p:cNvSpPr txBox="1"/>
           <p:nvPr/>
         </p:nvSpPr>
         <p:spPr>
           <a:xfrm>
-            <a:off x="685800" y="5669280"/>
-            <a:ext cx="548640" cy="502920"/>
+            <a:off x="365760" y="6556248"/>
+            <a:ext cx="7315200" cy="274320"/>
           </a:xfrm>
           <a:prstGeom prst="rect">
             <a:avLst/>
@@ -9798,27 +10616,27 @@
           <a:p>
             <a:pPr algn="l"/>
             <a:r>
-              <a:rPr sz="1800" b="1">
-                <a:solidFill>
-                  <a:srgbClr val="00C2A8"/>
-                </a:solidFill>
-                <a:latin typeface="Calibri"/>
-              </a:rPr>
-              <a:t>7</a:t>
-            </a:r>
-          </a:p>
-        </p:txBody>
-      </p:sp>
-      <p:sp>
-        <p:nvSpPr>
-          <p:cNvPr id="39" name="TextBox 38"/>
+              <a:rPr sz="1000" b="0" i="0">
+                <a:solidFill>
+                  <a:srgbClr val="B8C2D6"/>
+                </a:solidFill>
+                <a:latin typeface="Calibri"/>
+              </a:rPr>
+              <a:t>KI-Technik &amp; Steuerhinterziehung  •  Bastian &amp; Ibrahim</a:t>
+            </a:r>
+          </a:p>
+        </p:txBody>
+      </p:sp>
+      <p:sp>
+        <p:nvSpPr>
+          <p:cNvPr id="29" name="TextBox 28"/>
           <p:cNvSpPr txBox="1"/>
           <p:nvPr/>
         </p:nvSpPr>
         <p:spPr>
           <a:xfrm>
-            <a:off x="1234440" y="5641848"/>
-            <a:ext cx="7772400" cy="292608"/>
+            <a:off x="11094415" y="6556248"/>
+            <a:ext cx="731520" cy="274320"/>
           </a:xfrm>
           <a:prstGeom prst="rect">
             <a:avLst/>
@@ -9831,70 +10649,61 @@
           </a:bodyPr>
           <a:lstStyle/>
           <a:p>
-            <a:pPr algn="l"/>
-            <a:r>
-              <a:rPr sz="1200" b="1">
-                <a:solidFill>
-                  <a:srgbClr val="0B1E3F"/>
-                </a:solidFill>
-                <a:latin typeface="Calibri"/>
-              </a:rPr>
-              <a:t>DIW Berlin Wochenbericht 22/2025 – Auslandsvermögen &amp; CRS</a:t>
-            </a:r>
-          </a:p>
-        </p:txBody>
-      </p:sp>
-      <p:sp>
-        <p:nvSpPr>
-          <p:cNvPr id="40" name="TextBox 39"/>
-          <p:cNvSpPr txBox="1"/>
-          <p:nvPr/>
-        </p:nvSpPr>
-        <p:spPr>
-          <a:xfrm>
-            <a:off x="1234440" y="5943600"/>
-            <a:ext cx="10058400" cy="274320"/>
-          </a:xfrm>
-          <a:prstGeom prst="rect">
-            <a:avLst/>
-          </a:prstGeom>
-          <a:noFill/>
-        </p:spPr>
-        <p:txBody>
-          <a:bodyPr wrap="square" lIns="45720" rIns="45720" tIns="18288" bIns="18288" anchor="ctr">
-            <a:spAutoFit/>
-          </a:bodyPr>
-          <a:lstStyle/>
-          <a:p>
-            <a:pPr algn="l"/>
-            <a:r>
-              <a:rPr sz="1000" b="0">
-                <a:solidFill>
-                  <a:srgbClr val="6E7A8C"/>
-                </a:solidFill>
-                <a:latin typeface="Calibri"/>
-              </a:rPr>
-              <a:t>diw.de</a:t>
-            </a:r>
-          </a:p>
-        </p:txBody>
-      </p:sp>
-      <p:sp>
-        <p:nvSpPr>
-          <p:cNvPr id="41" name="Rectangle 40"/>
+            <a:pPr algn="r"/>
+            <a:r>
+              <a:rPr sz="1000" b="0" i="0">
+                <a:solidFill>
+                  <a:srgbClr val="00C2A8"/>
+                </a:solidFill>
+                <a:latin typeface="Calibri"/>
+              </a:rPr>
+              <a:t>18</a:t>
+            </a:r>
+          </a:p>
+        </p:txBody>
+      </p:sp>
+    </p:spTree>
+  </p:cSld>
+  <p:clrMapOvr>
+    <a:masterClrMapping/>
+  </p:clrMapOvr>
+</p:sld>
+</file>
+
+<file path=ppt/slides/slide19.xml><?xml version="1.0" encoding="utf-8"?>
+<p:sld xmlns:a="http://schemas.openxmlformats.org/drawingml/2006/main" xmlns:p="http://schemas.openxmlformats.org/presentationml/2006/main" xmlns:r="http://schemas.openxmlformats.org/officeDocument/2006/relationships">
+  <p:cSld>
+    <p:bg>
+      <p:bgPr>
+        <a:solidFill>
+          <a:srgbClr val="0B1E3F"/>
+        </a:solidFill>
+        <a:effectLst/>
+      </p:bgPr>
+    </p:bg>
+    <p:spTree>
+      <p:nvGrpSpPr>
+        <p:cNvPr id="1" name=""/>
+        <p:cNvGrpSpPr/>
+        <p:nvPr/>
+      </p:nvGrpSpPr>
+      <p:grpSpPr/>
+      <p:sp>
+        <p:nvSpPr>
+          <p:cNvPr id="2" name="Rectangle 1"/>
           <p:cNvSpPr/>
           <p:nvPr/>
         </p:nvSpPr>
         <p:spPr>
           <a:xfrm>
-            <a:off x="0" y="6537960"/>
-            <a:ext cx="12191695" cy="320040"/>
-          </a:xfrm>
-          <a:prstGeom prst="rect">
-            <a:avLst/>
-          </a:prstGeom>
-          <a:solidFill>
-            <a:srgbClr val="07142E"/>
+            <a:off x="640080" y="640080"/>
+            <a:ext cx="137160" cy="822960"/>
+          </a:xfrm>
+          <a:prstGeom prst="rect">
+            <a:avLst/>
+          </a:prstGeom>
+          <a:solidFill>
+            <a:srgbClr val="00C2A8"/>
           </a:solidFill>
           <a:ln>
             <a:noFill/>
@@ -9925,14 +10734,139 @@
       </p:sp>
       <p:sp>
         <p:nvSpPr>
-          <p:cNvPr id="42" name="TextBox 41"/>
+          <p:cNvPr id="3" name="TextBox 2"/>
           <p:cNvSpPr txBox="1"/>
           <p:nvPr/>
         </p:nvSpPr>
         <p:spPr>
           <a:xfrm>
-            <a:off x="365760" y="6556248"/>
-            <a:ext cx="7315200" cy="274320"/>
+            <a:off x="914400" y="640080"/>
+            <a:ext cx="7315200" cy="822960"/>
+          </a:xfrm>
+          <a:prstGeom prst="rect">
+            <a:avLst/>
+          </a:prstGeom>
+          <a:noFill/>
+        </p:spPr>
+        <p:txBody>
+          <a:bodyPr wrap="square" lIns="45720" rIns="45720" tIns="18288" bIns="18288" anchor="t">
+            <a:spAutoFit/>
+          </a:bodyPr>
+          <a:lstStyle/>
+          <a:p>
+            <a:pPr algn="l"/>
+            <a:r>
+              <a:rPr sz="4800" b="1" i="0">
+                <a:solidFill>
+                  <a:srgbClr val="FFFFFF"/>
+                </a:solidFill>
+                <a:latin typeface="Calibri"/>
+              </a:rPr>
+              <a:t>FAZIT</a:t>
+            </a:r>
+          </a:p>
+        </p:txBody>
+      </p:sp>
+      <p:sp>
+        <p:nvSpPr>
+          <p:cNvPr id="4" name="Rounded Rectangle 3"/>
+          <p:cNvSpPr/>
+          <p:nvPr/>
+        </p:nvSpPr>
+        <p:spPr>
+          <a:xfrm>
+            <a:off x="640080" y="1920240"/>
+            <a:ext cx="10881360" cy="1280160"/>
+          </a:xfrm>
+          <a:prstGeom prst="roundRect">
+            <a:avLst>
+              <a:gd name="adj" fmla="val 8000"/>
+            </a:avLst>
+          </a:prstGeom>
+          <a:solidFill>
+            <a:srgbClr val="07142E"/>
+          </a:solidFill>
+          <a:ln>
+            <a:noFill/>
+          </a:ln>
+          <a:effectLst/>
+        </p:spPr>
+        <p:style>
+          <a:lnRef idx="1">
+            <a:schemeClr val="accent1"/>
+          </a:lnRef>
+          <a:fillRef idx="3">
+            <a:schemeClr val="accent1"/>
+          </a:fillRef>
+          <a:effectRef idx="2">
+            <a:schemeClr val="accent1"/>
+          </a:effectRef>
+          <a:fontRef idx="minor">
+            <a:schemeClr val="lt1"/>
+          </a:fontRef>
+        </p:style>
+        <p:txBody>
+          <a:bodyPr rtlCol="0" anchor="ctr"/>
+          <a:lstStyle/>
+          <a:p>
+            <a:pPr algn="ctr"/>
+          </a:p>
+        </p:txBody>
+      </p:sp>
+      <p:sp>
+        <p:nvSpPr>
+          <p:cNvPr id="5" name="Rectangle 4"/>
+          <p:cNvSpPr/>
+          <p:nvPr/>
+        </p:nvSpPr>
+        <p:spPr>
+          <a:xfrm>
+            <a:off x="640080" y="1920240"/>
+            <a:ext cx="137160" cy="1280160"/>
+          </a:xfrm>
+          <a:prstGeom prst="rect">
+            <a:avLst/>
+          </a:prstGeom>
+          <a:solidFill>
+            <a:srgbClr val="00C2A8"/>
+          </a:solidFill>
+          <a:ln>
+            <a:noFill/>
+          </a:ln>
+          <a:effectLst/>
+        </p:spPr>
+        <p:style>
+          <a:lnRef idx="1">
+            <a:schemeClr val="accent1"/>
+          </a:lnRef>
+          <a:fillRef idx="3">
+            <a:schemeClr val="accent1"/>
+          </a:fillRef>
+          <a:effectRef idx="2">
+            <a:schemeClr val="accent1"/>
+          </a:effectRef>
+          <a:fontRef idx="minor">
+            <a:schemeClr val="lt1"/>
+          </a:fontRef>
+        </p:style>
+        <p:txBody>
+          <a:bodyPr rtlCol="0" anchor="ctr"/>
+          <a:lstStyle/>
+          <a:p>
+            <a:pPr algn="ctr"/>
+          </a:p>
+        </p:txBody>
+      </p:sp>
+      <p:sp>
+        <p:nvSpPr>
+          <p:cNvPr id="6" name="TextBox 5"/>
+          <p:cNvSpPr txBox="1"/>
+          <p:nvPr/>
+        </p:nvSpPr>
+        <p:spPr>
+          <a:xfrm>
+            <a:off x="914400" y="2057400"/>
+            <a:ext cx="1097280" cy="1005840"/>
           </a:xfrm>
           <a:prstGeom prst="rect">
             <a:avLst/>
@@ -9947,27 +10881,27 @@
           <a:p>
             <a:pPr algn="l"/>
             <a:r>
-              <a:rPr sz="1000" b="0">
-                <a:solidFill>
-                  <a:srgbClr val="B8C2D6"/>
-                </a:solidFill>
-                <a:latin typeface="Calibri"/>
-              </a:rPr>
-              <a:t>KI-Technik &amp; Steuerhinterziehung  •  Bastian &amp; Ibrahim</a:t>
-            </a:r>
-          </a:p>
-        </p:txBody>
-      </p:sp>
-      <p:sp>
-        <p:nvSpPr>
-          <p:cNvPr id="43" name="TextBox 42"/>
+              <a:rPr sz="3600" b="1" i="0">
+                <a:solidFill>
+                  <a:srgbClr val="00C2A8"/>
+                </a:solidFill>
+                <a:latin typeface="Calibri"/>
+              </a:rPr>
+              <a:t>01</a:t>
+            </a:r>
+          </a:p>
+        </p:txBody>
+      </p:sp>
+      <p:sp>
+        <p:nvSpPr>
+          <p:cNvPr id="7" name="TextBox 6"/>
           <p:cNvSpPr txBox="1"/>
           <p:nvPr/>
         </p:nvSpPr>
         <p:spPr>
           <a:xfrm>
-            <a:off x="11094415" y="6556248"/>
-            <a:ext cx="731520" cy="274320"/>
+            <a:off x="2103120" y="2057400"/>
+            <a:ext cx="9144000" cy="457200"/>
           </a:xfrm>
           <a:prstGeom prst="rect">
             <a:avLst/>
@@ -9980,15 +10914,475 @@
           </a:bodyPr>
           <a:lstStyle/>
           <a:p>
-            <a:pPr algn="r"/>
-            <a:r>
-              <a:rPr sz="1000" b="0">
+            <a:pPr algn="l"/>
+            <a:r>
+              <a:rPr sz="1800" b="1" i="0">
+                <a:solidFill>
+                  <a:srgbClr val="FFFFFF"/>
+                </a:solidFill>
+                <a:latin typeface="Calibri"/>
+              </a:rPr>
+              <a:t>Riesige Steuerlücke</a:t>
+            </a:r>
+          </a:p>
+        </p:txBody>
+      </p:sp>
+      <p:sp>
+        <p:nvSpPr>
+          <p:cNvPr id="8" name="TextBox 7"/>
+          <p:cNvSpPr txBox="1"/>
+          <p:nvPr/>
+        </p:nvSpPr>
+        <p:spPr>
+          <a:xfrm>
+            <a:off x="2103120" y="2514600"/>
+            <a:ext cx="9144000" cy="640080"/>
+          </a:xfrm>
+          <a:prstGeom prst="rect">
+            <a:avLst/>
+          </a:prstGeom>
+          <a:noFill/>
+        </p:spPr>
+        <p:txBody>
+          <a:bodyPr wrap="square" lIns="45720" rIns="45720" tIns="18288" bIns="18288" anchor="t">
+            <a:spAutoFit/>
+          </a:bodyPr>
+          <a:lstStyle/>
+          <a:p>
+            <a:pPr algn="l"/>
+            <a:r>
+              <a:rPr sz="1300" b="0" i="0">
+                <a:solidFill>
+                  <a:srgbClr val="CFD8E6"/>
+                </a:solidFill>
+                <a:latin typeface="Calibri"/>
+              </a:rPr>
+              <a:t>Bis zu 100 Mrd. € entgehen dem deutschen Staat jährlich – die klassische Steuerfahndung deckt nur einen Bruchteil auf.</a:t>
+            </a:r>
+          </a:p>
+        </p:txBody>
+      </p:sp>
+      <p:sp>
+        <p:nvSpPr>
+          <p:cNvPr id="9" name="Rounded Rectangle 8"/>
+          <p:cNvSpPr/>
+          <p:nvPr/>
+        </p:nvSpPr>
+        <p:spPr>
+          <a:xfrm>
+            <a:off x="640080" y="3337560"/>
+            <a:ext cx="10881360" cy="1280160"/>
+          </a:xfrm>
+          <a:prstGeom prst="roundRect">
+            <a:avLst>
+              <a:gd name="adj" fmla="val 8000"/>
+            </a:avLst>
+          </a:prstGeom>
+          <a:solidFill>
+            <a:srgbClr val="07142E"/>
+          </a:solidFill>
+          <a:ln>
+            <a:noFill/>
+          </a:ln>
+          <a:effectLst/>
+        </p:spPr>
+        <p:style>
+          <a:lnRef idx="1">
+            <a:schemeClr val="accent1"/>
+          </a:lnRef>
+          <a:fillRef idx="3">
+            <a:schemeClr val="accent1"/>
+          </a:fillRef>
+          <a:effectRef idx="2">
+            <a:schemeClr val="accent1"/>
+          </a:effectRef>
+          <a:fontRef idx="minor">
+            <a:schemeClr val="lt1"/>
+          </a:fontRef>
+        </p:style>
+        <p:txBody>
+          <a:bodyPr rtlCol="0" anchor="ctr"/>
+          <a:lstStyle/>
+          <a:p>
+            <a:pPr algn="ctr"/>
+          </a:p>
+        </p:txBody>
+      </p:sp>
+      <p:sp>
+        <p:nvSpPr>
+          <p:cNvPr id="10" name="Rectangle 9"/>
+          <p:cNvSpPr/>
+          <p:nvPr/>
+        </p:nvSpPr>
+        <p:spPr>
+          <a:xfrm>
+            <a:off x="640080" y="3337560"/>
+            <a:ext cx="137160" cy="1280160"/>
+          </a:xfrm>
+          <a:prstGeom prst="rect">
+            <a:avLst/>
+          </a:prstGeom>
+          <a:solidFill>
+            <a:srgbClr val="00C2A8"/>
+          </a:solidFill>
+          <a:ln>
+            <a:noFill/>
+          </a:ln>
+          <a:effectLst/>
+        </p:spPr>
+        <p:style>
+          <a:lnRef idx="1">
+            <a:schemeClr val="accent1"/>
+          </a:lnRef>
+          <a:fillRef idx="3">
+            <a:schemeClr val="accent1"/>
+          </a:fillRef>
+          <a:effectRef idx="2">
+            <a:schemeClr val="accent1"/>
+          </a:effectRef>
+          <a:fontRef idx="minor">
+            <a:schemeClr val="lt1"/>
+          </a:fontRef>
+        </p:style>
+        <p:txBody>
+          <a:bodyPr rtlCol="0" anchor="ctr"/>
+          <a:lstStyle/>
+          <a:p>
+            <a:pPr algn="ctr"/>
+          </a:p>
+        </p:txBody>
+      </p:sp>
+      <p:sp>
+        <p:nvSpPr>
+          <p:cNvPr id="11" name="TextBox 10"/>
+          <p:cNvSpPr txBox="1"/>
+          <p:nvPr/>
+        </p:nvSpPr>
+        <p:spPr>
+          <a:xfrm>
+            <a:off x="914400" y="3474720"/>
+            <a:ext cx="1097280" cy="1005840"/>
+          </a:xfrm>
+          <a:prstGeom prst="rect">
+            <a:avLst/>
+          </a:prstGeom>
+          <a:noFill/>
+        </p:spPr>
+        <p:txBody>
+          <a:bodyPr wrap="square" lIns="45720" rIns="45720" tIns="18288" bIns="18288" anchor="ctr">
+            <a:spAutoFit/>
+          </a:bodyPr>
+          <a:lstStyle/>
+          <a:p>
+            <a:pPr algn="l"/>
+            <a:r>
+              <a:rPr sz="3600" b="1" i="0">
                 <a:solidFill>
                   <a:srgbClr val="00C2A8"/>
                 </a:solidFill>
                 <a:latin typeface="Calibri"/>
               </a:rPr>
-              <a:t>17</a:t>
+              <a:t>02</a:t>
+            </a:r>
+          </a:p>
+        </p:txBody>
+      </p:sp>
+      <p:sp>
+        <p:nvSpPr>
+          <p:cNvPr id="12" name="TextBox 11"/>
+          <p:cNvSpPr txBox="1"/>
+          <p:nvPr/>
+        </p:nvSpPr>
+        <p:spPr>
+          <a:xfrm>
+            <a:off x="2103120" y="3474720"/>
+            <a:ext cx="9144000" cy="457200"/>
+          </a:xfrm>
+          <a:prstGeom prst="rect">
+            <a:avLst/>
+          </a:prstGeom>
+          <a:noFill/>
+        </p:spPr>
+        <p:txBody>
+          <a:bodyPr wrap="square" lIns="45720" rIns="45720" tIns="18288" bIns="18288" anchor="ctr">
+            <a:spAutoFit/>
+          </a:bodyPr>
+          <a:lstStyle/>
+          <a:p>
+            <a:pPr algn="l"/>
+            <a:r>
+              <a:rPr sz="1800" b="1" i="0">
+                <a:solidFill>
+                  <a:srgbClr val="FFFFFF"/>
+                </a:solidFill>
+                <a:latin typeface="Calibri"/>
+              </a:rPr>
+              <a:t>KI als Gamechanger</a:t>
+            </a:r>
+          </a:p>
+        </p:txBody>
+      </p:sp>
+      <p:sp>
+        <p:nvSpPr>
+          <p:cNvPr id="13" name="TextBox 12"/>
+          <p:cNvSpPr txBox="1"/>
+          <p:nvPr/>
+        </p:nvSpPr>
+        <p:spPr>
+          <a:xfrm>
+            <a:off x="2103120" y="3931920"/>
+            <a:ext cx="9144000" cy="640080"/>
+          </a:xfrm>
+          <a:prstGeom prst="rect">
+            <a:avLst/>
+          </a:prstGeom>
+          <a:noFill/>
+        </p:spPr>
+        <p:txBody>
+          <a:bodyPr wrap="square" lIns="45720" rIns="45720" tIns="18288" bIns="18288" anchor="t">
+            <a:spAutoFit/>
+          </a:bodyPr>
+          <a:lstStyle/>
+          <a:p>
+            <a:pPr algn="l"/>
+            <a:r>
+              <a:rPr sz="1300" b="0" i="0">
+                <a:solidFill>
+                  <a:srgbClr val="CFD8E6"/>
+                </a:solidFill>
+                <a:latin typeface="Calibri"/>
+              </a:rPr>
+              <a:t>RAG-Systeme, LLMs und Big-Data-Analysen (TaDeA, NRW.Genius) erkennen Muster, die Menschen übersehen würden.</a:t>
+            </a:r>
+          </a:p>
+        </p:txBody>
+      </p:sp>
+      <p:sp>
+        <p:nvSpPr>
+          <p:cNvPr id="14" name="Rounded Rectangle 13"/>
+          <p:cNvSpPr/>
+          <p:nvPr/>
+        </p:nvSpPr>
+        <p:spPr>
+          <a:xfrm>
+            <a:off x="640080" y="4754880"/>
+            <a:ext cx="10881360" cy="1280160"/>
+          </a:xfrm>
+          <a:prstGeom prst="roundRect">
+            <a:avLst>
+              <a:gd name="adj" fmla="val 8000"/>
+            </a:avLst>
+          </a:prstGeom>
+          <a:solidFill>
+            <a:srgbClr val="07142E"/>
+          </a:solidFill>
+          <a:ln>
+            <a:noFill/>
+          </a:ln>
+          <a:effectLst/>
+        </p:spPr>
+        <p:style>
+          <a:lnRef idx="1">
+            <a:schemeClr val="accent1"/>
+          </a:lnRef>
+          <a:fillRef idx="3">
+            <a:schemeClr val="accent1"/>
+          </a:fillRef>
+          <a:effectRef idx="2">
+            <a:schemeClr val="accent1"/>
+          </a:effectRef>
+          <a:fontRef idx="minor">
+            <a:schemeClr val="lt1"/>
+          </a:fontRef>
+        </p:style>
+        <p:txBody>
+          <a:bodyPr rtlCol="0" anchor="ctr"/>
+          <a:lstStyle/>
+          <a:p>
+            <a:pPr algn="ctr"/>
+          </a:p>
+        </p:txBody>
+      </p:sp>
+      <p:sp>
+        <p:nvSpPr>
+          <p:cNvPr id="15" name="Rectangle 14"/>
+          <p:cNvSpPr/>
+          <p:nvPr/>
+        </p:nvSpPr>
+        <p:spPr>
+          <a:xfrm>
+            <a:off x="640080" y="4754880"/>
+            <a:ext cx="137160" cy="1280160"/>
+          </a:xfrm>
+          <a:prstGeom prst="rect">
+            <a:avLst/>
+          </a:prstGeom>
+          <a:solidFill>
+            <a:srgbClr val="00C2A8"/>
+          </a:solidFill>
+          <a:ln>
+            <a:noFill/>
+          </a:ln>
+          <a:effectLst/>
+        </p:spPr>
+        <p:style>
+          <a:lnRef idx="1">
+            <a:schemeClr val="accent1"/>
+          </a:lnRef>
+          <a:fillRef idx="3">
+            <a:schemeClr val="accent1"/>
+          </a:fillRef>
+          <a:effectRef idx="2">
+            <a:schemeClr val="accent1"/>
+          </a:effectRef>
+          <a:fontRef idx="minor">
+            <a:schemeClr val="lt1"/>
+          </a:fontRef>
+        </p:style>
+        <p:txBody>
+          <a:bodyPr rtlCol="0" anchor="ctr"/>
+          <a:lstStyle/>
+          <a:p>
+            <a:pPr algn="ctr"/>
+          </a:p>
+        </p:txBody>
+      </p:sp>
+      <p:sp>
+        <p:nvSpPr>
+          <p:cNvPr id="16" name="TextBox 15"/>
+          <p:cNvSpPr txBox="1"/>
+          <p:nvPr/>
+        </p:nvSpPr>
+        <p:spPr>
+          <a:xfrm>
+            <a:off x="914400" y="4892040"/>
+            <a:ext cx="1097280" cy="1005840"/>
+          </a:xfrm>
+          <a:prstGeom prst="rect">
+            <a:avLst/>
+          </a:prstGeom>
+          <a:noFill/>
+        </p:spPr>
+        <p:txBody>
+          <a:bodyPr wrap="square" lIns="45720" rIns="45720" tIns="18288" bIns="18288" anchor="ctr">
+            <a:spAutoFit/>
+          </a:bodyPr>
+          <a:lstStyle/>
+          <a:p>
+            <a:pPr algn="l"/>
+            <a:r>
+              <a:rPr sz="3600" b="1" i="0">
+                <a:solidFill>
+                  <a:srgbClr val="00C2A8"/>
+                </a:solidFill>
+                <a:latin typeface="Calibri"/>
+              </a:rPr>
+              <a:t>03</a:t>
+            </a:r>
+          </a:p>
+        </p:txBody>
+      </p:sp>
+      <p:sp>
+        <p:nvSpPr>
+          <p:cNvPr id="17" name="TextBox 16"/>
+          <p:cNvSpPr txBox="1"/>
+          <p:nvPr/>
+        </p:nvSpPr>
+        <p:spPr>
+          <a:xfrm>
+            <a:off x="2103120" y="4892040"/>
+            <a:ext cx="9144000" cy="457200"/>
+          </a:xfrm>
+          <a:prstGeom prst="rect">
+            <a:avLst/>
+          </a:prstGeom>
+          <a:noFill/>
+        </p:spPr>
+        <p:txBody>
+          <a:bodyPr wrap="square" lIns="45720" rIns="45720" tIns="18288" bIns="18288" anchor="ctr">
+            <a:spAutoFit/>
+          </a:bodyPr>
+          <a:lstStyle/>
+          <a:p>
+            <a:pPr algn="l"/>
+            <a:r>
+              <a:rPr sz="1800" b="1" i="0">
+                <a:solidFill>
+                  <a:srgbClr val="FFFFFF"/>
+                </a:solidFill>
+                <a:latin typeface="Calibri"/>
+              </a:rPr>
+              <a:t>Internationale Vernetzung</a:t>
+            </a:r>
+          </a:p>
+        </p:txBody>
+      </p:sp>
+      <p:sp>
+        <p:nvSpPr>
+          <p:cNvPr id="18" name="TextBox 17"/>
+          <p:cNvSpPr txBox="1"/>
+          <p:nvPr/>
+        </p:nvSpPr>
+        <p:spPr>
+          <a:xfrm>
+            <a:off x="2103120" y="5349240"/>
+            <a:ext cx="9144000" cy="640080"/>
+          </a:xfrm>
+          <a:prstGeom prst="rect">
+            <a:avLst/>
+          </a:prstGeom>
+          <a:noFill/>
+        </p:spPr>
+        <p:txBody>
+          <a:bodyPr wrap="square" lIns="45720" rIns="45720" tIns="18288" bIns="18288" anchor="t">
+            <a:spAutoFit/>
+          </a:bodyPr>
+          <a:lstStyle/>
+          <a:p>
+            <a:pPr algn="l"/>
+            <a:r>
+              <a:rPr sz="1300" b="0" i="0">
+                <a:solidFill>
+                  <a:srgbClr val="CFD8E6"/>
+                </a:solidFill>
+                <a:latin typeface="Calibri"/>
+              </a:rPr>
+              <a:t>CRS, CbCR, FATCA und DAC 8 schaffen die Datenbasis, die KI-Systeme erst wirksam macht.</a:t>
+            </a:r>
+          </a:p>
+        </p:txBody>
+      </p:sp>
+      <p:sp>
+        <p:nvSpPr>
+          <p:cNvPr id="19" name="TextBox 18"/>
+          <p:cNvSpPr txBox="1"/>
+          <p:nvPr/>
+        </p:nvSpPr>
+        <p:spPr>
+          <a:xfrm>
+            <a:off x="0" y="6217920"/>
+            <a:ext cx="12191695" cy="457200"/>
+          </a:xfrm>
+          <a:prstGeom prst="rect">
+            <a:avLst/>
+          </a:prstGeom>
+          <a:noFill/>
+        </p:spPr>
+        <p:txBody>
+          <a:bodyPr wrap="square" lIns="45720" rIns="45720" tIns="18288" bIns="18288" anchor="ctr">
+            <a:spAutoFit/>
+          </a:bodyPr>
+          <a:lstStyle/>
+          <a:p>
+            <a:pPr algn="ctr"/>
+            <a:r>
+              <a:rPr sz="2000" b="1" i="0">
+                <a:solidFill>
+                  <a:srgbClr val="00C2A8"/>
+                </a:solidFill>
+                <a:latin typeface="Calibri"/>
+              </a:rPr>
+              <a:t>Vielen Dank für Ihre Aufmerksamkeit!</a:t>
             </a:r>
           </a:p>
         </p:txBody>
@@ -10131,7 +11525,7 @@
           <a:p>
             <a:pPr algn="l"/>
             <a:r>
-              <a:rPr sz="2600" b="1">
+              <a:rPr sz="2600" b="1" i="0">
                 <a:solidFill>
                   <a:srgbClr val="FFFFFF"/>
                 </a:solidFill>
@@ -10166,7 +11560,7 @@
           <a:p>
             <a:pPr algn="r"/>
             <a:r>
-              <a:rPr sz="1200" b="0">
+              <a:rPr sz="1200" b="0" i="0">
                 <a:solidFill>
                   <a:srgbClr val="00C2A8"/>
                 </a:solidFill>
@@ -10291,7 +11685,7 @@
           <a:p>
             <a:pPr algn="l"/>
             <a:r>
-              <a:rPr sz="4200" b="1">
+              <a:rPr sz="4200" b="1" i="0">
                 <a:solidFill>
                   <a:srgbClr val="00C2A8"/>
                 </a:solidFill>
@@ -10326,7 +11720,7 @@
           <a:p>
             <a:pPr algn="l"/>
             <a:r>
-              <a:rPr sz="1800" b="1">
+              <a:rPr sz="1800" b="1" i="0">
                 <a:solidFill>
                   <a:srgbClr val="1B263A"/>
                 </a:solidFill>
@@ -10451,7 +11845,7 @@
           <a:p>
             <a:pPr algn="l"/>
             <a:r>
-              <a:rPr sz="4200" b="1">
+              <a:rPr sz="4200" b="1" i="0">
                 <a:solidFill>
                   <a:srgbClr val="00C2A8"/>
                 </a:solidFill>
@@ -10486,7 +11880,7 @@
           <a:p>
             <a:pPr algn="l"/>
             <a:r>
-              <a:rPr sz="1800" b="1">
+              <a:rPr sz="1800" b="1" i="0">
                 <a:solidFill>
                   <a:srgbClr val="1B263A"/>
                 </a:solidFill>
@@ -10611,7 +12005,7 @@
           <a:p>
             <a:pPr algn="l"/>
             <a:r>
-              <a:rPr sz="4200" b="1">
+              <a:rPr sz="4200" b="1" i="0">
                 <a:solidFill>
                   <a:srgbClr val="00C2A8"/>
                 </a:solidFill>
@@ -10646,7 +12040,7 @@
           <a:p>
             <a:pPr algn="l"/>
             <a:r>
-              <a:rPr sz="1800" b="1">
+              <a:rPr sz="1800" b="1" i="0">
                 <a:solidFill>
                   <a:srgbClr val="1B263A"/>
                 </a:solidFill>
@@ -10771,7 +12165,7 @@
           <a:p>
             <a:pPr algn="l"/>
             <a:r>
-              <a:rPr sz="4200" b="1">
+              <a:rPr sz="4200" b="1" i="0">
                 <a:solidFill>
                   <a:srgbClr val="00C2A8"/>
                 </a:solidFill>
@@ -10806,7 +12200,7 @@
           <a:p>
             <a:pPr algn="l"/>
             <a:r>
-              <a:rPr sz="1800" b="1">
+              <a:rPr sz="1800" b="1" i="0">
                 <a:solidFill>
                   <a:srgbClr val="1B263A"/>
                 </a:solidFill>
@@ -10931,7 +12325,7 @@
           <a:p>
             <a:pPr algn="l"/>
             <a:r>
-              <a:rPr sz="4200" b="1">
+              <a:rPr sz="4200" b="1" i="0">
                 <a:solidFill>
                   <a:srgbClr val="00C2A8"/>
                 </a:solidFill>
@@ -10966,7 +12360,7 @@
           <a:p>
             <a:pPr algn="l"/>
             <a:r>
-              <a:rPr sz="1800" b="1">
+              <a:rPr sz="1800" b="1" i="0">
                 <a:solidFill>
                   <a:srgbClr val="1B263A"/>
                 </a:solidFill>
@@ -11091,7 +12485,7 @@
           <a:p>
             <a:pPr algn="l"/>
             <a:r>
-              <a:rPr sz="4200" b="1">
+              <a:rPr sz="4200" b="1" i="0">
                 <a:solidFill>
                   <a:srgbClr val="00C2A8"/>
                 </a:solidFill>
@@ -11126,7 +12520,7 @@
           <a:p>
             <a:pPr algn="l"/>
             <a:r>
-              <a:rPr sz="1800" b="1">
+              <a:rPr sz="1800" b="1" i="0">
                 <a:solidFill>
                   <a:srgbClr val="1B263A"/>
                 </a:solidFill>
@@ -11205,7 +12599,7 @@
           <a:p>
             <a:pPr algn="l"/>
             <a:r>
-              <a:rPr sz="1000" b="0">
+              <a:rPr sz="1000" b="0" i="0">
                 <a:solidFill>
                   <a:srgbClr val="B8C2D6"/>
                 </a:solidFill>
@@ -11240,13 +12634,1676 @@
           <a:p>
             <a:pPr algn="r"/>
             <a:r>
-              <a:rPr sz="1000" b="0">
+              <a:rPr sz="1000" b="0" i="0">
                 <a:solidFill>
                   <a:srgbClr val="00C2A8"/>
                 </a:solidFill>
                 <a:latin typeface="Calibri"/>
               </a:rPr>
               <a:t>2</a:t>
+            </a:r>
+          </a:p>
+        </p:txBody>
+      </p:sp>
+    </p:spTree>
+  </p:cSld>
+  <p:clrMapOvr>
+    <a:masterClrMapping/>
+  </p:clrMapOvr>
+</p:sld>
+</file>
+
+<file path=ppt/slides/slide20.xml><?xml version="1.0" encoding="utf-8"?>
+<p:sld xmlns:a="http://schemas.openxmlformats.org/drawingml/2006/main" xmlns:p="http://schemas.openxmlformats.org/presentationml/2006/main" xmlns:r="http://schemas.openxmlformats.org/officeDocument/2006/relationships">
+  <p:cSld>
+    <p:bg>
+      <p:bgPr>
+        <a:solidFill>
+          <a:srgbClr val="F2F5FA"/>
+        </a:solidFill>
+        <a:effectLst/>
+      </p:bgPr>
+    </p:bg>
+    <p:spTree>
+      <p:nvGrpSpPr>
+        <p:cNvPr id="1" name=""/>
+        <p:cNvGrpSpPr/>
+        <p:nvPr/>
+      </p:nvGrpSpPr>
+      <p:grpSpPr/>
+      <p:sp>
+        <p:nvSpPr>
+          <p:cNvPr id="2" name="Rectangle 1"/>
+          <p:cNvSpPr/>
+          <p:nvPr/>
+        </p:nvSpPr>
+        <p:spPr>
+          <a:xfrm>
+            <a:off x="0" y="0"/>
+            <a:ext cx="12191695" cy="914400"/>
+          </a:xfrm>
+          <a:prstGeom prst="rect">
+            <a:avLst/>
+          </a:prstGeom>
+          <a:solidFill>
+            <a:srgbClr val="0B1E3F"/>
+          </a:solidFill>
+          <a:ln>
+            <a:noFill/>
+          </a:ln>
+          <a:effectLst/>
+        </p:spPr>
+        <p:style>
+          <a:lnRef idx="1">
+            <a:schemeClr val="accent1"/>
+          </a:lnRef>
+          <a:fillRef idx="3">
+            <a:schemeClr val="accent1"/>
+          </a:fillRef>
+          <a:effectRef idx="2">
+            <a:schemeClr val="accent1"/>
+          </a:effectRef>
+          <a:fontRef idx="minor">
+            <a:schemeClr val="lt1"/>
+          </a:fontRef>
+        </p:style>
+        <p:txBody>
+          <a:bodyPr rtlCol="0" anchor="ctr"/>
+          <a:lstStyle/>
+          <a:p>
+            <a:pPr algn="ctr"/>
+          </a:p>
+        </p:txBody>
+      </p:sp>
+      <p:sp>
+        <p:nvSpPr>
+          <p:cNvPr id="3" name="Rectangle 2"/>
+          <p:cNvSpPr/>
+          <p:nvPr/>
+        </p:nvSpPr>
+        <p:spPr>
+          <a:xfrm>
+            <a:off x="365760" y="201168"/>
+            <a:ext cx="73152" cy="502920"/>
+          </a:xfrm>
+          <a:prstGeom prst="rect">
+            <a:avLst/>
+          </a:prstGeom>
+          <a:solidFill>
+            <a:srgbClr val="00C2A8"/>
+          </a:solidFill>
+          <a:ln>
+            <a:noFill/>
+          </a:ln>
+          <a:effectLst/>
+        </p:spPr>
+        <p:style>
+          <a:lnRef idx="1">
+            <a:schemeClr val="accent1"/>
+          </a:lnRef>
+          <a:fillRef idx="3">
+            <a:schemeClr val="accent1"/>
+          </a:fillRef>
+          <a:effectRef idx="2">
+            <a:schemeClr val="accent1"/>
+          </a:effectRef>
+          <a:fontRef idx="minor">
+            <a:schemeClr val="lt1"/>
+          </a:fontRef>
+        </p:style>
+        <p:txBody>
+          <a:bodyPr rtlCol="0" anchor="ctr"/>
+          <a:lstStyle/>
+          <a:p>
+            <a:pPr algn="ctr"/>
+          </a:p>
+        </p:txBody>
+      </p:sp>
+      <p:sp>
+        <p:nvSpPr>
+          <p:cNvPr id="4" name="TextBox 3"/>
+          <p:cNvSpPr txBox="1"/>
+          <p:nvPr/>
+        </p:nvSpPr>
+        <p:spPr>
+          <a:xfrm>
+            <a:off x="548640" y="164592"/>
+            <a:ext cx="9144000" cy="640080"/>
+          </a:xfrm>
+          <a:prstGeom prst="rect">
+            <a:avLst/>
+          </a:prstGeom>
+          <a:noFill/>
+        </p:spPr>
+        <p:txBody>
+          <a:bodyPr wrap="square" lIns="45720" rIns="45720" tIns="18288" bIns="18288" anchor="ctr">
+            <a:spAutoFit/>
+          </a:bodyPr>
+          <a:lstStyle/>
+          <a:p>
+            <a:pPr algn="l"/>
+            <a:r>
+              <a:rPr sz="2600" b="1" i="0">
+                <a:solidFill>
+                  <a:srgbClr val="FFFFFF"/>
+                </a:solidFill>
+                <a:latin typeface="Calibri"/>
+              </a:rPr>
+              <a:t>Quellenverzeichnis</a:t>
+            </a:r>
+          </a:p>
+        </p:txBody>
+      </p:sp>
+      <p:sp>
+        <p:nvSpPr>
+          <p:cNvPr id="5" name="TextBox 4"/>
+          <p:cNvSpPr txBox="1"/>
+          <p:nvPr/>
+        </p:nvSpPr>
+        <p:spPr>
+          <a:xfrm>
+            <a:off x="9722815" y="274320"/>
+            <a:ext cx="2194560" cy="365760"/>
+          </a:xfrm>
+          <a:prstGeom prst="rect">
+            <a:avLst/>
+          </a:prstGeom>
+          <a:noFill/>
+        </p:spPr>
+        <p:txBody>
+          <a:bodyPr wrap="square" lIns="45720" rIns="45720" tIns="18288" bIns="18288" anchor="ctr">
+            <a:spAutoFit/>
+          </a:bodyPr>
+          <a:lstStyle/>
+          <a:p>
+            <a:pPr algn="r"/>
+            <a:r>
+              <a:rPr sz="1200" b="0" i="0">
+                <a:solidFill>
+                  <a:srgbClr val="00C2A8"/>
+                </a:solidFill>
+                <a:latin typeface="Calibri"/>
+              </a:rPr>
+              <a:t>Sources</a:t>
+            </a:r>
+          </a:p>
+        </p:txBody>
+      </p:sp>
+      <p:sp>
+        <p:nvSpPr>
+          <p:cNvPr id="6" name="Rounded Rectangle 5"/>
+          <p:cNvSpPr/>
+          <p:nvPr/>
+        </p:nvSpPr>
+        <p:spPr>
+          <a:xfrm>
+            <a:off x="457200" y="1097280"/>
+            <a:ext cx="11247120" cy="640080"/>
+          </a:xfrm>
+          <a:prstGeom prst="roundRect">
+            <a:avLst>
+              <a:gd name="adj" fmla="val 15000"/>
+            </a:avLst>
+          </a:prstGeom>
+          <a:solidFill>
+            <a:srgbClr val="FFFFFF"/>
+          </a:solidFill>
+          <a:ln>
+            <a:noFill/>
+          </a:ln>
+          <a:effectLst/>
+        </p:spPr>
+        <p:style>
+          <a:lnRef idx="1">
+            <a:schemeClr val="accent1"/>
+          </a:lnRef>
+          <a:fillRef idx="3">
+            <a:schemeClr val="accent1"/>
+          </a:fillRef>
+          <a:effectRef idx="2">
+            <a:schemeClr val="accent1"/>
+          </a:effectRef>
+          <a:fontRef idx="minor">
+            <a:schemeClr val="lt1"/>
+          </a:fontRef>
+        </p:style>
+        <p:txBody>
+          <a:bodyPr rtlCol="0" anchor="ctr"/>
+          <a:lstStyle/>
+          <a:p>
+            <a:pPr algn="ctr"/>
+          </a:p>
+        </p:txBody>
+      </p:sp>
+      <p:sp>
+        <p:nvSpPr>
+          <p:cNvPr id="7" name="Rectangle 6"/>
+          <p:cNvSpPr/>
+          <p:nvPr/>
+        </p:nvSpPr>
+        <p:spPr>
+          <a:xfrm>
+            <a:off x="457200" y="1097280"/>
+            <a:ext cx="109728" cy="640080"/>
+          </a:xfrm>
+          <a:prstGeom prst="rect">
+            <a:avLst/>
+          </a:prstGeom>
+          <a:solidFill>
+            <a:srgbClr val="00C2A8"/>
+          </a:solidFill>
+          <a:ln>
+            <a:noFill/>
+          </a:ln>
+          <a:effectLst/>
+        </p:spPr>
+        <p:style>
+          <a:lnRef idx="1">
+            <a:schemeClr val="accent1"/>
+          </a:lnRef>
+          <a:fillRef idx="3">
+            <a:schemeClr val="accent1"/>
+          </a:fillRef>
+          <a:effectRef idx="2">
+            <a:schemeClr val="accent1"/>
+          </a:effectRef>
+          <a:fontRef idx="minor">
+            <a:schemeClr val="lt1"/>
+          </a:fontRef>
+        </p:style>
+        <p:txBody>
+          <a:bodyPr rtlCol="0" anchor="ctr"/>
+          <a:lstStyle/>
+          <a:p>
+            <a:pPr algn="ctr"/>
+          </a:p>
+        </p:txBody>
+      </p:sp>
+      <p:sp>
+        <p:nvSpPr>
+          <p:cNvPr id="8" name="TextBox 7"/>
+          <p:cNvSpPr txBox="1"/>
+          <p:nvPr/>
+        </p:nvSpPr>
+        <p:spPr>
+          <a:xfrm>
+            <a:off x="685800" y="1170432"/>
+            <a:ext cx="548640" cy="502920"/>
+          </a:xfrm>
+          <a:prstGeom prst="rect">
+            <a:avLst/>
+          </a:prstGeom>
+          <a:noFill/>
+        </p:spPr>
+        <p:txBody>
+          <a:bodyPr wrap="square" lIns="45720" rIns="45720" tIns="18288" bIns="18288" anchor="ctr">
+            <a:spAutoFit/>
+          </a:bodyPr>
+          <a:lstStyle/>
+          <a:p>
+            <a:pPr algn="l"/>
+            <a:r>
+              <a:rPr sz="1800" b="1" i="0">
+                <a:solidFill>
+                  <a:srgbClr val="00C2A8"/>
+                </a:solidFill>
+                <a:latin typeface="Calibri"/>
+              </a:rPr>
+              <a:t>1</a:t>
+            </a:r>
+          </a:p>
+        </p:txBody>
+      </p:sp>
+      <p:sp>
+        <p:nvSpPr>
+          <p:cNvPr id="9" name="TextBox 8"/>
+          <p:cNvSpPr txBox="1"/>
+          <p:nvPr/>
+        </p:nvSpPr>
+        <p:spPr>
+          <a:xfrm>
+            <a:off x="1234440" y="1143000"/>
+            <a:ext cx="7772400" cy="292608"/>
+          </a:xfrm>
+          <a:prstGeom prst="rect">
+            <a:avLst/>
+          </a:prstGeom>
+          <a:noFill/>
+        </p:spPr>
+        <p:txBody>
+          <a:bodyPr wrap="square" lIns="45720" rIns="45720" tIns="18288" bIns="18288" anchor="ctr">
+            <a:spAutoFit/>
+          </a:bodyPr>
+          <a:lstStyle/>
+          <a:p>
+            <a:pPr algn="l"/>
+            <a:r>
+              <a:rPr sz="1200" b="1" i="0">
+                <a:solidFill>
+                  <a:srgbClr val="0B1E3F"/>
+                </a:solidFill>
+                <a:latin typeface="Calibri"/>
+              </a:rPr>
+              <a:t>Künstliche Intelligenz in der Finanzverwaltung NRW</a:t>
+            </a:r>
+          </a:p>
+        </p:txBody>
+      </p:sp>
+      <p:sp>
+        <p:nvSpPr>
+          <p:cNvPr id="10" name="TextBox 9"/>
+          <p:cNvSpPr txBox="1"/>
+          <p:nvPr/>
+        </p:nvSpPr>
+        <p:spPr>
+          <a:xfrm>
+            <a:off x="1234440" y="1444752"/>
+            <a:ext cx="10058400" cy="274320"/>
+          </a:xfrm>
+          <a:prstGeom prst="rect">
+            <a:avLst/>
+          </a:prstGeom>
+          <a:noFill/>
+        </p:spPr>
+        <p:txBody>
+          <a:bodyPr wrap="square" lIns="45720" rIns="45720" tIns="18288" bIns="18288" anchor="ctr">
+            <a:spAutoFit/>
+          </a:bodyPr>
+          <a:lstStyle/>
+          <a:p>
+            <a:pPr algn="l"/>
+            <a:r>
+              <a:rPr sz="1000" b="0" i="0">
+                <a:solidFill>
+                  <a:srgbClr val="6E7A8C"/>
+                </a:solidFill>
+                <a:latin typeface="Calibri"/>
+              </a:rPr>
+              <a:t>finanzverwaltung.nrw – abgerufen am 23.05.2026</a:t>
+            </a:r>
+          </a:p>
+        </p:txBody>
+      </p:sp>
+      <p:sp>
+        <p:nvSpPr>
+          <p:cNvPr id="11" name="Rounded Rectangle 10"/>
+          <p:cNvSpPr/>
+          <p:nvPr/>
+        </p:nvSpPr>
+        <p:spPr>
+          <a:xfrm>
+            <a:off x="457200" y="1847088"/>
+            <a:ext cx="11247120" cy="640080"/>
+          </a:xfrm>
+          <a:prstGeom prst="roundRect">
+            <a:avLst>
+              <a:gd name="adj" fmla="val 15000"/>
+            </a:avLst>
+          </a:prstGeom>
+          <a:solidFill>
+            <a:srgbClr val="FFFFFF"/>
+          </a:solidFill>
+          <a:ln>
+            <a:noFill/>
+          </a:ln>
+          <a:effectLst/>
+        </p:spPr>
+        <p:style>
+          <a:lnRef idx="1">
+            <a:schemeClr val="accent1"/>
+          </a:lnRef>
+          <a:fillRef idx="3">
+            <a:schemeClr val="accent1"/>
+          </a:fillRef>
+          <a:effectRef idx="2">
+            <a:schemeClr val="accent1"/>
+          </a:effectRef>
+          <a:fontRef idx="minor">
+            <a:schemeClr val="lt1"/>
+          </a:fontRef>
+        </p:style>
+        <p:txBody>
+          <a:bodyPr rtlCol="0" anchor="ctr"/>
+          <a:lstStyle/>
+          <a:p>
+            <a:pPr algn="ctr"/>
+          </a:p>
+        </p:txBody>
+      </p:sp>
+      <p:sp>
+        <p:nvSpPr>
+          <p:cNvPr id="12" name="Rectangle 11"/>
+          <p:cNvSpPr/>
+          <p:nvPr/>
+        </p:nvSpPr>
+        <p:spPr>
+          <a:xfrm>
+            <a:off x="457200" y="1847088"/>
+            <a:ext cx="109728" cy="640080"/>
+          </a:xfrm>
+          <a:prstGeom prst="rect">
+            <a:avLst/>
+          </a:prstGeom>
+          <a:solidFill>
+            <a:srgbClr val="00C2A8"/>
+          </a:solidFill>
+          <a:ln>
+            <a:noFill/>
+          </a:ln>
+          <a:effectLst/>
+        </p:spPr>
+        <p:style>
+          <a:lnRef idx="1">
+            <a:schemeClr val="accent1"/>
+          </a:lnRef>
+          <a:fillRef idx="3">
+            <a:schemeClr val="accent1"/>
+          </a:fillRef>
+          <a:effectRef idx="2">
+            <a:schemeClr val="accent1"/>
+          </a:effectRef>
+          <a:fontRef idx="minor">
+            <a:schemeClr val="lt1"/>
+          </a:fontRef>
+        </p:style>
+        <p:txBody>
+          <a:bodyPr rtlCol="0" anchor="ctr"/>
+          <a:lstStyle/>
+          <a:p>
+            <a:pPr algn="ctr"/>
+          </a:p>
+        </p:txBody>
+      </p:sp>
+      <p:sp>
+        <p:nvSpPr>
+          <p:cNvPr id="13" name="TextBox 12"/>
+          <p:cNvSpPr txBox="1"/>
+          <p:nvPr/>
+        </p:nvSpPr>
+        <p:spPr>
+          <a:xfrm>
+            <a:off x="685800" y="1920240"/>
+            <a:ext cx="548640" cy="502920"/>
+          </a:xfrm>
+          <a:prstGeom prst="rect">
+            <a:avLst/>
+          </a:prstGeom>
+          <a:noFill/>
+        </p:spPr>
+        <p:txBody>
+          <a:bodyPr wrap="square" lIns="45720" rIns="45720" tIns="18288" bIns="18288" anchor="ctr">
+            <a:spAutoFit/>
+          </a:bodyPr>
+          <a:lstStyle/>
+          <a:p>
+            <a:pPr algn="l"/>
+            <a:r>
+              <a:rPr sz="1800" b="1" i="0">
+                <a:solidFill>
+                  <a:srgbClr val="00C2A8"/>
+                </a:solidFill>
+                <a:latin typeface="Calibri"/>
+              </a:rPr>
+              <a:t>2</a:t>
+            </a:r>
+          </a:p>
+        </p:txBody>
+      </p:sp>
+      <p:sp>
+        <p:nvSpPr>
+          <p:cNvPr id="14" name="TextBox 13"/>
+          <p:cNvSpPr txBox="1"/>
+          <p:nvPr/>
+        </p:nvSpPr>
+        <p:spPr>
+          <a:xfrm>
+            <a:off x="1234440" y="1892808"/>
+            <a:ext cx="7772400" cy="292608"/>
+          </a:xfrm>
+          <a:prstGeom prst="rect">
+            <a:avLst/>
+          </a:prstGeom>
+          <a:noFill/>
+        </p:spPr>
+        <p:txBody>
+          <a:bodyPr wrap="square" lIns="45720" rIns="45720" tIns="18288" bIns="18288" anchor="ctr">
+            <a:spAutoFit/>
+          </a:bodyPr>
+          <a:lstStyle/>
+          <a:p>
+            <a:pPr algn="l"/>
+            <a:r>
+              <a:rPr sz="1200" b="1" i="0">
+                <a:solidFill>
+                  <a:srgbClr val="0B1E3F"/>
+                </a:solidFill>
+                <a:latin typeface="Calibri"/>
+              </a:rPr>
+              <a:t>NRW &amp; Fraunhofer IAIS erproben KI-Einsatz bei der Steuerfahndung</a:t>
+            </a:r>
+          </a:p>
+        </p:txBody>
+      </p:sp>
+      <p:sp>
+        <p:nvSpPr>
+          <p:cNvPr id="15" name="TextBox 14"/>
+          <p:cNvSpPr txBox="1"/>
+          <p:nvPr/>
+        </p:nvSpPr>
+        <p:spPr>
+          <a:xfrm>
+            <a:off x="1234440" y="2194560"/>
+            <a:ext cx="10058400" cy="274320"/>
+          </a:xfrm>
+          <a:prstGeom prst="rect">
+            <a:avLst/>
+          </a:prstGeom>
+          <a:noFill/>
+        </p:spPr>
+        <p:txBody>
+          <a:bodyPr wrap="square" lIns="45720" rIns="45720" tIns="18288" bIns="18288" anchor="ctr">
+            <a:spAutoFit/>
+          </a:bodyPr>
+          <a:lstStyle/>
+          <a:p>
+            <a:pPr algn="l"/>
+            <a:r>
+              <a:rPr sz="1000" b="0" i="0">
+                <a:solidFill>
+                  <a:srgbClr val="6E7A8C"/>
+                </a:solidFill>
+                <a:latin typeface="Calibri"/>
+              </a:rPr>
+              <a:t>Pressemitteilung Finanzverwaltung NRW, 10.06.2025</a:t>
+            </a:r>
+          </a:p>
+        </p:txBody>
+      </p:sp>
+      <p:sp>
+        <p:nvSpPr>
+          <p:cNvPr id="16" name="Rounded Rectangle 15"/>
+          <p:cNvSpPr/>
+          <p:nvPr/>
+        </p:nvSpPr>
+        <p:spPr>
+          <a:xfrm>
+            <a:off x="457200" y="2596896"/>
+            <a:ext cx="11247120" cy="640080"/>
+          </a:xfrm>
+          <a:prstGeom prst="roundRect">
+            <a:avLst>
+              <a:gd name="adj" fmla="val 15000"/>
+            </a:avLst>
+          </a:prstGeom>
+          <a:solidFill>
+            <a:srgbClr val="FFFFFF"/>
+          </a:solidFill>
+          <a:ln>
+            <a:noFill/>
+          </a:ln>
+          <a:effectLst/>
+        </p:spPr>
+        <p:style>
+          <a:lnRef idx="1">
+            <a:schemeClr val="accent1"/>
+          </a:lnRef>
+          <a:fillRef idx="3">
+            <a:schemeClr val="accent1"/>
+          </a:fillRef>
+          <a:effectRef idx="2">
+            <a:schemeClr val="accent1"/>
+          </a:effectRef>
+          <a:fontRef idx="minor">
+            <a:schemeClr val="lt1"/>
+          </a:fontRef>
+        </p:style>
+        <p:txBody>
+          <a:bodyPr rtlCol="0" anchor="ctr"/>
+          <a:lstStyle/>
+          <a:p>
+            <a:pPr algn="ctr"/>
+          </a:p>
+        </p:txBody>
+      </p:sp>
+      <p:sp>
+        <p:nvSpPr>
+          <p:cNvPr id="17" name="Rectangle 16"/>
+          <p:cNvSpPr/>
+          <p:nvPr/>
+        </p:nvSpPr>
+        <p:spPr>
+          <a:xfrm>
+            <a:off x="457200" y="2596896"/>
+            <a:ext cx="109728" cy="640080"/>
+          </a:xfrm>
+          <a:prstGeom prst="rect">
+            <a:avLst/>
+          </a:prstGeom>
+          <a:solidFill>
+            <a:srgbClr val="00C2A8"/>
+          </a:solidFill>
+          <a:ln>
+            <a:noFill/>
+          </a:ln>
+          <a:effectLst/>
+        </p:spPr>
+        <p:style>
+          <a:lnRef idx="1">
+            <a:schemeClr val="accent1"/>
+          </a:lnRef>
+          <a:fillRef idx="3">
+            <a:schemeClr val="accent1"/>
+          </a:fillRef>
+          <a:effectRef idx="2">
+            <a:schemeClr val="accent1"/>
+          </a:effectRef>
+          <a:fontRef idx="minor">
+            <a:schemeClr val="lt1"/>
+          </a:fontRef>
+        </p:style>
+        <p:txBody>
+          <a:bodyPr rtlCol="0" anchor="ctr"/>
+          <a:lstStyle/>
+          <a:p>
+            <a:pPr algn="ctr"/>
+          </a:p>
+        </p:txBody>
+      </p:sp>
+      <p:sp>
+        <p:nvSpPr>
+          <p:cNvPr id="18" name="TextBox 17"/>
+          <p:cNvSpPr txBox="1"/>
+          <p:nvPr/>
+        </p:nvSpPr>
+        <p:spPr>
+          <a:xfrm>
+            <a:off x="685800" y="2670048"/>
+            <a:ext cx="548640" cy="502920"/>
+          </a:xfrm>
+          <a:prstGeom prst="rect">
+            <a:avLst/>
+          </a:prstGeom>
+          <a:noFill/>
+        </p:spPr>
+        <p:txBody>
+          <a:bodyPr wrap="square" lIns="45720" rIns="45720" tIns="18288" bIns="18288" anchor="ctr">
+            <a:spAutoFit/>
+          </a:bodyPr>
+          <a:lstStyle/>
+          <a:p>
+            <a:pPr algn="l"/>
+            <a:r>
+              <a:rPr sz="1800" b="1" i="0">
+                <a:solidFill>
+                  <a:srgbClr val="00C2A8"/>
+                </a:solidFill>
+                <a:latin typeface="Calibri"/>
+              </a:rPr>
+              <a:t>3</a:t>
+            </a:r>
+          </a:p>
+        </p:txBody>
+      </p:sp>
+      <p:sp>
+        <p:nvSpPr>
+          <p:cNvPr id="19" name="TextBox 18"/>
+          <p:cNvSpPr txBox="1"/>
+          <p:nvPr/>
+        </p:nvSpPr>
+        <p:spPr>
+          <a:xfrm>
+            <a:off x="1234440" y="2642616"/>
+            <a:ext cx="7772400" cy="292608"/>
+          </a:xfrm>
+          <a:prstGeom prst="rect">
+            <a:avLst/>
+          </a:prstGeom>
+          <a:noFill/>
+        </p:spPr>
+        <p:txBody>
+          <a:bodyPr wrap="square" lIns="45720" rIns="45720" tIns="18288" bIns="18288" anchor="ctr">
+            <a:spAutoFit/>
+          </a:bodyPr>
+          <a:lstStyle/>
+          <a:p>
+            <a:pPr algn="l"/>
+            <a:r>
+              <a:rPr sz="1200" b="1" i="0">
+                <a:solidFill>
+                  <a:srgbClr val="0B1E3F"/>
+                </a:solidFill>
+                <a:latin typeface="Calibri"/>
+              </a:rPr>
+              <a:t>Finanzkriminalität mit Kryptowerten: Sachsen setzt auf KI</a:t>
+            </a:r>
+          </a:p>
+        </p:txBody>
+      </p:sp>
+      <p:sp>
+        <p:nvSpPr>
+          <p:cNvPr id="20" name="TextBox 19"/>
+          <p:cNvSpPr txBox="1"/>
+          <p:nvPr/>
+        </p:nvSpPr>
+        <p:spPr>
+          <a:xfrm>
+            <a:off x="1234440" y="2944368"/>
+            <a:ext cx="10058400" cy="274320"/>
+          </a:xfrm>
+          <a:prstGeom prst="rect">
+            <a:avLst/>
+          </a:prstGeom>
+          <a:noFill/>
+        </p:spPr>
+        <p:txBody>
+          <a:bodyPr wrap="square" lIns="45720" rIns="45720" tIns="18288" bIns="18288" anchor="ctr">
+            <a:spAutoFit/>
+          </a:bodyPr>
+          <a:lstStyle/>
+          <a:p>
+            <a:pPr algn="l"/>
+            <a:r>
+              <a:rPr sz="1000" b="0" i="0">
+                <a:solidFill>
+                  <a:srgbClr val="6E7A8C"/>
+                </a:solidFill>
+                <a:latin typeface="Calibri"/>
+              </a:rPr>
+              <a:t>Pressemitteilung, 12.11.2025</a:t>
+            </a:r>
+          </a:p>
+        </p:txBody>
+      </p:sp>
+      <p:sp>
+        <p:nvSpPr>
+          <p:cNvPr id="21" name="Rounded Rectangle 20"/>
+          <p:cNvSpPr/>
+          <p:nvPr/>
+        </p:nvSpPr>
+        <p:spPr>
+          <a:xfrm>
+            <a:off x="457200" y="3346704"/>
+            <a:ext cx="11247120" cy="640080"/>
+          </a:xfrm>
+          <a:prstGeom prst="roundRect">
+            <a:avLst>
+              <a:gd name="adj" fmla="val 15000"/>
+            </a:avLst>
+          </a:prstGeom>
+          <a:solidFill>
+            <a:srgbClr val="FFFFFF"/>
+          </a:solidFill>
+          <a:ln>
+            <a:noFill/>
+          </a:ln>
+          <a:effectLst/>
+        </p:spPr>
+        <p:style>
+          <a:lnRef idx="1">
+            <a:schemeClr val="accent1"/>
+          </a:lnRef>
+          <a:fillRef idx="3">
+            <a:schemeClr val="accent1"/>
+          </a:fillRef>
+          <a:effectRef idx="2">
+            <a:schemeClr val="accent1"/>
+          </a:effectRef>
+          <a:fontRef idx="minor">
+            <a:schemeClr val="lt1"/>
+          </a:fontRef>
+        </p:style>
+        <p:txBody>
+          <a:bodyPr rtlCol="0" anchor="ctr"/>
+          <a:lstStyle/>
+          <a:p>
+            <a:pPr algn="ctr"/>
+          </a:p>
+        </p:txBody>
+      </p:sp>
+      <p:sp>
+        <p:nvSpPr>
+          <p:cNvPr id="22" name="Rectangle 21"/>
+          <p:cNvSpPr/>
+          <p:nvPr/>
+        </p:nvSpPr>
+        <p:spPr>
+          <a:xfrm>
+            <a:off x="457200" y="3346704"/>
+            <a:ext cx="109728" cy="640080"/>
+          </a:xfrm>
+          <a:prstGeom prst="rect">
+            <a:avLst/>
+          </a:prstGeom>
+          <a:solidFill>
+            <a:srgbClr val="00C2A8"/>
+          </a:solidFill>
+          <a:ln>
+            <a:noFill/>
+          </a:ln>
+          <a:effectLst/>
+        </p:spPr>
+        <p:style>
+          <a:lnRef idx="1">
+            <a:schemeClr val="accent1"/>
+          </a:lnRef>
+          <a:fillRef idx="3">
+            <a:schemeClr val="accent1"/>
+          </a:fillRef>
+          <a:effectRef idx="2">
+            <a:schemeClr val="accent1"/>
+          </a:effectRef>
+          <a:fontRef idx="minor">
+            <a:schemeClr val="lt1"/>
+          </a:fontRef>
+        </p:style>
+        <p:txBody>
+          <a:bodyPr rtlCol="0" anchor="ctr"/>
+          <a:lstStyle/>
+          <a:p>
+            <a:pPr algn="ctr"/>
+          </a:p>
+        </p:txBody>
+      </p:sp>
+      <p:sp>
+        <p:nvSpPr>
+          <p:cNvPr id="23" name="TextBox 22"/>
+          <p:cNvSpPr txBox="1"/>
+          <p:nvPr/>
+        </p:nvSpPr>
+        <p:spPr>
+          <a:xfrm>
+            <a:off x="685800" y="3419856"/>
+            <a:ext cx="548640" cy="502920"/>
+          </a:xfrm>
+          <a:prstGeom prst="rect">
+            <a:avLst/>
+          </a:prstGeom>
+          <a:noFill/>
+        </p:spPr>
+        <p:txBody>
+          <a:bodyPr wrap="square" lIns="45720" rIns="45720" tIns="18288" bIns="18288" anchor="ctr">
+            <a:spAutoFit/>
+          </a:bodyPr>
+          <a:lstStyle/>
+          <a:p>
+            <a:pPr algn="l"/>
+            <a:r>
+              <a:rPr sz="1800" b="1" i="0">
+                <a:solidFill>
+                  <a:srgbClr val="00C2A8"/>
+                </a:solidFill>
+                <a:latin typeface="Calibri"/>
+              </a:rPr>
+              <a:t>4</a:t>
+            </a:r>
+          </a:p>
+        </p:txBody>
+      </p:sp>
+      <p:sp>
+        <p:nvSpPr>
+          <p:cNvPr id="24" name="TextBox 23"/>
+          <p:cNvSpPr txBox="1"/>
+          <p:nvPr/>
+        </p:nvSpPr>
+        <p:spPr>
+          <a:xfrm>
+            <a:off x="1234440" y="3392424"/>
+            <a:ext cx="7772400" cy="292608"/>
+          </a:xfrm>
+          <a:prstGeom prst="rect">
+            <a:avLst/>
+          </a:prstGeom>
+          <a:noFill/>
+        </p:spPr>
+        <p:txBody>
+          <a:bodyPr wrap="square" lIns="45720" rIns="45720" tIns="18288" bIns="18288" anchor="ctr">
+            <a:spAutoFit/>
+          </a:bodyPr>
+          <a:lstStyle/>
+          <a:p>
+            <a:pPr algn="l"/>
+            <a:r>
+              <a:rPr sz="1200" b="1" i="0">
+                <a:solidFill>
+                  <a:srgbClr val="0B1E3F"/>
+                </a:solidFill>
+                <a:latin typeface="Calibri"/>
+              </a:rPr>
+              <a:t>TaDeA – Universität Oldenburg</a:t>
+            </a:r>
+          </a:p>
+        </p:txBody>
+      </p:sp>
+      <p:sp>
+        <p:nvSpPr>
+          <p:cNvPr id="25" name="TextBox 24"/>
+          <p:cNvSpPr txBox="1"/>
+          <p:nvPr/>
+        </p:nvSpPr>
+        <p:spPr>
+          <a:xfrm>
+            <a:off x="1234440" y="3694176"/>
+            <a:ext cx="10058400" cy="274320"/>
+          </a:xfrm>
+          <a:prstGeom prst="rect">
+            <a:avLst/>
+          </a:prstGeom>
+          <a:noFill/>
+        </p:spPr>
+        <p:txBody>
+          <a:bodyPr wrap="square" lIns="45720" rIns="45720" tIns="18288" bIns="18288" anchor="ctr">
+            <a:spAutoFit/>
+          </a:bodyPr>
+          <a:lstStyle/>
+          <a:p>
+            <a:pPr algn="l"/>
+            <a:r>
+              <a:rPr sz="1000" b="0" i="0">
+                <a:solidFill>
+                  <a:srgbClr val="6E7A8C"/>
+                </a:solidFill>
+                <a:latin typeface="Calibri"/>
+              </a:rPr>
+              <a:t>tadea-ol.de – abgerufen am 26.05.2026</a:t>
+            </a:r>
+          </a:p>
+        </p:txBody>
+      </p:sp>
+      <p:sp>
+        <p:nvSpPr>
+          <p:cNvPr id="26" name="Rounded Rectangle 25"/>
+          <p:cNvSpPr/>
+          <p:nvPr/>
+        </p:nvSpPr>
+        <p:spPr>
+          <a:xfrm>
+            <a:off x="457200" y="4096512"/>
+            <a:ext cx="11247120" cy="640080"/>
+          </a:xfrm>
+          <a:prstGeom prst="roundRect">
+            <a:avLst>
+              <a:gd name="adj" fmla="val 15000"/>
+            </a:avLst>
+          </a:prstGeom>
+          <a:solidFill>
+            <a:srgbClr val="FFFFFF"/>
+          </a:solidFill>
+          <a:ln>
+            <a:noFill/>
+          </a:ln>
+          <a:effectLst/>
+        </p:spPr>
+        <p:style>
+          <a:lnRef idx="1">
+            <a:schemeClr val="accent1"/>
+          </a:lnRef>
+          <a:fillRef idx="3">
+            <a:schemeClr val="accent1"/>
+          </a:fillRef>
+          <a:effectRef idx="2">
+            <a:schemeClr val="accent1"/>
+          </a:effectRef>
+          <a:fontRef idx="minor">
+            <a:schemeClr val="lt1"/>
+          </a:fontRef>
+        </p:style>
+        <p:txBody>
+          <a:bodyPr rtlCol="0" anchor="ctr"/>
+          <a:lstStyle/>
+          <a:p>
+            <a:pPr algn="ctr"/>
+          </a:p>
+        </p:txBody>
+      </p:sp>
+      <p:sp>
+        <p:nvSpPr>
+          <p:cNvPr id="27" name="Rectangle 26"/>
+          <p:cNvSpPr/>
+          <p:nvPr/>
+        </p:nvSpPr>
+        <p:spPr>
+          <a:xfrm>
+            <a:off x="457200" y="4096512"/>
+            <a:ext cx="109728" cy="640080"/>
+          </a:xfrm>
+          <a:prstGeom prst="rect">
+            <a:avLst/>
+          </a:prstGeom>
+          <a:solidFill>
+            <a:srgbClr val="00C2A8"/>
+          </a:solidFill>
+          <a:ln>
+            <a:noFill/>
+          </a:ln>
+          <a:effectLst/>
+        </p:spPr>
+        <p:style>
+          <a:lnRef idx="1">
+            <a:schemeClr val="accent1"/>
+          </a:lnRef>
+          <a:fillRef idx="3">
+            <a:schemeClr val="accent1"/>
+          </a:fillRef>
+          <a:effectRef idx="2">
+            <a:schemeClr val="accent1"/>
+          </a:effectRef>
+          <a:fontRef idx="minor">
+            <a:schemeClr val="lt1"/>
+          </a:fontRef>
+        </p:style>
+        <p:txBody>
+          <a:bodyPr rtlCol="0" anchor="ctr"/>
+          <a:lstStyle/>
+          <a:p>
+            <a:pPr algn="ctr"/>
+          </a:p>
+        </p:txBody>
+      </p:sp>
+      <p:sp>
+        <p:nvSpPr>
+          <p:cNvPr id="28" name="TextBox 27"/>
+          <p:cNvSpPr txBox="1"/>
+          <p:nvPr/>
+        </p:nvSpPr>
+        <p:spPr>
+          <a:xfrm>
+            <a:off x="685800" y="4169664"/>
+            <a:ext cx="548640" cy="502920"/>
+          </a:xfrm>
+          <a:prstGeom prst="rect">
+            <a:avLst/>
+          </a:prstGeom>
+          <a:noFill/>
+        </p:spPr>
+        <p:txBody>
+          <a:bodyPr wrap="square" lIns="45720" rIns="45720" tIns="18288" bIns="18288" anchor="ctr">
+            <a:spAutoFit/>
+          </a:bodyPr>
+          <a:lstStyle/>
+          <a:p>
+            <a:pPr algn="l"/>
+            <a:r>
+              <a:rPr sz="1800" b="1" i="0">
+                <a:solidFill>
+                  <a:srgbClr val="00C2A8"/>
+                </a:solidFill>
+                <a:latin typeface="Calibri"/>
+              </a:rPr>
+              <a:t>5</a:t>
+            </a:r>
+          </a:p>
+        </p:txBody>
+      </p:sp>
+      <p:sp>
+        <p:nvSpPr>
+          <p:cNvPr id="29" name="TextBox 28"/>
+          <p:cNvSpPr txBox="1"/>
+          <p:nvPr/>
+        </p:nvSpPr>
+        <p:spPr>
+          <a:xfrm>
+            <a:off x="1234440" y="4142232"/>
+            <a:ext cx="7772400" cy="292608"/>
+          </a:xfrm>
+          <a:prstGeom prst="rect">
+            <a:avLst/>
+          </a:prstGeom>
+          <a:noFill/>
+        </p:spPr>
+        <p:txBody>
+          <a:bodyPr wrap="square" lIns="45720" rIns="45720" tIns="18288" bIns="18288" anchor="ctr">
+            <a:spAutoFit/>
+          </a:bodyPr>
+          <a:lstStyle/>
+          <a:p>
+            <a:pPr algn="l"/>
+            <a:r>
+              <a:rPr sz="1200" b="1" i="0">
+                <a:solidFill>
+                  <a:srgbClr val="0B1E3F"/>
+                </a:solidFill>
+                <a:latin typeface="Calibri"/>
+              </a:rPr>
+              <a:t>Statista: Steuerhinterziehung in EU-Staaten / Steuerfahndung-Mehrsteuern</a:t>
+            </a:r>
+          </a:p>
+        </p:txBody>
+      </p:sp>
+      <p:sp>
+        <p:nvSpPr>
+          <p:cNvPr id="30" name="TextBox 29"/>
+          <p:cNvSpPr txBox="1"/>
+          <p:nvPr/>
+        </p:nvSpPr>
+        <p:spPr>
+          <a:xfrm>
+            <a:off x="1234440" y="4443984"/>
+            <a:ext cx="10058400" cy="274320"/>
+          </a:xfrm>
+          <a:prstGeom prst="rect">
+            <a:avLst/>
+          </a:prstGeom>
+          <a:noFill/>
+        </p:spPr>
+        <p:txBody>
+          <a:bodyPr wrap="square" lIns="45720" rIns="45720" tIns="18288" bIns="18288" anchor="ctr">
+            <a:spAutoFit/>
+          </a:bodyPr>
+          <a:lstStyle/>
+          <a:p>
+            <a:pPr algn="l"/>
+            <a:r>
+              <a:rPr sz="1000" b="0" i="0">
+                <a:solidFill>
+                  <a:srgbClr val="6E7A8C"/>
+                </a:solidFill>
+                <a:latin typeface="Calibri"/>
+              </a:rPr>
+              <a:t>statista.com</a:t>
+            </a:r>
+          </a:p>
+        </p:txBody>
+      </p:sp>
+      <p:sp>
+        <p:nvSpPr>
+          <p:cNvPr id="31" name="Rounded Rectangle 30"/>
+          <p:cNvSpPr/>
+          <p:nvPr/>
+        </p:nvSpPr>
+        <p:spPr>
+          <a:xfrm>
+            <a:off x="457200" y="4846320"/>
+            <a:ext cx="11247120" cy="640080"/>
+          </a:xfrm>
+          <a:prstGeom prst="roundRect">
+            <a:avLst>
+              <a:gd name="adj" fmla="val 15000"/>
+            </a:avLst>
+          </a:prstGeom>
+          <a:solidFill>
+            <a:srgbClr val="FFFFFF"/>
+          </a:solidFill>
+          <a:ln>
+            <a:noFill/>
+          </a:ln>
+          <a:effectLst/>
+        </p:spPr>
+        <p:style>
+          <a:lnRef idx="1">
+            <a:schemeClr val="accent1"/>
+          </a:lnRef>
+          <a:fillRef idx="3">
+            <a:schemeClr val="accent1"/>
+          </a:fillRef>
+          <a:effectRef idx="2">
+            <a:schemeClr val="accent1"/>
+          </a:effectRef>
+          <a:fontRef idx="minor">
+            <a:schemeClr val="lt1"/>
+          </a:fontRef>
+        </p:style>
+        <p:txBody>
+          <a:bodyPr rtlCol="0" anchor="ctr"/>
+          <a:lstStyle/>
+          <a:p>
+            <a:pPr algn="ctr"/>
+          </a:p>
+        </p:txBody>
+      </p:sp>
+      <p:sp>
+        <p:nvSpPr>
+          <p:cNvPr id="32" name="Rectangle 31"/>
+          <p:cNvSpPr/>
+          <p:nvPr/>
+        </p:nvSpPr>
+        <p:spPr>
+          <a:xfrm>
+            <a:off x="457200" y="4846320"/>
+            <a:ext cx="109728" cy="640080"/>
+          </a:xfrm>
+          <a:prstGeom prst="rect">
+            <a:avLst/>
+          </a:prstGeom>
+          <a:solidFill>
+            <a:srgbClr val="00C2A8"/>
+          </a:solidFill>
+          <a:ln>
+            <a:noFill/>
+          </a:ln>
+          <a:effectLst/>
+        </p:spPr>
+        <p:style>
+          <a:lnRef idx="1">
+            <a:schemeClr val="accent1"/>
+          </a:lnRef>
+          <a:fillRef idx="3">
+            <a:schemeClr val="accent1"/>
+          </a:fillRef>
+          <a:effectRef idx="2">
+            <a:schemeClr val="accent1"/>
+          </a:effectRef>
+          <a:fontRef idx="minor">
+            <a:schemeClr val="lt1"/>
+          </a:fontRef>
+        </p:style>
+        <p:txBody>
+          <a:bodyPr rtlCol="0" anchor="ctr"/>
+          <a:lstStyle/>
+          <a:p>
+            <a:pPr algn="ctr"/>
+          </a:p>
+        </p:txBody>
+      </p:sp>
+      <p:sp>
+        <p:nvSpPr>
+          <p:cNvPr id="33" name="TextBox 32"/>
+          <p:cNvSpPr txBox="1"/>
+          <p:nvPr/>
+        </p:nvSpPr>
+        <p:spPr>
+          <a:xfrm>
+            <a:off x="685800" y="4919472"/>
+            <a:ext cx="548640" cy="502920"/>
+          </a:xfrm>
+          <a:prstGeom prst="rect">
+            <a:avLst/>
+          </a:prstGeom>
+          <a:noFill/>
+        </p:spPr>
+        <p:txBody>
+          <a:bodyPr wrap="square" lIns="45720" rIns="45720" tIns="18288" bIns="18288" anchor="ctr">
+            <a:spAutoFit/>
+          </a:bodyPr>
+          <a:lstStyle/>
+          <a:p>
+            <a:pPr algn="l"/>
+            <a:r>
+              <a:rPr sz="1800" b="1" i="0">
+                <a:solidFill>
+                  <a:srgbClr val="00C2A8"/>
+                </a:solidFill>
+                <a:latin typeface="Calibri"/>
+              </a:rPr>
+              <a:t>6</a:t>
+            </a:r>
+          </a:p>
+        </p:txBody>
+      </p:sp>
+      <p:sp>
+        <p:nvSpPr>
+          <p:cNvPr id="34" name="TextBox 33"/>
+          <p:cNvSpPr txBox="1"/>
+          <p:nvPr/>
+        </p:nvSpPr>
+        <p:spPr>
+          <a:xfrm>
+            <a:off x="1234440" y="4892040"/>
+            <a:ext cx="7772400" cy="292608"/>
+          </a:xfrm>
+          <a:prstGeom prst="rect">
+            <a:avLst/>
+          </a:prstGeom>
+          <a:noFill/>
+        </p:spPr>
+        <p:txBody>
+          <a:bodyPr wrap="square" lIns="45720" rIns="45720" tIns="18288" bIns="18288" anchor="ctr">
+            <a:spAutoFit/>
+          </a:bodyPr>
+          <a:lstStyle/>
+          <a:p>
+            <a:pPr algn="l"/>
+            <a:r>
+              <a:rPr sz="1200" b="1" i="0">
+                <a:solidFill>
+                  <a:srgbClr val="0B1E3F"/>
+                </a:solidFill>
+                <a:latin typeface="Calibri"/>
+              </a:rPr>
+              <a:t>Prof. Dr. F. Schneider, JKU Linz – Schaden durch Sozial- und Abgabenbetrug</a:t>
+            </a:r>
+          </a:p>
+        </p:txBody>
+      </p:sp>
+      <p:sp>
+        <p:nvSpPr>
+          <p:cNvPr id="35" name="TextBox 34"/>
+          <p:cNvSpPr txBox="1"/>
+          <p:nvPr/>
+        </p:nvSpPr>
+        <p:spPr>
+          <a:xfrm>
+            <a:off x="1234440" y="5193792"/>
+            <a:ext cx="10058400" cy="274320"/>
+          </a:xfrm>
+          <a:prstGeom prst="rect">
+            <a:avLst/>
+          </a:prstGeom>
+          <a:noFill/>
+        </p:spPr>
+        <p:txBody>
+          <a:bodyPr wrap="square" lIns="45720" rIns="45720" tIns="18288" bIns="18288" anchor="ctr">
+            <a:spAutoFit/>
+          </a:bodyPr>
+          <a:lstStyle/>
+          <a:p>
+            <a:pPr algn="l"/>
+            <a:r>
+              <a:rPr sz="1000" b="0" i="0">
+                <a:solidFill>
+                  <a:srgbClr val="6E7A8C"/>
+                </a:solidFill>
+                <a:latin typeface="Calibri"/>
+              </a:rPr>
+              <a:t>ZDF heute, 2023</a:t>
+            </a:r>
+          </a:p>
+        </p:txBody>
+      </p:sp>
+      <p:sp>
+        <p:nvSpPr>
+          <p:cNvPr id="36" name="Rounded Rectangle 35"/>
+          <p:cNvSpPr/>
+          <p:nvPr/>
+        </p:nvSpPr>
+        <p:spPr>
+          <a:xfrm>
+            <a:off x="457200" y="5596128"/>
+            <a:ext cx="11247120" cy="640080"/>
+          </a:xfrm>
+          <a:prstGeom prst="roundRect">
+            <a:avLst>
+              <a:gd name="adj" fmla="val 15000"/>
+            </a:avLst>
+          </a:prstGeom>
+          <a:solidFill>
+            <a:srgbClr val="FFFFFF"/>
+          </a:solidFill>
+          <a:ln>
+            <a:noFill/>
+          </a:ln>
+          <a:effectLst/>
+        </p:spPr>
+        <p:style>
+          <a:lnRef idx="1">
+            <a:schemeClr val="accent1"/>
+          </a:lnRef>
+          <a:fillRef idx="3">
+            <a:schemeClr val="accent1"/>
+          </a:fillRef>
+          <a:effectRef idx="2">
+            <a:schemeClr val="accent1"/>
+          </a:effectRef>
+          <a:fontRef idx="minor">
+            <a:schemeClr val="lt1"/>
+          </a:fontRef>
+        </p:style>
+        <p:txBody>
+          <a:bodyPr rtlCol="0" anchor="ctr"/>
+          <a:lstStyle/>
+          <a:p>
+            <a:pPr algn="ctr"/>
+          </a:p>
+        </p:txBody>
+      </p:sp>
+      <p:sp>
+        <p:nvSpPr>
+          <p:cNvPr id="37" name="Rectangle 36"/>
+          <p:cNvSpPr/>
+          <p:nvPr/>
+        </p:nvSpPr>
+        <p:spPr>
+          <a:xfrm>
+            <a:off x="457200" y="5596128"/>
+            <a:ext cx="109728" cy="640080"/>
+          </a:xfrm>
+          <a:prstGeom prst="rect">
+            <a:avLst/>
+          </a:prstGeom>
+          <a:solidFill>
+            <a:srgbClr val="00C2A8"/>
+          </a:solidFill>
+          <a:ln>
+            <a:noFill/>
+          </a:ln>
+          <a:effectLst/>
+        </p:spPr>
+        <p:style>
+          <a:lnRef idx="1">
+            <a:schemeClr val="accent1"/>
+          </a:lnRef>
+          <a:fillRef idx="3">
+            <a:schemeClr val="accent1"/>
+          </a:fillRef>
+          <a:effectRef idx="2">
+            <a:schemeClr val="accent1"/>
+          </a:effectRef>
+          <a:fontRef idx="minor">
+            <a:schemeClr val="lt1"/>
+          </a:fontRef>
+        </p:style>
+        <p:txBody>
+          <a:bodyPr rtlCol="0" anchor="ctr"/>
+          <a:lstStyle/>
+          <a:p>
+            <a:pPr algn="ctr"/>
+          </a:p>
+        </p:txBody>
+      </p:sp>
+      <p:sp>
+        <p:nvSpPr>
+          <p:cNvPr id="38" name="TextBox 37"/>
+          <p:cNvSpPr txBox="1"/>
+          <p:nvPr/>
+        </p:nvSpPr>
+        <p:spPr>
+          <a:xfrm>
+            <a:off x="685800" y="5669280"/>
+            <a:ext cx="548640" cy="502920"/>
+          </a:xfrm>
+          <a:prstGeom prst="rect">
+            <a:avLst/>
+          </a:prstGeom>
+          <a:noFill/>
+        </p:spPr>
+        <p:txBody>
+          <a:bodyPr wrap="square" lIns="45720" rIns="45720" tIns="18288" bIns="18288" anchor="ctr">
+            <a:spAutoFit/>
+          </a:bodyPr>
+          <a:lstStyle/>
+          <a:p>
+            <a:pPr algn="l"/>
+            <a:r>
+              <a:rPr sz="1800" b="1" i="0">
+                <a:solidFill>
+                  <a:srgbClr val="00C2A8"/>
+                </a:solidFill>
+                <a:latin typeface="Calibri"/>
+              </a:rPr>
+              <a:t>7</a:t>
+            </a:r>
+          </a:p>
+        </p:txBody>
+      </p:sp>
+      <p:sp>
+        <p:nvSpPr>
+          <p:cNvPr id="39" name="TextBox 38"/>
+          <p:cNvSpPr txBox="1"/>
+          <p:nvPr/>
+        </p:nvSpPr>
+        <p:spPr>
+          <a:xfrm>
+            <a:off x="1234440" y="5641848"/>
+            <a:ext cx="7772400" cy="292608"/>
+          </a:xfrm>
+          <a:prstGeom prst="rect">
+            <a:avLst/>
+          </a:prstGeom>
+          <a:noFill/>
+        </p:spPr>
+        <p:txBody>
+          <a:bodyPr wrap="square" lIns="45720" rIns="45720" tIns="18288" bIns="18288" anchor="ctr">
+            <a:spAutoFit/>
+          </a:bodyPr>
+          <a:lstStyle/>
+          <a:p>
+            <a:pPr algn="l"/>
+            <a:r>
+              <a:rPr sz="1200" b="1" i="0">
+                <a:solidFill>
+                  <a:srgbClr val="0B1E3F"/>
+                </a:solidFill>
+                <a:latin typeface="Calibri"/>
+              </a:rPr>
+              <a:t>DIW Berlin Wochenbericht 22/2025 – Auslandsvermögen &amp; CRS</a:t>
+            </a:r>
+          </a:p>
+        </p:txBody>
+      </p:sp>
+      <p:sp>
+        <p:nvSpPr>
+          <p:cNvPr id="40" name="TextBox 39"/>
+          <p:cNvSpPr txBox="1"/>
+          <p:nvPr/>
+        </p:nvSpPr>
+        <p:spPr>
+          <a:xfrm>
+            <a:off x="1234440" y="5943600"/>
+            <a:ext cx="10058400" cy="274320"/>
+          </a:xfrm>
+          <a:prstGeom prst="rect">
+            <a:avLst/>
+          </a:prstGeom>
+          <a:noFill/>
+        </p:spPr>
+        <p:txBody>
+          <a:bodyPr wrap="square" lIns="45720" rIns="45720" tIns="18288" bIns="18288" anchor="ctr">
+            <a:spAutoFit/>
+          </a:bodyPr>
+          <a:lstStyle/>
+          <a:p>
+            <a:pPr algn="l"/>
+            <a:r>
+              <a:rPr sz="1000" b="0" i="0">
+                <a:solidFill>
+                  <a:srgbClr val="6E7A8C"/>
+                </a:solidFill>
+                <a:latin typeface="Calibri"/>
+              </a:rPr>
+              <a:t>diw.de</a:t>
+            </a:r>
+          </a:p>
+        </p:txBody>
+      </p:sp>
+      <p:sp>
+        <p:nvSpPr>
+          <p:cNvPr id="41" name="Rectangle 40"/>
+          <p:cNvSpPr/>
+          <p:nvPr/>
+        </p:nvSpPr>
+        <p:spPr>
+          <a:xfrm>
+            <a:off x="0" y="6537960"/>
+            <a:ext cx="12191695" cy="320040"/>
+          </a:xfrm>
+          <a:prstGeom prst="rect">
+            <a:avLst/>
+          </a:prstGeom>
+          <a:solidFill>
+            <a:srgbClr val="07142E"/>
+          </a:solidFill>
+          <a:ln>
+            <a:noFill/>
+          </a:ln>
+          <a:effectLst/>
+        </p:spPr>
+        <p:style>
+          <a:lnRef idx="1">
+            <a:schemeClr val="accent1"/>
+          </a:lnRef>
+          <a:fillRef idx="3">
+            <a:schemeClr val="accent1"/>
+          </a:fillRef>
+          <a:effectRef idx="2">
+            <a:schemeClr val="accent1"/>
+          </a:effectRef>
+          <a:fontRef idx="minor">
+            <a:schemeClr val="lt1"/>
+          </a:fontRef>
+        </p:style>
+        <p:txBody>
+          <a:bodyPr rtlCol="0" anchor="ctr"/>
+          <a:lstStyle/>
+          <a:p>
+            <a:pPr algn="ctr"/>
+          </a:p>
+        </p:txBody>
+      </p:sp>
+      <p:sp>
+        <p:nvSpPr>
+          <p:cNvPr id="42" name="TextBox 41"/>
+          <p:cNvSpPr txBox="1"/>
+          <p:nvPr/>
+        </p:nvSpPr>
+        <p:spPr>
+          <a:xfrm>
+            <a:off x="365760" y="6556248"/>
+            <a:ext cx="7315200" cy="274320"/>
+          </a:xfrm>
+          <a:prstGeom prst="rect">
+            <a:avLst/>
+          </a:prstGeom>
+          <a:noFill/>
+        </p:spPr>
+        <p:txBody>
+          <a:bodyPr wrap="square" lIns="45720" rIns="45720" tIns="18288" bIns="18288" anchor="ctr">
+            <a:spAutoFit/>
+          </a:bodyPr>
+          <a:lstStyle/>
+          <a:p>
+            <a:pPr algn="l"/>
+            <a:r>
+              <a:rPr sz="1000" b="0" i="0">
+                <a:solidFill>
+                  <a:srgbClr val="B8C2D6"/>
+                </a:solidFill>
+                <a:latin typeface="Calibri"/>
+              </a:rPr>
+              <a:t>KI-Technik &amp; Steuerhinterziehung  •  Bastian &amp; Ibrahim</a:t>
+            </a:r>
+          </a:p>
+        </p:txBody>
+      </p:sp>
+      <p:sp>
+        <p:nvSpPr>
+          <p:cNvPr id="43" name="TextBox 42"/>
+          <p:cNvSpPr txBox="1"/>
+          <p:nvPr/>
+        </p:nvSpPr>
+        <p:spPr>
+          <a:xfrm>
+            <a:off x="11094415" y="6556248"/>
+            <a:ext cx="731520" cy="274320"/>
+          </a:xfrm>
+          <a:prstGeom prst="rect">
+            <a:avLst/>
+          </a:prstGeom>
+          <a:noFill/>
+        </p:spPr>
+        <p:txBody>
+          <a:bodyPr wrap="square" lIns="45720" rIns="45720" tIns="18288" bIns="18288" anchor="ctr">
+            <a:spAutoFit/>
+          </a:bodyPr>
+          <a:lstStyle/>
+          <a:p>
+            <a:pPr algn="r"/>
+            <a:r>
+              <a:rPr sz="1000" b="0" i="0">
+                <a:solidFill>
+                  <a:srgbClr val="00C2A8"/>
+                </a:solidFill>
+                <a:latin typeface="Calibri"/>
+              </a:rPr>
+              <a:t>20</a:t>
             </a:r>
           </a:p>
         </p:txBody>
@@ -11389,7 +14446,7 @@
           <a:p>
             <a:pPr algn="l"/>
             <a:r>
-              <a:rPr sz="2600" b="1">
+              <a:rPr sz="2600" b="1" i="0">
                 <a:solidFill>
                   <a:srgbClr val="FFFFFF"/>
                 </a:solidFill>
@@ -11424,7 +14481,7 @@
           <a:p>
             <a:pPr algn="r"/>
             <a:r>
-              <a:rPr sz="1200" b="0">
+              <a:rPr sz="1200" b="0" i="0">
                 <a:solidFill>
                   <a:srgbClr val="00C2A8"/>
                 </a:solidFill>
@@ -11558,7 +14615,7 @@
           <a:p>
             <a:pPr algn="l"/>
             <a:r>
-              <a:rPr sz="1400" b="0">
+              <a:rPr sz="1400" b="0" i="0">
                 <a:solidFill>
                   <a:srgbClr val="FFFFFF"/>
                 </a:solidFill>
@@ -11692,7 +14749,7 @@
           <a:p>
             <a:pPr algn="l"/>
             <a:r>
-              <a:rPr sz="1400" b="0">
+              <a:rPr sz="1400" b="0" i="0">
                 <a:solidFill>
                   <a:srgbClr val="FFFFFF"/>
                 </a:solidFill>
@@ -11826,7 +14883,7 @@
           <a:p>
             <a:pPr algn="l"/>
             <a:r>
-              <a:rPr sz="1400" b="0">
+              <a:rPr sz="1400" b="0" i="0">
                 <a:solidFill>
                   <a:srgbClr val="FFFFFF"/>
                 </a:solidFill>
@@ -11960,7 +15017,7 @@
           <a:p>
             <a:pPr algn="l"/>
             <a:r>
-              <a:rPr sz="1400" b="0">
+              <a:rPr sz="1400" b="0" i="0">
                 <a:solidFill>
                   <a:srgbClr val="FFFFFF"/>
                 </a:solidFill>
@@ -12087,7 +15144,7 @@
           <a:p>
             <a:pPr algn="l"/>
             <a:r>
-              <a:rPr sz="1000" b="0">
+              <a:rPr sz="1000" b="0" i="0">
                 <a:solidFill>
                   <a:srgbClr val="B8C2D6"/>
                 </a:solidFill>
@@ -12122,7 +15179,7 @@
           <a:p>
             <a:pPr algn="r"/>
             <a:r>
-              <a:rPr sz="1000" b="0">
+              <a:rPr sz="1000" b="0" i="0">
                 <a:solidFill>
                   <a:srgbClr val="00C2A8"/>
                 </a:solidFill>
@@ -12271,7 +15328,7 @@
           <a:p>
             <a:pPr algn="l"/>
             <a:r>
-              <a:rPr sz="2600" b="1">
+              <a:rPr sz="2600" b="1" i="0">
                 <a:solidFill>
                   <a:srgbClr val="FFFFFF"/>
                 </a:solidFill>
@@ -12306,7 +15363,7 @@
           <a:p>
             <a:pPr algn="r"/>
             <a:r>
-              <a:rPr sz="1200" b="0">
+              <a:rPr sz="1200" b="0" i="0">
                 <a:solidFill>
                   <a:srgbClr val="00C2A8"/>
                 </a:solidFill>
@@ -12440,7 +15497,7 @@
           <a:p>
             <a:pPr algn="l"/>
             <a:r>
-              <a:rPr sz="1300" b="0">
+              <a:rPr sz="1300" b="0" i="0">
                 <a:solidFill>
                   <a:srgbClr val="FFFFFF"/>
                 </a:solidFill>
@@ -12574,7 +15631,7 @@
           <a:p>
             <a:pPr algn="l"/>
             <a:r>
-              <a:rPr sz="1300" b="0">
+              <a:rPr sz="1300" b="0" i="0">
                 <a:solidFill>
                   <a:srgbClr val="FFFFFF"/>
                 </a:solidFill>
@@ -12708,7 +15765,7 @@
           <a:p>
             <a:pPr algn="l"/>
             <a:r>
-              <a:rPr sz="1300" b="0">
+              <a:rPr sz="1300" b="0" i="0">
                 <a:solidFill>
                   <a:srgbClr val="FFFFFF"/>
                 </a:solidFill>
@@ -12842,7 +15899,7 @@
           <a:p>
             <a:pPr algn="l"/>
             <a:r>
-              <a:rPr sz="1300" b="0">
+              <a:rPr sz="1300" b="0" i="0">
                 <a:solidFill>
                   <a:srgbClr val="FFFFFF"/>
                 </a:solidFill>
@@ -12901,7 +15958,7 @@
           <a:p>
             <a:pPr algn="ctr"/>
             <a:r>
-              <a:rPr sz="1200" b="1">
+              <a:rPr sz="1200" b="1" i="0">
                 <a:solidFill>
                   <a:srgbClr val="1B263A"/>
                 </a:solidFill>
@@ -12980,7 +16037,7 @@
           <a:p>
             <a:pPr algn="l"/>
             <a:r>
-              <a:rPr sz="1000" b="0">
+              <a:rPr sz="1000" b="0" i="0">
                 <a:solidFill>
                   <a:srgbClr val="B8C2D6"/>
                 </a:solidFill>
@@ -13015,7 +16072,7 @@
           <a:p>
             <a:pPr algn="r"/>
             <a:r>
-              <a:rPr sz="1000" b="0">
+              <a:rPr sz="1000" b="0" i="0">
                 <a:solidFill>
                   <a:srgbClr val="00C2A8"/>
                 </a:solidFill>
@@ -13164,7 +16221,7 @@
           <a:p>
             <a:pPr algn="l"/>
             <a:r>
-              <a:rPr sz="2600" b="1">
+              <a:rPr sz="2600" b="1" i="0">
                 <a:solidFill>
                   <a:srgbClr val="FFFFFF"/>
                 </a:solidFill>
@@ -13199,7 +16256,7 @@
           <a:p>
             <a:pPr algn="r"/>
             <a:r>
-              <a:rPr sz="1200" b="0">
+              <a:rPr sz="1200" b="0" i="0">
                 <a:solidFill>
                   <a:srgbClr val="00C2A8"/>
                 </a:solidFill>
@@ -13333,7 +16390,7 @@
           <a:p>
             <a:pPr algn="l"/>
             <a:r>
-              <a:rPr sz="1400" b="0">
+              <a:rPr sz="1400" b="0" i="0">
                 <a:solidFill>
                   <a:srgbClr val="FFFFFF"/>
                 </a:solidFill>
@@ -13467,7 +16524,7 @@
           <a:p>
             <a:pPr algn="l"/>
             <a:r>
-              <a:rPr sz="1400" b="0">
+              <a:rPr sz="1400" b="0" i="0">
                 <a:solidFill>
                   <a:srgbClr val="FFFFFF"/>
                 </a:solidFill>
@@ -13601,7 +16658,7 @@
           <a:p>
             <a:pPr algn="l"/>
             <a:r>
-              <a:rPr sz="1400" b="0">
+              <a:rPr sz="1400" b="0" i="0">
                 <a:solidFill>
                   <a:srgbClr val="FFFFFF"/>
                 </a:solidFill>
@@ -13735,7 +16792,7 @@
           <a:p>
             <a:pPr algn="l"/>
             <a:r>
-              <a:rPr sz="1400" b="0">
+              <a:rPr sz="1400" b="0" i="0">
                 <a:solidFill>
                   <a:srgbClr val="FFFFFF"/>
                 </a:solidFill>
@@ -13794,7 +16851,7 @@
           <a:p>
             <a:pPr algn="ctr"/>
             <a:r>
-              <a:rPr sz="1200" b="1">
+              <a:rPr sz="1200" b="1" i="0">
                 <a:solidFill>
                   <a:srgbClr val="1B263A"/>
                 </a:solidFill>
@@ -13873,7 +16930,7 @@
           <a:p>
             <a:pPr algn="l"/>
             <a:r>
-              <a:rPr sz="1000" b="0">
+              <a:rPr sz="1000" b="0" i="0">
                 <a:solidFill>
                   <a:srgbClr val="B8C2D6"/>
                 </a:solidFill>
@@ -13908,7 +16965,7 @@
           <a:p>
             <a:pPr algn="r"/>
             <a:r>
-              <a:rPr sz="1000" b="0">
+              <a:rPr sz="1000" b="0" i="0">
                 <a:solidFill>
                   <a:srgbClr val="00C2A8"/>
                 </a:solidFill>
@@ -14057,7 +17114,7 @@
           <a:p>
             <a:pPr algn="l"/>
             <a:r>
-              <a:rPr sz="2600" b="1">
+              <a:rPr sz="2600" b="1" i="0">
                 <a:solidFill>
                   <a:srgbClr val="FFFFFF"/>
                 </a:solidFill>
@@ -14092,7 +17149,7 @@
           <a:p>
             <a:pPr algn="r"/>
             <a:r>
-              <a:rPr sz="1200" b="0">
+              <a:rPr sz="1200" b="0" i="0">
                 <a:solidFill>
                   <a:srgbClr val="00C2A8"/>
                 </a:solidFill>
@@ -14226,7 +17283,7 @@
           <a:p>
             <a:pPr algn="l"/>
             <a:r>
-              <a:rPr sz="1300" b="0">
+              <a:rPr sz="1300" b="0" i="0">
                 <a:solidFill>
                   <a:srgbClr val="FFFFFF"/>
                 </a:solidFill>
@@ -14360,7 +17417,7 @@
           <a:p>
             <a:pPr algn="l"/>
             <a:r>
-              <a:rPr sz="1300" b="0">
+              <a:rPr sz="1300" b="0" i="0">
                 <a:solidFill>
                   <a:srgbClr val="FFFFFF"/>
                 </a:solidFill>
@@ -14494,7 +17551,7 @@
           <a:p>
             <a:pPr algn="l"/>
             <a:r>
-              <a:rPr sz="1300" b="0">
+              <a:rPr sz="1300" b="0" i="0">
                 <a:solidFill>
                   <a:srgbClr val="FFFFFF"/>
                 </a:solidFill>
@@ -14628,7 +17685,7 @@
           <a:p>
             <a:pPr algn="l"/>
             <a:r>
-              <a:rPr sz="1300" b="0">
+              <a:rPr sz="1300" b="0" i="0">
                 <a:solidFill>
                   <a:srgbClr val="FFFFFF"/>
                 </a:solidFill>
@@ -14687,7 +17744,7 @@
           <a:p>
             <a:pPr algn="ctr"/>
             <a:r>
-              <a:rPr sz="1200" b="1">
+              <a:rPr sz="1200" b="1" i="0">
                 <a:solidFill>
                   <a:srgbClr val="1B263A"/>
                 </a:solidFill>
@@ -14766,7 +17823,7 @@
           <a:p>
             <a:pPr algn="l"/>
             <a:r>
-              <a:rPr sz="1000" b="0">
+              <a:rPr sz="1000" b="0" i="0">
                 <a:solidFill>
                   <a:srgbClr val="B8C2D6"/>
                 </a:solidFill>
@@ -14801,7 +17858,7 @@
           <a:p>
             <a:pPr algn="r"/>
             <a:r>
-              <a:rPr sz="1000" b="0">
+              <a:rPr sz="1000" b="0" i="0">
                 <a:solidFill>
                   <a:srgbClr val="00C2A8"/>
                 </a:solidFill>
@@ -14950,7 +18007,7 @@
           <a:p>
             <a:pPr algn="l"/>
             <a:r>
-              <a:rPr sz="2600" b="1">
+              <a:rPr sz="2600" b="1" i="0">
                 <a:solidFill>
                   <a:srgbClr val="FFFFFF"/>
                 </a:solidFill>
@@ -14985,7 +18042,7 @@
           <a:p>
             <a:pPr algn="r"/>
             <a:r>
-              <a:rPr sz="1200" b="0">
+              <a:rPr sz="1200" b="0" i="0">
                 <a:solidFill>
                   <a:srgbClr val="00C2A8"/>
                 </a:solidFill>
@@ -15020,7 +18077,7 @@
           <a:p>
             <a:pPr algn="l"/>
             <a:r>
-              <a:rPr sz="2200" b="1">
+              <a:rPr sz="2200" b="1" i="0">
                 <a:solidFill>
                   <a:srgbClr val="0B1E3F"/>
                 </a:solidFill>
@@ -15055,7 +18112,7 @@
           <a:p>
             <a:pPr algn="l"/>
             <a:r>
-              <a:rPr sz="1500" b="0">
+              <a:rPr sz="1500" b="0" i="0">
                 <a:solidFill>
                   <a:srgbClr val="6E7A8C"/>
                 </a:solidFill>
@@ -15180,7 +18237,7 @@
           <a:p>
             <a:pPr algn="ctr"/>
             <a:r>
-              <a:rPr sz="2600" b="1">
+              <a:rPr sz="2600" b="1" i="0">
                 <a:solidFill>
                   <a:srgbClr val="00C2A8"/>
                 </a:solidFill>
@@ -15215,7 +18272,7 @@
           <a:p>
             <a:pPr algn="ctr"/>
             <a:r>
-              <a:rPr sz="1300" b="0">
+              <a:rPr sz="1300" b="0" i="0">
                 <a:solidFill>
                   <a:srgbClr val="FFFFFF"/>
                 </a:solidFill>
@@ -15250,7 +18307,7 @@
           <a:p>
             <a:pPr algn="ctr"/>
             <a:r>
-              <a:rPr sz="900" b="0">
+              <a:rPr sz="900" b="0" i="0">
                 <a:solidFill>
                   <a:srgbClr val="B8C2D6"/>
                 </a:solidFill>
@@ -15375,7 +18432,7 @@
           <a:p>
             <a:pPr algn="ctr"/>
             <a:r>
-              <a:rPr sz="2600" b="1">
+              <a:rPr sz="2600" b="1" i="0">
                 <a:solidFill>
                   <a:srgbClr val="00C2A8"/>
                 </a:solidFill>
@@ -15410,7 +18467,7 @@
           <a:p>
             <a:pPr algn="ctr"/>
             <a:r>
-              <a:rPr sz="1300" b="0">
+              <a:rPr sz="1300" b="0" i="0">
                 <a:solidFill>
                   <a:srgbClr val="FFFFFF"/>
                 </a:solidFill>
@@ -15445,7 +18502,7 @@
           <a:p>
             <a:pPr algn="ctr"/>
             <a:r>
-              <a:rPr sz="900" b="0">
+              <a:rPr sz="900" b="0" i="0">
                 <a:solidFill>
                   <a:srgbClr val="B8C2D6"/>
                 </a:solidFill>
@@ -15570,7 +18627,7 @@
           <a:p>
             <a:pPr algn="ctr"/>
             <a:r>
-              <a:rPr sz="2600" b="1">
+              <a:rPr sz="2600" b="1" i="0">
                 <a:solidFill>
                   <a:srgbClr val="00C2A8"/>
                 </a:solidFill>
@@ -15605,7 +18662,7 @@
           <a:p>
             <a:pPr algn="ctr"/>
             <a:r>
-              <a:rPr sz="1300" b="0">
+              <a:rPr sz="1300" b="0" i="0">
                 <a:solidFill>
                   <a:srgbClr val="FFFFFF"/>
                 </a:solidFill>
@@ -15640,7 +18697,7 @@
           <a:p>
             <a:pPr algn="ctr"/>
             <a:r>
-              <a:rPr sz="900" b="0">
+              <a:rPr sz="900" b="0" i="0">
                 <a:solidFill>
                   <a:srgbClr val="B8C2D6"/>
                 </a:solidFill>
@@ -15765,7 +18822,7 @@
           <a:p>
             <a:pPr algn="ctr"/>
             <a:r>
-              <a:rPr sz="2600" b="1">
+              <a:rPr sz="2600" b="1" i="0">
                 <a:solidFill>
                   <a:srgbClr val="00C2A8"/>
                 </a:solidFill>
@@ -15800,7 +18857,7 @@
           <a:p>
             <a:pPr algn="ctr"/>
             <a:r>
-              <a:rPr sz="1300" b="0">
+              <a:rPr sz="1300" b="0" i="0">
                 <a:solidFill>
                   <a:srgbClr val="FFFFFF"/>
                 </a:solidFill>
@@ -15835,7 +18892,7 @@
           <a:p>
             <a:pPr algn="ctr"/>
             <a:r>
-              <a:rPr sz="900" b="0">
+              <a:rPr sz="900" b="0" i="0">
                 <a:solidFill>
                   <a:srgbClr val="B8C2D6"/>
                 </a:solidFill>
@@ -15914,7 +18971,7 @@
           <a:p>
             <a:pPr algn="l"/>
             <a:r>
-              <a:rPr sz="1000" b="0">
+              <a:rPr sz="1000" b="0" i="0">
                 <a:solidFill>
                   <a:srgbClr val="B8C2D6"/>
                 </a:solidFill>
@@ -15949,7 +19006,7 @@
           <a:p>
             <a:pPr algn="r"/>
             <a:r>
-              <a:rPr sz="1000" b="0">
+              <a:rPr sz="1000" b="0" i="0">
                 <a:solidFill>
                   <a:srgbClr val="00C2A8"/>
                 </a:solidFill>
@@ -16098,7 +19155,7 @@
           <a:p>
             <a:pPr algn="l"/>
             <a:r>
-              <a:rPr sz="2600" b="1">
+              <a:rPr sz="2600" b="1" i="0">
                 <a:solidFill>
                   <a:srgbClr val="FFFFFF"/>
                 </a:solidFill>
@@ -16133,7 +19190,7 @@
           <a:p>
             <a:pPr algn="r"/>
             <a:r>
-              <a:rPr sz="1200" b="0">
+              <a:rPr sz="1200" b="0" i="0">
                 <a:solidFill>
                   <a:srgbClr val="00C2A8"/>
                 </a:solidFill>
@@ -16170,52 +19227,19 @@
       </p:pic>
       <p:sp>
         <p:nvSpPr>
-          <p:cNvPr id="7" name="TextBox 6"/>
-          <p:cNvSpPr txBox="1"/>
-          <p:nvPr/>
-        </p:nvSpPr>
-        <p:spPr>
-          <a:xfrm>
-            <a:off x="7132320" y="1280160"/>
-            <a:ext cx="4572000" cy="457200"/>
-          </a:xfrm>
-          <a:prstGeom prst="rect">
-            <a:avLst/>
-          </a:prstGeom>
-          <a:noFill/>
-        </p:spPr>
-        <p:txBody>
-          <a:bodyPr wrap="square" lIns="45720" rIns="45720" tIns="18288" bIns="18288" anchor="t">
-            <a:spAutoFit/>
-          </a:bodyPr>
-          <a:lstStyle/>
-          <a:p>
-            <a:pPr algn="l"/>
-            <a:r>
-              <a:rPr sz="2000" b="1">
-                <a:solidFill>
-                  <a:srgbClr val="0B1E3F"/>
-                </a:solidFill>
-                <a:latin typeface="Calibri"/>
-              </a:rPr>
-              <a:t>Kernaussagen</a:t>
-            </a:r>
-          </a:p>
-        </p:txBody>
-      </p:sp>
-      <p:sp>
-        <p:nvSpPr>
-          <p:cNvPr id="8" name="Rectangle 7"/>
+          <p:cNvPr id="7" name="Rounded Rectangle 6"/>
           <p:cNvSpPr/>
           <p:nvPr/>
         </p:nvSpPr>
         <p:spPr>
           <a:xfrm>
-            <a:off x="7132320" y="1783080"/>
-            <a:ext cx="1097280" cy="45720"/>
-          </a:xfrm>
-          <a:prstGeom prst="rect">
-            <a:avLst/>
+            <a:off x="7132320" y="1463040"/>
+            <a:ext cx="4389120" cy="502920"/>
+          </a:xfrm>
+          <a:prstGeom prst="roundRect">
+            <a:avLst>
+              <a:gd name="adj" fmla="val 50000"/>
+            </a:avLst>
           </a:prstGeom>
           <a:solidFill>
             <a:srgbClr val="00C2A8"/>
@@ -16240,22 +19264,31 @@
           </a:fontRef>
         </p:style>
         <p:txBody>
-          <a:bodyPr rtlCol="0" anchor="ctr"/>
-          <a:lstStyle/>
-          <a:p>
-            <a:pPr algn="ctr"/>
-          </a:p>
-        </p:txBody>
-      </p:sp>
-      <p:sp>
-        <p:nvSpPr>
-          <p:cNvPr id="9" name="Rounded Rectangle 8"/>
+          <a:bodyPr rtlCol="0" anchor="ctr" tIns="18288" bIns="18288"/>
+          <a:lstStyle/>
+          <a:p>
+            <a:pPr algn="ctr"/>
+            <a:r>
+              <a:rPr sz="1400" b="1">
+                <a:solidFill>
+                  <a:srgbClr val="0B1E3F"/>
+                </a:solidFill>
+                <a:latin typeface="Calibri"/>
+              </a:rPr>
+              <a:t>823,5 Mrd. € Gesamtschaden EU-weit</a:t>
+            </a:r>
+          </a:p>
+        </p:txBody>
+      </p:sp>
+      <p:sp>
+        <p:nvSpPr>
+          <p:cNvPr id="8" name="Rounded Rectangle 7"/>
           <p:cNvSpPr/>
           <p:nvPr/>
         </p:nvSpPr>
         <p:spPr>
           <a:xfrm>
-            <a:off x="7132320" y="2103120"/>
+            <a:off x="7132320" y="2148840"/>
             <a:ext cx="4389120" cy="502920"/>
           </a:xfrm>
           <a:prstGeom prst="roundRect">
@@ -16297,20 +19330,20 @@
                 </a:solidFill>
                 <a:latin typeface="Calibri"/>
               </a:rPr>
-              <a:t>823,5 Mrd. € Gesamtschaden EU-weit</a:t>
-            </a:r>
-          </a:p>
-        </p:txBody>
-      </p:sp>
-      <p:sp>
-        <p:nvSpPr>
-          <p:cNvPr id="10" name="Rounded Rectangle 9"/>
+              <a:t>Italien an der Spitze (190,9 Mrd. €)</a:t>
+            </a:r>
+          </a:p>
+        </p:txBody>
+      </p:sp>
+      <p:sp>
+        <p:nvSpPr>
+          <p:cNvPr id="9" name="Rounded Rectangle 8"/>
           <p:cNvSpPr/>
           <p:nvPr/>
         </p:nvSpPr>
         <p:spPr>
           <a:xfrm>
-            <a:off x="7132320" y="2788920"/>
+            <a:off x="7132320" y="2834640"/>
             <a:ext cx="4389120" cy="502920"/>
           </a:xfrm>
           <a:prstGeom prst="roundRect">
@@ -16352,20 +19385,20 @@
                 </a:solidFill>
                 <a:latin typeface="Calibri"/>
               </a:rPr>
-              <a:t>Italien an der Spitze (190,9 Mrd. €)</a:t>
-            </a:r>
-          </a:p>
-        </p:txBody>
-      </p:sp>
-      <p:sp>
-        <p:nvSpPr>
-          <p:cNvPr id="11" name="Rounded Rectangle 10"/>
+              <a:t>Deutschland Platz 2 (125,1 Mrd. €)</a:t>
+            </a:r>
+          </a:p>
+        </p:txBody>
+      </p:sp>
+      <p:sp>
+        <p:nvSpPr>
+          <p:cNvPr id="10" name="Rounded Rectangle 9"/>
           <p:cNvSpPr/>
           <p:nvPr/>
         </p:nvSpPr>
         <p:spPr>
           <a:xfrm>
-            <a:off x="7132320" y="3474720"/>
+            <a:off x="7132320" y="3520440"/>
             <a:ext cx="4389120" cy="502920"/>
           </a:xfrm>
           <a:prstGeom prst="roundRect">
@@ -16407,29 +19440,27 @@
                 </a:solidFill>
                 <a:latin typeface="Calibri"/>
               </a:rPr>
-              <a:t>Deutschland Platz 2 (125,1 Mrd. €)</a:t>
-            </a:r>
-          </a:p>
-        </p:txBody>
-      </p:sp>
-      <p:sp>
-        <p:nvSpPr>
-          <p:cNvPr id="12" name="Rounded Rectangle 11"/>
+              <a:t>Quelle: Univ. London / S&amp;D-Fraktion (Statista)</a:t>
+            </a:r>
+          </a:p>
+        </p:txBody>
+      </p:sp>
+      <p:sp>
+        <p:nvSpPr>
+          <p:cNvPr id="11" name="Rectangle 10"/>
           <p:cNvSpPr/>
           <p:nvPr/>
         </p:nvSpPr>
         <p:spPr>
           <a:xfrm>
-            <a:off x="7132320" y="4160520"/>
-            <a:ext cx="4389120" cy="502920"/>
-          </a:xfrm>
-          <a:prstGeom prst="roundRect">
-            <a:avLst>
-              <a:gd name="adj" fmla="val 50000"/>
-            </a:avLst>
-          </a:prstGeom>
-          <a:solidFill>
-            <a:srgbClr val="00C2A8"/>
+            <a:off x="0" y="6537960"/>
+            <a:ext cx="12191695" cy="320040"/>
+          </a:xfrm>
+          <a:prstGeom prst="rect">
+            <a:avLst/>
+          </a:prstGeom>
+          <a:solidFill>
+            <a:srgbClr val="07142E"/>
           </a:solidFill>
           <a:ln>
             <a:noFill/>
@@ -16451,59 +19482,6 @@
           </a:fontRef>
         </p:style>
         <p:txBody>
-          <a:bodyPr rtlCol="0" anchor="ctr" tIns="18288" bIns="18288"/>
-          <a:lstStyle/>
-          <a:p>
-            <a:pPr algn="ctr"/>
-            <a:r>
-              <a:rPr sz="1400" b="1">
-                <a:solidFill>
-                  <a:srgbClr val="0B1E3F"/>
-                </a:solidFill>
-                <a:latin typeface="Calibri"/>
-              </a:rPr>
-              <a:t>Quelle: Univ. London / S&amp;D-Fraktion (Statista)</a:t>
-            </a:r>
-          </a:p>
-        </p:txBody>
-      </p:sp>
-      <p:sp>
-        <p:nvSpPr>
-          <p:cNvPr id="13" name="Rectangle 12"/>
-          <p:cNvSpPr/>
-          <p:nvPr/>
-        </p:nvSpPr>
-        <p:spPr>
-          <a:xfrm>
-            <a:off x="0" y="6537960"/>
-            <a:ext cx="12191695" cy="320040"/>
-          </a:xfrm>
-          <a:prstGeom prst="rect">
-            <a:avLst/>
-          </a:prstGeom>
-          <a:solidFill>
-            <a:srgbClr val="07142E"/>
-          </a:solidFill>
-          <a:ln>
-            <a:noFill/>
-          </a:ln>
-          <a:effectLst/>
-        </p:spPr>
-        <p:style>
-          <a:lnRef idx="1">
-            <a:schemeClr val="accent1"/>
-          </a:lnRef>
-          <a:fillRef idx="3">
-            <a:schemeClr val="accent1"/>
-          </a:fillRef>
-          <a:effectRef idx="2">
-            <a:schemeClr val="accent1"/>
-          </a:effectRef>
-          <a:fontRef idx="minor">
-            <a:schemeClr val="lt1"/>
-          </a:fontRef>
-        </p:style>
-        <p:txBody>
           <a:bodyPr rtlCol="0" anchor="ctr"/>
           <a:lstStyle/>
           <a:p>
@@ -16513,7 +19491,7 @@
       </p:sp>
       <p:sp>
         <p:nvSpPr>
-          <p:cNvPr id="14" name="TextBox 13"/>
+          <p:cNvPr id="12" name="TextBox 11"/>
           <p:cNvSpPr txBox="1"/>
           <p:nvPr/>
         </p:nvSpPr>
@@ -16535,7 +19513,7 @@
           <a:p>
             <a:pPr algn="l"/>
             <a:r>
-              <a:rPr sz="1000" b="0">
+              <a:rPr sz="1000" b="0" i="0">
                 <a:solidFill>
                   <a:srgbClr val="B8C2D6"/>
                 </a:solidFill>
@@ -16548,7 +19526,7 @@
       </p:sp>
       <p:sp>
         <p:nvSpPr>
-          <p:cNvPr id="15" name="TextBox 14"/>
+          <p:cNvPr id="13" name="TextBox 12"/>
           <p:cNvSpPr txBox="1"/>
           <p:nvPr/>
         </p:nvSpPr>
@@ -16570,7 +19548,7 @@
           <a:p>
             <a:pPr algn="r"/>
             <a:r>
-              <a:rPr sz="1000" b="0">
+              <a:rPr sz="1000" b="0" i="0">
                 <a:solidFill>
                   <a:srgbClr val="00C2A8"/>
                 </a:solidFill>
@@ -16719,7 +19697,7 @@
           <a:p>
             <a:pPr algn="l"/>
             <a:r>
-              <a:rPr sz="2600" b="1">
+              <a:rPr sz="2600" b="1" i="0">
                 <a:solidFill>
                   <a:srgbClr val="FFFFFF"/>
                 </a:solidFill>
@@ -16754,7 +19732,7 @@
           <a:p>
             <a:pPr algn="r"/>
             <a:r>
-              <a:rPr sz="1200" b="0">
+              <a:rPr sz="1200" b="0" i="0">
                 <a:solidFill>
                   <a:srgbClr val="00C2A8"/>
                 </a:solidFill>
@@ -16791,52 +19769,19 @@
       </p:pic>
       <p:sp>
         <p:nvSpPr>
-          <p:cNvPr id="7" name="TextBox 6"/>
-          <p:cNvSpPr txBox="1"/>
-          <p:nvPr/>
-        </p:nvSpPr>
-        <p:spPr>
-          <a:xfrm>
-            <a:off x="7680960" y="1280160"/>
-            <a:ext cx="4114800" cy="457200"/>
-          </a:xfrm>
-          <a:prstGeom prst="rect">
-            <a:avLst/>
-          </a:prstGeom>
-          <a:noFill/>
-        </p:spPr>
-        <p:txBody>
-          <a:bodyPr wrap="square" lIns="45720" rIns="45720" tIns="18288" bIns="18288" anchor="t">
-            <a:spAutoFit/>
-          </a:bodyPr>
-          <a:lstStyle/>
-          <a:p>
-            <a:pPr algn="l"/>
-            <a:r>
-              <a:rPr sz="2000" b="1">
-                <a:solidFill>
-                  <a:srgbClr val="0B1E3F"/>
-                </a:solidFill>
-                <a:latin typeface="Calibri"/>
-              </a:rPr>
-              <a:t>Kernaussagen</a:t>
-            </a:r>
-          </a:p>
-        </p:txBody>
-      </p:sp>
-      <p:sp>
-        <p:nvSpPr>
-          <p:cNvPr id="8" name="Rectangle 7"/>
+          <p:cNvPr id="7" name="Rounded Rectangle 6"/>
           <p:cNvSpPr/>
           <p:nvPr/>
         </p:nvSpPr>
         <p:spPr>
           <a:xfrm>
-            <a:off x="7680960" y="1783080"/>
-            <a:ext cx="1097280" cy="45720"/>
-          </a:xfrm>
-          <a:prstGeom prst="rect">
-            <a:avLst/>
+            <a:off x="7680960" y="1554480"/>
+            <a:ext cx="4114800" cy="502920"/>
+          </a:xfrm>
+          <a:prstGeom prst="roundRect">
+            <a:avLst>
+              <a:gd name="adj" fmla="val 50000"/>
+            </a:avLst>
           </a:prstGeom>
           <a:solidFill>
             <a:srgbClr val="00C2A8"/>
@@ -16861,22 +19806,31 @@
           </a:fontRef>
         </p:style>
         <p:txBody>
-          <a:bodyPr rtlCol="0" anchor="ctr"/>
-          <a:lstStyle/>
-          <a:p>
-            <a:pPr algn="ctr"/>
-          </a:p>
-        </p:txBody>
-      </p:sp>
-      <p:sp>
-        <p:nvSpPr>
-          <p:cNvPr id="9" name="Rounded Rectangle 8"/>
+          <a:bodyPr rtlCol="0" anchor="ctr" tIns="18288" bIns="18288"/>
+          <a:lstStyle/>
+          <a:p>
+            <a:pPr algn="ctr"/>
+            <a:r>
+              <a:rPr sz="1400" b="1">
+                <a:solidFill>
+                  <a:srgbClr val="0B1E3F"/>
+                </a:solidFill>
+                <a:latin typeface="Calibri"/>
+              </a:rPr>
+              <a:t>113 Mrd. € Gesamtschaden / Jahr</a:t>
+            </a:r>
+          </a:p>
+        </p:txBody>
+      </p:sp>
+      <p:sp>
+        <p:nvSpPr>
+          <p:cNvPr id="8" name="Rounded Rectangle 7"/>
           <p:cNvSpPr/>
           <p:nvPr/>
         </p:nvSpPr>
         <p:spPr>
           <a:xfrm>
-            <a:off x="7680960" y="2286000"/>
+            <a:off x="7680960" y="2240280"/>
             <a:ext cx="4114800" cy="502920"/>
           </a:xfrm>
           <a:prstGeom prst="roundRect">
@@ -16918,20 +19872,20 @@
                 </a:solidFill>
                 <a:latin typeface="Calibri"/>
               </a:rPr>
-              <a:t>113 Mrd. € Gesamtschaden / Jahr</a:t>
-            </a:r>
-          </a:p>
-        </p:txBody>
-      </p:sp>
-      <p:sp>
-        <p:nvSpPr>
-          <p:cNvPr id="10" name="Rounded Rectangle 9"/>
+              <a:t>54,1 Mrd. € durch Schwarzarbeit</a:t>
+            </a:r>
+          </a:p>
+        </p:txBody>
+      </p:sp>
+      <p:sp>
+        <p:nvSpPr>
+          <p:cNvPr id="9" name="Rounded Rectangle 8"/>
           <p:cNvSpPr/>
           <p:nvPr/>
         </p:nvSpPr>
         <p:spPr>
           <a:xfrm>
-            <a:off x="7680960" y="2971800"/>
+            <a:off x="7680960" y="2926080"/>
             <a:ext cx="4114800" cy="502920"/>
           </a:xfrm>
           <a:prstGeom prst="roundRect">
@@ -16973,20 +19927,20 @@
                 </a:solidFill>
                 <a:latin typeface="Calibri"/>
               </a:rPr>
-              <a:t>54,1 Mrd. € durch Schwarzarbeit</a:t>
-            </a:r>
-          </a:p>
-        </p:txBody>
-      </p:sp>
-      <p:sp>
-        <p:nvSpPr>
-          <p:cNvPr id="11" name="Rounded Rectangle 10"/>
+              <a:t>38,4 Mrd. € klass. Steuerhinterziehung</a:t>
+            </a:r>
+          </a:p>
+        </p:txBody>
+      </p:sp>
+      <p:sp>
+        <p:nvSpPr>
+          <p:cNvPr id="10" name="Rounded Rectangle 9"/>
           <p:cNvSpPr/>
           <p:nvPr/>
         </p:nvSpPr>
         <p:spPr>
           <a:xfrm>
-            <a:off x="7680960" y="3657600"/>
+            <a:off x="7680960" y="3611880"/>
             <a:ext cx="4114800" cy="502920"/>
           </a:xfrm>
           <a:prstGeom prst="roundRect">
@@ -17028,29 +19982,62 @@
                 </a:solidFill>
                 <a:latin typeface="Calibri"/>
               </a:rPr>
-              <a:t>38,4 Mrd. € klass. Steuerhinterziehung</a:t>
-            </a:r>
-          </a:p>
-        </p:txBody>
-      </p:sp>
-      <p:sp>
-        <p:nvSpPr>
-          <p:cNvPr id="12" name="Rounded Rectangle 11"/>
+              <a:t>20,5 Mrd. € Sozialbetrug</a:t>
+            </a:r>
+          </a:p>
+        </p:txBody>
+      </p:sp>
+      <p:sp>
+        <p:nvSpPr>
+          <p:cNvPr id="11" name="TextBox 10"/>
+          <p:cNvSpPr txBox="1"/>
+          <p:nvPr/>
+        </p:nvSpPr>
+        <p:spPr>
+          <a:xfrm>
+            <a:off x="7680960" y="5303520"/>
+            <a:ext cx="4114800" cy="365760"/>
+          </a:xfrm>
+          <a:prstGeom prst="rect">
+            <a:avLst/>
+          </a:prstGeom>
+          <a:noFill/>
+        </p:spPr>
+        <p:txBody>
+          <a:bodyPr wrap="square" lIns="45720" rIns="45720" tIns="18288" bIns="18288" anchor="t">
+            <a:spAutoFit/>
+          </a:bodyPr>
+          <a:lstStyle/>
+          <a:p>
+            <a:pPr algn="l"/>
+            <a:r>
+              <a:rPr sz="1000" b="0" i="0">
+                <a:solidFill>
+                  <a:srgbClr val="6E7A8C"/>
+                </a:solidFill>
+                <a:latin typeface="Calibri"/>
+              </a:rPr>
+              <a:t>Quelle: Prof. Dr. F. Schneider, JKU Linz, 2023</a:t>
+            </a:r>
+          </a:p>
+        </p:txBody>
+      </p:sp>
+      <p:sp>
+        <p:nvSpPr>
+          <p:cNvPr id="12" name="Rectangle 11"/>
           <p:cNvSpPr/>
           <p:nvPr/>
         </p:nvSpPr>
         <p:spPr>
           <a:xfrm>
-            <a:off x="7680960" y="4343400"/>
-            <a:ext cx="4114800" cy="502920"/>
-          </a:xfrm>
-          <a:prstGeom prst="roundRect">
-            <a:avLst>
-              <a:gd name="adj" fmla="val 50000"/>
-            </a:avLst>
-          </a:prstGeom>
-          <a:solidFill>
-            <a:srgbClr val="00C2A8"/>
+            <a:off x="0" y="6537960"/>
+            <a:ext cx="12191695" cy="320040"/>
+          </a:xfrm>
+          <a:prstGeom prst="rect">
+            <a:avLst/>
+          </a:prstGeom>
+          <a:solidFill>
+            <a:srgbClr val="07142E"/>
           </a:solidFill>
           <a:ln>
             <a:noFill/>
@@ -17072,104 +20059,16 @@
           </a:fontRef>
         </p:style>
         <p:txBody>
-          <a:bodyPr rtlCol="0" anchor="ctr" tIns="18288" bIns="18288"/>
-          <a:lstStyle/>
-          <a:p>
-            <a:pPr algn="ctr"/>
-            <a:r>
-              <a:rPr sz="1400" b="1">
-                <a:solidFill>
-                  <a:srgbClr val="0B1E3F"/>
-                </a:solidFill>
-                <a:latin typeface="Calibri"/>
-              </a:rPr>
-              <a:t>20,5 Mrd. € Sozialbetrug</a:t>
-            </a:r>
+          <a:bodyPr rtlCol="0" anchor="ctr"/>
+          <a:lstStyle/>
+          <a:p>
+            <a:pPr algn="ctr"/>
           </a:p>
         </p:txBody>
       </p:sp>
       <p:sp>
         <p:nvSpPr>
           <p:cNvPr id="13" name="TextBox 12"/>
-          <p:cNvSpPr txBox="1"/>
-          <p:nvPr/>
-        </p:nvSpPr>
-        <p:spPr>
-          <a:xfrm>
-            <a:off x="7680960" y="5303520"/>
-            <a:ext cx="4114800" cy="365760"/>
-          </a:xfrm>
-          <a:prstGeom prst="rect">
-            <a:avLst/>
-          </a:prstGeom>
-          <a:noFill/>
-        </p:spPr>
-        <p:txBody>
-          <a:bodyPr wrap="square" lIns="45720" rIns="45720" tIns="18288" bIns="18288" anchor="t">
-            <a:spAutoFit/>
-          </a:bodyPr>
-          <a:lstStyle/>
-          <a:p>
-            <a:pPr algn="l"/>
-            <a:r>
-              <a:rPr sz="1000" b="0">
-                <a:solidFill>
-                  <a:srgbClr val="6E7A8C"/>
-                </a:solidFill>
-                <a:latin typeface="Calibri"/>
-              </a:rPr>
-              <a:t>Quelle: Prof. Dr. F. Schneider, JKU Linz, 2023</a:t>
-            </a:r>
-          </a:p>
-        </p:txBody>
-      </p:sp>
-      <p:sp>
-        <p:nvSpPr>
-          <p:cNvPr id="14" name="Rectangle 13"/>
-          <p:cNvSpPr/>
-          <p:nvPr/>
-        </p:nvSpPr>
-        <p:spPr>
-          <a:xfrm>
-            <a:off x="0" y="6537960"/>
-            <a:ext cx="12191695" cy="320040"/>
-          </a:xfrm>
-          <a:prstGeom prst="rect">
-            <a:avLst/>
-          </a:prstGeom>
-          <a:solidFill>
-            <a:srgbClr val="07142E"/>
-          </a:solidFill>
-          <a:ln>
-            <a:noFill/>
-          </a:ln>
-          <a:effectLst/>
-        </p:spPr>
-        <p:style>
-          <a:lnRef idx="1">
-            <a:schemeClr val="accent1"/>
-          </a:lnRef>
-          <a:fillRef idx="3">
-            <a:schemeClr val="accent1"/>
-          </a:fillRef>
-          <a:effectRef idx="2">
-            <a:schemeClr val="accent1"/>
-          </a:effectRef>
-          <a:fontRef idx="minor">
-            <a:schemeClr val="lt1"/>
-          </a:fontRef>
-        </p:style>
-        <p:txBody>
-          <a:bodyPr rtlCol="0" anchor="ctr"/>
-          <a:lstStyle/>
-          <a:p>
-            <a:pPr algn="ctr"/>
-          </a:p>
-        </p:txBody>
-      </p:sp>
-      <p:sp>
-        <p:nvSpPr>
-          <p:cNvPr id="15" name="TextBox 14"/>
           <p:cNvSpPr txBox="1"/>
           <p:nvPr/>
         </p:nvSpPr>
@@ -17191,7 +20090,7 @@
           <a:p>
             <a:pPr algn="l"/>
             <a:r>
-              <a:rPr sz="1000" b="0">
+              <a:rPr sz="1000" b="0" i="0">
                 <a:solidFill>
                   <a:srgbClr val="B8C2D6"/>
                 </a:solidFill>
@@ -17204,7 +20103,7 @@
       </p:sp>
       <p:sp>
         <p:nvSpPr>
-          <p:cNvPr id="16" name="TextBox 15"/>
+          <p:cNvPr id="14" name="TextBox 13"/>
           <p:cNvSpPr txBox="1"/>
           <p:nvPr/>
         </p:nvSpPr>
@@ -17226,7 +20125,7 @@
           <a:p>
             <a:pPr algn="r"/>
             <a:r>
-              <a:rPr sz="1000" b="0">
+              <a:rPr sz="1000" b="0" i="0">
                 <a:solidFill>
                   <a:srgbClr val="00C2A8"/>
                 </a:solidFill>

--- a/output/KI_Steuerhinterziehung_NEU.pptx
+++ b/output/KI_Steuerhinterziehung_NEU.pptx
@@ -3614,7 +3614,7 @@
                 </a:solidFill>
                 <a:latin typeface="Calibri"/>
               </a:rPr>
-              <a:t>Folie 5 / 6</a:t>
+              <a:t>Folie 5 / 9</a:t>
             </a:r>
           </a:p>
         </p:txBody>
@@ -4191,7 +4191,7 @@
                 </a:solidFill>
                 <a:latin typeface="Calibri"/>
               </a:rPr>
-              <a:t>Folie 5 / 6</a:t>
+              <a:t>Folie 5 / 9</a:t>
             </a:r>
           </a:p>
         </p:txBody>
@@ -4733,7 +4733,7 @@
                 </a:solidFill>
                 <a:latin typeface="Calibri"/>
               </a:rPr>
-              <a:t>Folie 6 / 6</a:t>
+              <a:t>Folie 6 / 9</a:t>
             </a:r>
           </a:p>
         </p:txBody>
@@ -5389,7 +5389,7 @@
                 </a:solidFill>
                 <a:latin typeface="Calibri"/>
               </a:rPr>
-              <a:t>Folie 6 / 6</a:t>
+              <a:t>Folie 6 / 9</a:t>
             </a:r>
           </a:p>
         </p:txBody>
@@ -6045,7 +6045,7 @@
                 </a:solidFill>
                 <a:latin typeface="Calibri"/>
               </a:rPr>
-              <a:t>Folie 6 / 6</a:t>
+              <a:t>Folie 6 / 9</a:t>
             </a:r>
           </a:p>
         </p:txBody>
@@ -6701,7 +6701,7 @@
                 </a:solidFill>
                 <a:latin typeface="Calibri"/>
               </a:rPr>
-              <a:t>Folie 6 / 6</a:t>
+              <a:t>Folie 6 / 9</a:t>
             </a:r>
           </a:p>
         </p:txBody>
@@ -7392,7 +7392,7 @@
                 </a:solidFill>
                 <a:latin typeface="Calibri"/>
               </a:rPr>
-              <a:t>Funktionsweise</a:t>
+              <a:t>Folie 7 / 9</a:t>
             </a:r>
           </a:p>
         </p:txBody>
@@ -8743,7 +8743,7 @@
                 </a:solidFill>
                 <a:latin typeface="Calibri"/>
               </a:rPr>
-              <a:t>Bewertung</a:t>
+              <a:t>Folie 8 / 9</a:t>
             </a:r>
           </a:p>
         </p:txBody>
@@ -9680,7 +9680,7 @@
                 </a:solidFill>
                 <a:latin typeface="Calibri"/>
               </a:rPr>
-              <a:t>Roadmap</a:t>
+              <a:t>Folie 9 / 9</a:t>
             </a:r>
           </a:p>
         </p:txBody>
@@ -11573,14 +11573,49 @@
       </p:sp>
       <p:sp>
         <p:nvSpPr>
-          <p:cNvPr id="6" name="Rounded Rectangle 5"/>
+          <p:cNvPr id="6" name="TextBox 5"/>
+          <p:cNvSpPr txBox="1"/>
+          <p:nvPr/>
+        </p:nvSpPr>
+        <p:spPr>
+          <a:xfrm>
+            <a:off x="457200" y="960120"/>
+            <a:ext cx="11247120" cy="274320"/>
+          </a:xfrm>
+          <a:prstGeom prst="rect">
+            <a:avLst/>
+          </a:prstGeom>
+          <a:noFill/>
+        </p:spPr>
+        <p:txBody>
+          <a:bodyPr wrap="square" lIns="45720" rIns="45720" tIns="18288" bIns="18288" anchor="t">
+            <a:spAutoFit/>
+          </a:bodyPr>
+          <a:lstStyle/>
+          <a:p>
+            <a:pPr algn="l"/>
+            <a:r>
+              <a:rPr sz="1200" b="0" i="1">
+                <a:solidFill>
+                  <a:srgbClr val="6E7A8C"/>
+                </a:solidFill>
+                <a:latin typeface="Calibri"/>
+              </a:rPr>
+              <a:t>9 Themen · ca. 12–14 Minuten</a:t>
+            </a:r>
+          </a:p>
+        </p:txBody>
+      </p:sp>
+      <p:sp>
+        <p:nvSpPr>
+          <p:cNvPr id="7" name="Rounded Rectangle 6"/>
           <p:cNvSpPr/>
           <p:nvPr/>
         </p:nvSpPr>
         <p:spPr>
           <a:xfrm>
-            <a:off x="457200" y="1234440"/>
-            <a:ext cx="5394960" cy="1417320"/>
+            <a:off x="312267" y="1234440"/>
+            <a:ext cx="3703320" cy="1417320"/>
           </a:xfrm>
           <a:prstGeom prst="roundRect">
             <a:avLst>
@@ -11619,14 +11654,14 @@
       </p:sp>
       <p:sp>
         <p:nvSpPr>
-          <p:cNvPr id="7" name="Rectangle 6"/>
+          <p:cNvPr id="8" name="Rectangle 7"/>
           <p:cNvSpPr/>
           <p:nvPr/>
         </p:nvSpPr>
         <p:spPr>
           <a:xfrm>
-            <a:off x="457200" y="1234440"/>
-            <a:ext cx="164592" cy="1417320"/>
+            <a:off x="312267" y="1234440"/>
+            <a:ext cx="137160" cy="1417320"/>
           </a:xfrm>
           <a:prstGeom prst="rect">
             <a:avLst/>
@@ -11663,14 +11698,14 @@
       </p:sp>
       <p:sp>
         <p:nvSpPr>
-          <p:cNvPr id="8" name="TextBox 7"/>
+          <p:cNvPr id="9" name="TextBox 8"/>
           <p:cNvSpPr txBox="1"/>
           <p:nvPr/>
         </p:nvSpPr>
         <p:spPr>
           <a:xfrm>
-            <a:off x="868680" y="1325880"/>
-            <a:ext cx="1097280" cy="731520"/>
+            <a:off x="586587" y="1371600"/>
+            <a:ext cx="914400" cy="640080"/>
           </a:xfrm>
           <a:prstGeom prst="rect">
             <a:avLst/>
@@ -11685,7 +11720,7 @@
           <a:p>
             <a:pPr algn="l"/>
             <a:r>
-              <a:rPr sz="4200" b="1" i="0">
+              <a:rPr sz="3200" b="1" i="0">
                 <a:solidFill>
                   <a:srgbClr val="00C2A8"/>
                 </a:solidFill>
@@ -11698,14 +11733,14 @@
       </p:sp>
       <p:sp>
         <p:nvSpPr>
-          <p:cNvPr id="9" name="TextBox 8"/>
+          <p:cNvPr id="10" name="TextBox 9"/>
           <p:cNvSpPr txBox="1"/>
           <p:nvPr/>
         </p:nvSpPr>
         <p:spPr>
           <a:xfrm>
-            <a:off x="2011680" y="1417320"/>
-            <a:ext cx="3749040" cy="1051560"/>
+            <a:off x="1546707" y="1417320"/>
+            <a:ext cx="2377440" cy="1051560"/>
           </a:xfrm>
           <a:prstGeom prst="rect">
             <a:avLst/>
@@ -11720,7 +11755,7 @@
           <a:p>
             <a:pPr algn="l"/>
             <a:r>
-              <a:rPr sz="1800" b="1" i="0">
+              <a:rPr sz="1400" b="1" i="0">
                 <a:solidFill>
                   <a:srgbClr val="1B263A"/>
                 </a:solidFill>
@@ -11733,14 +11768,14 @@
       </p:sp>
       <p:sp>
         <p:nvSpPr>
-          <p:cNvPr id="10" name="Rounded Rectangle 9"/>
+          <p:cNvPr id="11" name="Rounded Rectangle 10"/>
           <p:cNvSpPr/>
           <p:nvPr/>
         </p:nvSpPr>
         <p:spPr>
           <a:xfrm>
-            <a:off x="6172200" y="1234440"/>
-            <a:ext cx="5394960" cy="1417320"/>
+            <a:off x="4244187" y="1234440"/>
+            <a:ext cx="3703320" cy="1417320"/>
           </a:xfrm>
           <a:prstGeom prst="roundRect">
             <a:avLst>
@@ -11779,14 +11814,14 @@
       </p:sp>
       <p:sp>
         <p:nvSpPr>
-          <p:cNvPr id="11" name="Rectangle 10"/>
+          <p:cNvPr id="12" name="Rectangle 11"/>
           <p:cNvSpPr/>
           <p:nvPr/>
         </p:nvSpPr>
         <p:spPr>
           <a:xfrm>
-            <a:off x="6172200" y="1234440"/>
-            <a:ext cx="164592" cy="1417320"/>
+            <a:off x="4244187" y="1234440"/>
+            <a:ext cx="137160" cy="1417320"/>
           </a:xfrm>
           <a:prstGeom prst="rect">
             <a:avLst/>
@@ -11823,14 +11858,14 @@
       </p:sp>
       <p:sp>
         <p:nvSpPr>
-          <p:cNvPr id="12" name="TextBox 11"/>
+          <p:cNvPr id="13" name="TextBox 12"/>
           <p:cNvSpPr txBox="1"/>
           <p:nvPr/>
         </p:nvSpPr>
         <p:spPr>
           <a:xfrm>
-            <a:off x="6583680" y="1325880"/>
-            <a:ext cx="1097280" cy="731520"/>
+            <a:off x="4518507" y="1371600"/>
+            <a:ext cx="914400" cy="640080"/>
           </a:xfrm>
           <a:prstGeom prst="rect">
             <a:avLst/>
@@ -11845,7 +11880,7 @@
           <a:p>
             <a:pPr algn="l"/>
             <a:r>
-              <a:rPr sz="4200" b="1" i="0">
+              <a:rPr sz="3200" b="1" i="0">
                 <a:solidFill>
                   <a:srgbClr val="00C2A8"/>
                 </a:solidFill>
@@ -11858,14 +11893,14 @@
       </p:sp>
       <p:sp>
         <p:nvSpPr>
-          <p:cNvPr id="13" name="TextBox 12"/>
+          <p:cNvPr id="14" name="TextBox 13"/>
           <p:cNvSpPr txBox="1"/>
           <p:nvPr/>
         </p:nvSpPr>
         <p:spPr>
           <a:xfrm>
-            <a:off x="7726680" y="1417320"/>
-            <a:ext cx="3749040" cy="1051560"/>
+            <a:off x="5478627" y="1417320"/>
+            <a:ext cx="2377440" cy="1051560"/>
           </a:xfrm>
           <a:prstGeom prst="rect">
             <a:avLst/>
@@ -11880,7 +11915,7 @@
           <a:p>
             <a:pPr algn="l"/>
             <a:r>
-              <a:rPr sz="1800" b="1" i="0">
+              <a:rPr sz="1400" b="1" i="0">
                 <a:solidFill>
                   <a:srgbClr val="1B263A"/>
                 </a:solidFill>
@@ -11893,14 +11928,14 @@
       </p:sp>
       <p:sp>
         <p:nvSpPr>
-          <p:cNvPr id="14" name="Rounded Rectangle 13"/>
+          <p:cNvPr id="15" name="Rounded Rectangle 14"/>
           <p:cNvSpPr/>
           <p:nvPr/>
         </p:nvSpPr>
         <p:spPr>
           <a:xfrm>
-            <a:off x="457200" y="2880360"/>
-            <a:ext cx="5394960" cy="1417320"/>
+            <a:off x="8176107" y="1234440"/>
+            <a:ext cx="3703320" cy="1417320"/>
           </a:xfrm>
           <a:prstGeom prst="roundRect">
             <a:avLst>
@@ -11939,14 +11974,14 @@
       </p:sp>
       <p:sp>
         <p:nvSpPr>
-          <p:cNvPr id="15" name="Rectangle 14"/>
+          <p:cNvPr id="16" name="Rectangle 15"/>
           <p:cNvSpPr/>
           <p:nvPr/>
         </p:nvSpPr>
         <p:spPr>
           <a:xfrm>
-            <a:off x="457200" y="2880360"/>
-            <a:ext cx="164592" cy="1417320"/>
+            <a:off x="8176107" y="1234440"/>
+            <a:ext cx="137160" cy="1417320"/>
           </a:xfrm>
           <a:prstGeom prst="rect">
             <a:avLst/>
@@ -11983,14 +12018,14 @@
       </p:sp>
       <p:sp>
         <p:nvSpPr>
-          <p:cNvPr id="16" name="TextBox 15"/>
+          <p:cNvPr id="17" name="TextBox 16"/>
           <p:cNvSpPr txBox="1"/>
           <p:nvPr/>
         </p:nvSpPr>
         <p:spPr>
           <a:xfrm>
-            <a:off x="868680" y="2971800"/>
-            <a:ext cx="1097280" cy="731520"/>
+            <a:off x="8450427" y="1371600"/>
+            <a:ext cx="914400" cy="640080"/>
           </a:xfrm>
           <a:prstGeom prst="rect">
             <a:avLst/>
@@ -12005,7 +12040,7 @@
           <a:p>
             <a:pPr algn="l"/>
             <a:r>
-              <a:rPr sz="4200" b="1" i="0">
+              <a:rPr sz="3200" b="1" i="0">
                 <a:solidFill>
                   <a:srgbClr val="00C2A8"/>
                 </a:solidFill>
@@ -12018,14 +12053,14 @@
       </p:sp>
       <p:sp>
         <p:nvSpPr>
-          <p:cNvPr id="17" name="TextBox 16"/>
+          <p:cNvPr id="18" name="TextBox 17"/>
           <p:cNvSpPr txBox="1"/>
           <p:nvPr/>
         </p:nvSpPr>
         <p:spPr>
           <a:xfrm>
-            <a:off x="2011680" y="3063240"/>
-            <a:ext cx="3749040" cy="1051560"/>
+            <a:off x="9410547" y="1417320"/>
+            <a:ext cx="2377440" cy="1051560"/>
           </a:xfrm>
           <a:prstGeom prst="rect">
             <a:avLst/>
@@ -12040,7 +12075,7 @@
           <a:p>
             <a:pPr algn="l"/>
             <a:r>
-              <a:rPr sz="1800" b="1" i="0">
+              <a:rPr sz="1400" b="1" i="0">
                 <a:solidFill>
                   <a:srgbClr val="1B263A"/>
                 </a:solidFill>
@@ -12053,14 +12088,14 @@
       </p:sp>
       <p:sp>
         <p:nvSpPr>
-          <p:cNvPr id="18" name="Rounded Rectangle 17"/>
+          <p:cNvPr id="19" name="Rounded Rectangle 18"/>
           <p:cNvSpPr/>
           <p:nvPr/>
         </p:nvSpPr>
         <p:spPr>
           <a:xfrm>
-            <a:off x="6172200" y="2880360"/>
-            <a:ext cx="5394960" cy="1417320"/>
+            <a:off x="312267" y="2852928"/>
+            <a:ext cx="3703320" cy="1417320"/>
           </a:xfrm>
           <a:prstGeom prst="roundRect">
             <a:avLst>
@@ -12099,14 +12134,14 @@
       </p:sp>
       <p:sp>
         <p:nvSpPr>
-          <p:cNvPr id="19" name="Rectangle 18"/>
+          <p:cNvPr id="20" name="Rectangle 19"/>
           <p:cNvSpPr/>
           <p:nvPr/>
         </p:nvSpPr>
         <p:spPr>
           <a:xfrm>
-            <a:off x="6172200" y="2880360"/>
-            <a:ext cx="164592" cy="1417320"/>
+            <a:off x="312267" y="2852928"/>
+            <a:ext cx="137160" cy="1417320"/>
           </a:xfrm>
           <a:prstGeom prst="rect">
             <a:avLst/>
@@ -12143,14 +12178,14 @@
       </p:sp>
       <p:sp>
         <p:nvSpPr>
-          <p:cNvPr id="20" name="TextBox 19"/>
+          <p:cNvPr id="21" name="TextBox 20"/>
           <p:cNvSpPr txBox="1"/>
           <p:nvPr/>
         </p:nvSpPr>
         <p:spPr>
           <a:xfrm>
-            <a:off x="6583680" y="2971800"/>
-            <a:ext cx="1097280" cy="731520"/>
+            <a:off x="586587" y="2990088"/>
+            <a:ext cx="914400" cy="640080"/>
           </a:xfrm>
           <a:prstGeom prst="rect">
             <a:avLst/>
@@ -12165,7 +12200,7 @@
           <a:p>
             <a:pPr algn="l"/>
             <a:r>
-              <a:rPr sz="4200" b="1" i="0">
+              <a:rPr sz="3200" b="1" i="0">
                 <a:solidFill>
                   <a:srgbClr val="00C2A8"/>
                 </a:solidFill>
@@ -12178,14 +12213,14 @@
       </p:sp>
       <p:sp>
         <p:nvSpPr>
-          <p:cNvPr id="21" name="TextBox 20"/>
+          <p:cNvPr id="22" name="TextBox 21"/>
           <p:cNvSpPr txBox="1"/>
           <p:nvPr/>
         </p:nvSpPr>
         <p:spPr>
           <a:xfrm>
-            <a:off x="7726680" y="3063240"/>
-            <a:ext cx="3749040" cy="1051560"/>
+            <a:off x="1546707" y="3035808"/>
+            <a:ext cx="2377440" cy="1051560"/>
           </a:xfrm>
           <a:prstGeom prst="rect">
             <a:avLst/>
@@ -12200,7 +12235,7 @@
           <a:p>
             <a:pPr algn="l"/>
             <a:r>
-              <a:rPr sz="1800" b="1" i="0">
+              <a:rPr sz="1400" b="1" i="0">
                 <a:solidFill>
                   <a:srgbClr val="1B263A"/>
                 </a:solidFill>
@@ -12213,14 +12248,14 @@
       </p:sp>
       <p:sp>
         <p:nvSpPr>
-          <p:cNvPr id="22" name="Rounded Rectangle 21"/>
+          <p:cNvPr id="23" name="Rounded Rectangle 22"/>
           <p:cNvSpPr/>
           <p:nvPr/>
         </p:nvSpPr>
         <p:spPr>
           <a:xfrm>
-            <a:off x="457200" y="4526280"/>
-            <a:ext cx="5394960" cy="1417320"/>
+            <a:off x="4244187" y="2852928"/>
+            <a:ext cx="3703320" cy="1417320"/>
           </a:xfrm>
           <a:prstGeom prst="roundRect">
             <a:avLst>
@@ -12259,14 +12294,14 @@
       </p:sp>
       <p:sp>
         <p:nvSpPr>
-          <p:cNvPr id="23" name="Rectangle 22"/>
+          <p:cNvPr id="24" name="Rectangle 23"/>
           <p:cNvSpPr/>
           <p:nvPr/>
         </p:nvSpPr>
         <p:spPr>
           <a:xfrm>
-            <a:off x="457200" y="4526280"/>
-            <a:ext cx="164592" cy="1417320"/>
+            <a:off x="4244187" y="2852928"/>
+            <a:ext cx="137160" cy="1417320"/>
           </a:xfrm>
           <a:prstGeom prst="rect">
             <a:avLst/>
@@ -12303,14 +12338,14 @@
       </p:sp>
       <p:sp>
         <p:nvSpPr>
-          <p:cNvPr id="24" name="TextBox 23"/>
+          <p:cNvPr id="25" name="TextBox 24"/>
           <p:cNvSpPr txBox="1"/>
           <p:nvPr/>
         </p:nvSpPr>
         <p:spPr>
           <a:xfrm>
-            <a:off x="868680" y="4617720"/>
-            <a:ext cx="1097280" cy="731520"/>
+            <a:off x="4518507" y="2990088"/>
+            <a:ext cx="914400" cy="640080"/>
           </a:xfrm>
           <a:prstGeom prst="rect">
             <a:avLst/>
@@ -12325,7 +12360,7 @@
           <a:p>
             <a:pPr algn="l"/>
             <a:r>
-              <a:rPr sz="4200" b="1" i="0">
+              <a:rPr sz="3200" b="1" i="0">
                 <a:solidFill>
                   <a:srgbClr val="00C2A8"/>
                 </a:solidFill>
@@ -12338,14 +12373,14 @@
       </p:sp>
       <p:sp>
         <p:nvSpPr>
-          <p:cNvPr id="25" name="TextBox 24"/>
+          <p:cNvPr id="26" name="TextBox 25"/>
           <p:cNvSpPr txBox="1"/>
           <p:nvPr/>
         </p:nvSpPr>
         <p:spPr>
           <a:xfrm>
-            <a:off x="2011680" y="4709160"/>
-            <a:ext cx="3749040" cy="1051560"/>
+            <a:off x="5478627" y="3035808"/>
+            <a:ext cx="2377440" cy="1051560"/>
           </a:xfrm>
           <a:prstGeom prst="rect">
             <a:avLst/>
@@ -12360,7 +12395,7 @@
           <a:p>
             <a:pPr algn="l"/>
             <a:r>
-              <a:rPr sz="1800" b="1" i="0">
+              <a:rPr sz="1400" b="1" i="0">
                 <a:solidFill>
                   <a:srgbClr val="1B263A"/>
                 </a:solidFill>
@@ -12373,14 +12408,14 @@
       </p:sp>
       <p:sp>
         <p:nvSpPr>
-          <p:cNvPr id="26" name="Rounded Rectangle 25"/>
+          <p:cNvPr id="27" name="Rounded Rectangle 26"/>
           <p:cNvSpPr/>
           <p:nvPr/>
         </p:nvSpPr>
         <p:spPr>
           <a:xfrm>
-            <a:off x="6172200" y="4526280"/>
-            <a:ext cx="5394960" cy="1417320"/>
+            <a:off x="8176107" y="2852928"/>
+            <a:ext cx="3703320" cy="1417320"/>
           </a:xfrm>
           <a:prstGeom prst="roundRect">
             <a:avLst>
@@ -12419,14 +12454,14 @@
       </p:sp>
       <p:sp>
         <p:nvSpPr>
-          <p:cNvPr id="27" name="Rectangle 26"/>
+          <p:cNvPr id="28" name="Rectangle 27"/>
           <p:cNvSpPr/>
           <p:nvPr/>
         </p:nvSpPr>
         <p:spPr>
           <a:xfrm>
-            <a:off x="6172200" y="4526280"/>
-            <a:ext cx="164592" cy="1417320"/>
+            <a:off x="8176107" y="2852928"/>
+            <a:ext cx="137160" cy="1417320"/>
           </a:xfrm>
           <a:prstGeom prst="rect">
             <a:avLst/>
@@ -12463,14 +12498,14 @@
       </p:sp>
       <p:sp>
         <p:nvSpPr>
-          <p:cNvPr id="28" name="TextBox 27"/>
+          <p:cNvPr id="29" name="TextBox 28"/>
           <p:cNvSpPr txBox="1"/>
           <p:nvPr/>
         </p:nvSpPr>
         <p:spPr>
           <a:xfrm>
-            <a:off x="6583680" y="4617720"/>
-            <a:ext cx="1097280" cy="731520"/>
+            <a:off x="8450427" y="2990088"/>
+            <a:ext cx="914400" cy="640080"/>
           </a:xfrm>
           <a:prstGeom prst="rect">
             <a:avLst/>
@@ -12485,7 +12520,7 @@
           <a:p>
             <a:pPr algn="l"/>
             <a:r>
-              <a:rPr sz="4200" b="1" i="0">
+              <a:rPr sz="3200" b="1" i="0">
                 <a:solidFill>
                   <a:srgbClr val="00C2A8"/>
                 </a:solidFill>
@@ -12498,14 +12533,14 @@
       </p:sp>
       <p:sp>
         <p:nvSpPr>
-          <p:cNvPr id="29" name="TextBox 28"/>
+          <p:cNvPr id="30" name="TextBox 29"/>
           <p:cNvSpPr txBox="1"/>
           <p:nvPr/>
         </p:nvSpPr>
         <p:spPr>
           <a:xfrm>
-            <a:off x="7726680" y="4709160"/>
-            <a:ext cx="3749040" cy="1051560"/>
+            <a:off x="9410547" y="3035808"/>
+            <a:ext cx="2377440" cy="1051560"/>
           </a:xfrm>
           <a:prstGeom prst="rect">
             <a:avLst/>
@@ -12520,7 +12555,7 @@
           <a:p>
             <a:pPr algn="l"/>
             <a:r>
-              <a:rPr sz="1800" b="1" i="0">
+              <a:rPr sz="1400" b="1" i="0">
                 <a:solidFill>
                   <a:srgbClr val="1B263A"/>
                 </a:solidFill>
@@ -12533,20 +12568,22 @@
       </p:sp>
       <p:sp>
         <p:nvSpPr>
-          <p:cNvPr id="30" name="Rectangle 29"/>
+          <p:cNvPr id="31" name="Rounded Rectangle 30"/>
           <p:cNvSpPr/>
           <p:nvPr/>
         </p:nvSpPr>
         <p:spPr>
           <a:xfrm>
-            <a:off x="0" y="6537960"/>
-            <a:ext cx="12191695" cy="320040"/>
-          </a:xfrm>
-          <a:prstGeom prst="rect">
-            <a:avLst/>
-          </a:prstGeom>
-          <a:solidFill>
-            <a:srgbClr val="07142E"/>
+            <a:off x="312267" y="4471416"/>
+            <a:ext cx="3703320" cy="1417320"/>
+          </a:xfrm>
+          <a:prstGeom prst="roundRect">
+            <a:avLst>
+              <a:gd name="adj" fmla="val 8000"/>
+            </a:avLst>
+          </a:prstGeom>
+          <a:solidFill>
+            <a:srgbClr val="FFFFFF"/>
           </a:solidFill>
           <a:ln>
             <a:noFill/>
@@ -12577,7 +12614,485 @@
       </p:sp>
       <p:sp>
         <p:nvSpPr>
-          <p:cNvPr id="31" name="TextBox 30"/>
+          <p:cNvPr id="32" name="Rectangle 31"/>
+          <p:cNvSpPr/>
+          <p:nvPr/>
+        </p:nvSpPr>
+        <p:spPr>
+          <a:xfrm>
+            <a:off x="312267" y="4471416"/>
+            <a:ext cx="137160" cy="1417320"/>
+          </a:xfrm>
+          <a:prstGeom prst="rect">
+            <a:avLst/>
+          </a:prstGeom>
+          <a:solidFill>
+            <a:srgbClr val="00C2A8"/>
+          </a:solidFill>
+          <a:ln>
+            <a:noFill/>
+          </a:ln>
+          <a:effectLst/>
+        </p:spPr>
+        <p:style>
+          <a:lnRef idx="1">
+            <a:schemeClr val="accent1"/>
+          </a:lnRef>
+          <a:fillRef idx="3">
+            <a:schemeClr val="accent1"/>
+          </a:fillRef>
+          <a:effectRef idx="2">
+            <a:schemeClr val="accent1"/>
+          </a:effectRef>
+          <a:fontRef idx="minor">
+            <a:schemeClr val="lt1"/>
+          </a:fontRef>
+        </p:style>
+        <p:txBody>
+          <a:bodyPr rtlCol="0" anchor="ctr"/>
+          <a:lstStyle/>
+          <a:p>
+            <a:pPr algn="ctr"/>
+          </a:p>
+        </p:txBody>
+      </p:sp>
+      <p:sp>
+        <p:nvSpPr>
+          <p:cNvPr id="33" name="TextBox 32"/>
+          <p:cNvSpPr txBox="1"/>
+          <p:nvPr/>
+        </p:nvSpPr>
+        <p:spPr>
+          <a:xfrm>
+            <a:off x="586587" y="4608576"/>
+            <a:ext cx="914400" cy="640080"/>
+          </a:xfrm>
+          <a:prstGeom prst="rect">
+            <a:avLst/>
+          </a:prstGeom>
+          <a:noFill/>
+        </p:spPr>
+        <p:txBody>
+          <a:bodyPr wrap="square" lIns="45720" rIns="45720" tIns="18288" bIns="18288" anchor="ctr">
+            <a:spAutoFit/>
+          </a:bodyPr>
+          <a:lstStyle/>
+          <a:p>
+            <a:pPr algn="l"/>
+            <a:r>
+              <a:rPr sz="3200" b="1" i="0">
+                <a:solidFill>
+                  <a:srgbClr val="00C2A8"/>
+                </a:solidFill>
+                <a:latin typeface="Calibri"/>
+              </a:rPr>
+              <a:t>07</a:t>
+            </a:r>
+          </a:p>
+        </p:txBody>
+      </p:sp>
+      <p:sp>
+        <p:nvSpPr>
+          <p:cNvPr id="34" name="TextBox 33"/>
+          <p:cNvSpPr txBox="1"/>
+          <p:nvPr/>
+        </p:nvSpPr>
+        <p:spPr>
+          <a:xfrm>
+            <a:off x="1546707" y="4654296"/>
+            <a:ext cx="2377440" cy="1051560"/>
+          </a:xfrm>
+          <a:prstGeom prst="rect">
+            <a:avLst/>
+          </a:prstGeom>
+          <a:noFill/>
+        </p:spPr>
+        <p:txBody>
+          <a:bodyPr wrap="square" lIns="45720" rIns="45720" tIns="18288" bIns="18288" anchor="ctr">
+            <a:spAutoFit/>
+          </a:bodyPr>
+          <a:lstStyle/>
+          <a:p>
+            <a:pPr algn="l"/>
+            <a:r>
+              <a:rPr sz="1400" b="1" i="0">
+                <a:solidFill>
+                  <a:srgbClr val="1B263A"/>
+                </a:solidFill>
+                <a:latin typeface="Calibri"/>
+              </a:rPr>
+              <a:t>Wie funktioniert KI-Steuerprüfung?</a:t>
+            </a:r>
+          </a:p>
+        </p:txBody>
+      </p:sp>
+      <p:sp>
+        <p:nvSpPr>
+          <p:cNvPr id="35" name="Rounded Rectangle 34"/>
+          <p:cNvSpPr/>
+          <p:nvPr/>
+        </p:nvSpPr>
+        <p:spPr>
+          <a:xfrm>
+            <a:off x="4244187" y="4471416"/>
+            <a:ext cx="3703320" cy="1417320"/>
+          </a:xfrm>
+          <a:prstGeom prst="roundRect">
+            <a:avLst>
+              <a:gd name="adj" fmla="val 8000"/>
+            </a:avLst>
+          </a:prstGeom>
+          <a:solidFill>
+            <a:srgbClr val="FFFFFF"/>
+          </a:solidFill>
+          <a:ln>
+            <a:noFill/>
+          </a:ln>
+          <a:effectLst/>
+        </p:spPr>
+        <p:style>
+          <a:lnRef idx="1">
+            <a:schemeClr val="accent1"/>
+          </a:lnRef>
+          <a:fillRef idx="3">
+            <a:schemeClr val="accent1"/>
+          </a:fillRef>
+          <a:effectRef idx="2">
+            <a:schemeClr val="accent1"/>
+          </a:effectRef>
+          <a:fontRef idx="minor">
+            <a:schemeClr val="lt1"/>
+          </a:fontRef>
+        </p:style>
+        <p:txBody>
+          <a:bodyPr rtlCol="0" anchor="ctr"/>
+          <a:lstStyle/>
+          <a:p>
+            <a:pPr algn="ctr"/>
+          </a:p>
+        </p:txBody>
+      </p:sp>
+      <p:sp>
+        <p:nvSpPr>
+          <p:cNvPr id="36" name="Rectangle 35"/>
+          <p:cNvSpPr/>
+          <p:nvPr/>
+        </p:nvSpPr>
+        <p:spPr>
+          <a:xfrm>
+            <a:off x="4244187" y="4471416"/>
+            <a:ext cx="137160" cy="1417320"/>
+          </a:xfrm>
+          <a:prstGeom prst="rect">
+            <a:avLst/>
+          </a:prstGeom>
+          <a:solidFill>
+            <a:srgbClr val="00C2A8"/>
+          </a:solidFill>
+          <a:ln>
+            <a:noFill/>
+          </a:ln>
+          <a:effectLst/>
+        </p:spPr>
+        <p:style>
+          <a:lnRef idx="1">
+            <a:schemeClr val="accent1"/>
+          </a:lnRef>
+          <a:fillRef idx="3">
+            <a:schemeClr val="accent1"/>
+          </a:fillRef>
+          <a:effectRef idx="2">
+            <a:schemeClr val="accent1"/>
+          </a:effectRef>
+          <a:fontRef idx="minor">
+            <a:schemeClr val="lt1"/>
+          </a:fontRef>
+        </p:style>
+        <p:txBody>
+          <a:bodyPr rtlCol="0" anchor="ctr"/>
+          <a:lstStyle/>
+          <a:p>
+            <a:pPr algn="ctr"/>
+          </a:p>
+        </p:txBody>
+      </p:sp>
+      <p:sp>
+        <p:nvSpPr>
+          <p:cNvPr id="37" name="TextBox 36"/>
+          <p:cNvSpPr txBox="1"/>
+          <p:nvPr/>
+        </p:nvSpPr>
+        <p:spPr>
+          <a:xfrm>
+            <a:off x="4518507" y="4608576"/>
+            <a:ext cx="914400" cy="640080"/>
+          </a:xfrm>
+          <a:prstGeom prst="rect">
+            <a:avLst/>
+          </a:prstGeom>
+          <a:noFill/>
+        </p:spPr>
+        <p:txBody>
+          <a:bodyPr wrap="square" lIns="45720" rIns="45720" tIns="18288" bIns="18288" anchor="ctr">
+            <a:spAutoFit/>
+          </a:bodyPr>
+          <a:lstStyle/>
+          <a:p>
+            <a:pPr algn="l"/>
+            <a:r>
+              <a:rPr sz="3200" b="1" i="0">
+                <a:solidFill>
+                  <a:srgbClr val="00C2A8"/>
+                </a:solidFill>
+                <a:latin typeface="Calibri"/>
+              </a:rPr>
+              <a:t>08</a:t>
+            </a:r>
+          </a:p>
+        </p:txBody>
+      </p:sp>
+      <p:sp>
+        <p:nvSpPr>
+          <p:cNvPr id="38" name="TextBox 37"/>
+          <p:cNvSpPr txBox="1"/>
+          <p:nvPr/>
+        </p:nvSpPr>
+        <p:spPr>
+          <a:xfrm>
+            <a:off x="5478627" y="4654296"/>
+            <a:ext cx="2377440" cy="1051560"/>
+          </a:xfrm>
+          <a:prstGeom prst="rect">
+            <a:avLst/>
+          </a:prstGeom>
+          <a:noFill/>
+        </p:spPr>
+        <p:txBody>
+          <a:bodyPr wrap="square" lIns="45720" rIns="45720" tIns="18288" bIns="18288" anchor="ctr">
+            <a:spAutoFit/>
+          </a:bodyPr>
+          <a:lstStyle/>
+          <a:p>
+            <a:pPr algn="l"/>
+            <a:r>
+              <a:rPr sz="1400" b="1" i="0">
+                <a:solidFill>
+                  <a:srgbClr val="1B263A"/>
+                </a:solidFill>
+                <a:latin typeface="Calibri"/>
+              </a:rPr>
+              <a:t>Chancen &amp; Risiken des KI-Einsatzes</a:t>
+            </a:r>
+          </a:p>
+        </p:txBody>
+      </p:sp>
+      <p:sp>
+        <p:nvSpPr>
+          <p:cNvPr id="39" name="Rounded Rectangle 38"/>
+          <p:cNvSpPr/>
+          <p:nvPr/>
+        </p:nvSpPr>
+        <p:spPr>
+          <a:xfrm>
+            <a:off x="8176107" y="4471416"/>
+            <a:ext cx="3703320" cy="1417320"/>
+          </a:xfrm>
+          <a:prstGeom prst="roundRect">
+            <a:avLst>
+              <a:gd name="adj" fmla="val 8000"/>
+            </a:avLst>
+          </a:prstGeom>
+          <a:solidFill>
+            <a:srgbClr val="FFFFFF"/>
+          </a:solidFill>
+          <a:ln>
+            <a:noFill/>
+          </a:ln>
+          <a:effectLst/>
+        </p:spPr>
+        <p:style>
+          <a:lnRef idx="1">
+            <a:schemeClr val="accent1"/>
+          </a:lnRef>
+          <a:fillRef idx="3">
+            <a:schemeClr val="accent1"/>
+          </a:fillRef>
+          <a:effectRef idx="2">
+            <a:schemeClr val="accent1"/>
+          </a:effectRef>
+          <a:fontRef idx="minor">
+            <a:schemeClr val="lt1"/>
+          </a:fontRef>
+        </p:style>
+        <p:txBody>
+          <a:bodyPr rtlCol="0" anchor="ctr"/>
+          <a:lstStyle/>
+          <a:p>
+            <a:pPr algn="ctr"/>
+          </a:p>
+        </p:txBody>
+      </p:sp>
+      <p:sp>
+        <p:nvSpPr>
+          <p:cNvPr id="40" name="Rectangle 39"/>
+          <p:cNvSpPr/>
+          <p:nvPr/>
+        </p:nvSpPr>
+        <p:spPr>
+          <a:xfrm>
+            <a:off x="8176107" y="4471416"/>
+            <a:ext cx="137160" cy="1417320"/>
+          </a:xfrm>
+          <a:prstGeom prst="rect">
+            <a:avLst/>
+          </a:prstGeom>
+          <a:solidFill>
+            <a:srgbClr val="00C2A8"/>
+          </a:solidFill>
+          <a:ln>
+            <a:noFill/>
+          </a:ln>
+          <a:effectLst/>
+        </p:spPr>
+        <p:style>
+          <a:lnRef idx="1">
+            <a:schemeClr val="accent1"/>
+          </a:lnRef>
+          <a:fillRef idx="3">
+            <a:schemeClr val="accent1"/>
+          </a:fillRef>
+          <a:effectRef idx="2">
+            <a:schemeClr val="accent1"/>
+          </a:effectRef>
+          <a:fontRef idx="minor">
+            <a:schemeClr val="lt1"/>
+          </a:fontRef>
+        </p:style>
+        <p:txBody>
+          <a:bodyPr rtlCol="0" anchor="ctr"/>
+          <a:lstStyle/>
+          <a:p>
+            <a:pPr algn="ctr"/>
+          </a:p>
+        </p:txBody>
+      </p:sp>
+      <p:sp>
+        <p:nvSpPr>
+          <p:cNvPr id="41" name="TextBox 40"/>
+          <p:cNvSpPr txBox="1"/>
+          <p:nvPr/>
+        </p:nvSpPr>
+        <p:spPr>
+          <a:xfrm>
+            <a:off x="8450427" y="4608576"/>
+            <a:ext cx="914400" cy="640080"/>
+          </a:xfrm>
+          <a:prstGeom prst="rect">
+            <a:avLst/>
+          </a:prstGeom>
+          <a:noFill/>
+        </p:spPr>
+        <p:txBody>
+          <a:bodyPr wrap="square" lIns="45720" rIns="45720" tIns="18288" bIns="18288" anchor="ctr">
+            <a:spAutoFit/>
+          </a:bodyPr>
+          <a:lstStyle/>
+          <a:p>
+            <a:pPr algn="l"/>
+            <a:r>
+              <a:rPr sz="3200" b="1" i="0">
+                <a:solidFill>
+                  <a:srgbClr val="00C2A8"/>
+                </a:solidFill>
+                <a:latin typeface="Calibri"/>
+              </a:rPr>
+              <a:t>09</a:t>
+            </a:r>
+          </a:p>
+        </p:txBody>
+      </p:sp>
+      <p:sp>
+        <p:nvSpPr>
+          <p:cNvPr id="42" name="TextBox 41"/>
+          <p:cNvSpPr txBox="1"/>
+          <p:nvPr/>
+        </p:nvSpPr>
+        <p:spPr>
+          <a:xfrm>
+            <a:off x="9410547" y="4654296"/>
+            <a:ext cx="2377440" cy="1051560"/>
+          </a:xfrm>
+          <a:prstGeom prst="rect">
+            <a:avLst/>
+          </a:prstGeom>
+          <a:noFill/>
+        </p:spPr>
+        <p:txBody>
+          <a:bodyPr wrap="square" lIns="45720" rIns="45720" tIns="18288" bIns="18288" anchor="ctr">
+            <a:spAutoFit/>
+          </a:bodyPr>
+          <a:lstStyle/>
+          <a:p>
+            <a:pPr algn="l"/>
+            <a:r>
+              <a:rPr sz="1400" b="1" i="0">
+                <a:solidFill>
+                  <a:srgbClr val="1B263A"/>
+                </a:solidFill>
+                <a:latin typeface="Calibri"/>
+              </a:rPr>
+              <a:t>Ausblick – 2026 und danach</a:t>
+            </a:r>
+          </a:p>
+        </p:txBody>
+      </p:sp>
+      <p:sp>
+        <p:nvSpPr>
+          <p:cNvPr id="43" name="Rectangle 42"/>
+          <p:cNvSpPr/>
+          <p:nvPr/>
+        </p:nvSpPr>
+        <p:spPr>
+          <a:xfrm>
+            <a:off x="0" y="6537960"/>
+            <a:ext cx="12191695" cy="320040"/>
+          </a:xfrm>
+          <a:prstGeom prst="rect">
+            <a:avLst/>
+          </a:prstGeom>
+          <a:solidFill>
+            <a:srgbClr val="07142E"/>
+          </a:solidFill>
+          <a:ln>
+            <a:noFill/>
+          </a:ln>
+          <a:effectLst/>
+        </p:spPr>
+        <p:style>
+          <a:lnRef idx="1">
+            <a:schemeClr val="accent1"/>
+          </a:lnRef>
+          <a:fillRef idx="3">
+            <a:schemeClr val="accent1"/>
+          </a:fillRef>
+          <a:effectRef idx="2">
+            <a:schemeClr val="accent1"/>
+          </a:effectRef>
+          <a:fontRef idx="minor">
+            <a:schemeClr val="lt1"/>
+          </a:fontRef>
+        </p:style>
+        <p:txBody>
+          <a:bodyPr rtlCol="0" anchor="ctr"/>
+          <a:lstStyle/>
+          <a:p>
+            <a:pPr algn="ctr"/>
+          </a:p>
+        </p:txBody>
+      </p:sp>
+      <p:sp>
+        <p:nvSpPr>
+          <p:cNvPr id="44" name="TextBox 43"/>
           <p:cNvSpPr txBox="1"/>
           <p:nvPr/>
         </p:nvSpPr>
@@ -12612,7 +13127,7 @@
       </p:sp>
       <p:sp>
         <p:nvSpPr>
-          <p:cNvPr id="32" name="TextBox 31"/>
+          <p:cNvPr id="45" name="TextBox 44"/>
           <p:cNvSpPr txBox="1"/>
           <p:nvPr/>
         </p:nvSpPr>
@@ -14487,7 +15002,7 @@
                 </a:solidFill>
                 <a:latin typeface="Calibri"/>
               </a:rPr>
-              <a:t>Folie 1 / 6</a:t>
+              <a:t>Folie 1 / 9</a:t>
             </a:r>
           </a:p>
         </p:txBody>
@@ -15369,7 +15884,7 @@
                 </a:solidFill>
                 <a:latin typeface="Calibri"/>
               </a:rPr>
-              <a:t>Folie 2 / 6</a:t>
+              <a:t>Folie 2 / 9</a:t>
             </a:r>
           </a:p>
         </p:txBody>
@@ -16262,7 +16777,7 @@
                 </a:solidFill>
                 <a:latin typeface="Calibri"/>
               </a:rPr>
-              <a:t>Folie 3 / 6</a:t>
+              <a:t>Folie 3 / 9</a:t>
             </a:r>
           </a:p>
         </p:txBody>
@@ -17155,7 +17670,7 @@
                 </a:solidFill>
                 <a:latin typeface="Calibri"/>
               </a:rPr>
-              <a:t>Folie 4 / 6</a:t>
+              <a:t>Folie 4 / 9</a:t>
             </a:r>
           </a:p>
         </p:txBody>
@@ -18048,7 +18563,7 @@
                 </a:solidFill>
                 <a:latin typeface="Calibri"/>
               </a:rPr>
-              <a:t>Folie 5 / 6</a:t>
+              <a:t>Folie 5 / 9</a:t>
             </a:r>
           </a:p>
         </p:txBody>
@@ -19196,7 +19711,7 @@
                 </a:solidFill>
                 <a:latin typeface="Calibri"/>
               </a:rPr>
-              <a:t>Folie 5 / 6</a:t>
+              <a:t>Folie 5 / 9</a:t>
             </a:r>
           </a:p>
         </p:txBody>
@@ -19738,7 +20253,7 @@
                 </a:solidFill>
                 <a:latin typeface="Calibri"/>
               </a:rPr>
-              <a:t>Folie 5 / 6</a:t>
+              <a:t>Folie 5 / 9</a:t>
             </a:r>
           </a:p>
         </p:txBody>
